--- a/VITCC_Library_Management_System_Presentation.pptx
+++ b/VITCC_Library_Management_System_Presentation.pptx
@@ -3124,7 +3124,7 @@
             <a:avLst/>
           </a:prstGeom>
           <a:solidFill>
-            <a:srgbClr val="0B0F19"/>
+            <a:srgbClr val="FFFFFF"/>
           </a:solidFill>
           <a:ln>
             <a:noFill/>
@@ -3154,20 +3154,20 @@
       </p:sp>
       <p:sp>
         <p:nvSpPr>
-          <p:cNvPr id="3" name="Oval 2"/>
+          <p:cNvPr id="3" name="Rectangle 2"/>
           <p:cNvSpPr/>
           <p:nvPr/>
         </p:nvSpPr>
         <p:spPr>
           <a:xfrm>
-            <a:off x="8686800" y="457200"/>
-            <a:ext cx="4114800" cy="4114800"/>
-          </a:xfrm>
-          <a:prstGeom prst="ellipse">
+            <a:off x="0" y="0"/>
+            <a:ext cx="12191695" cy="548640"/>
+          </a:xfrm>
+          <a:prstGeom prst="rect">
             <a:avLst/>
           </a:prstGeom>
           <a:solidFill>
-            <a:srgbClr val="192D50"/>
+            <a:srgbClr val="0F2547"/>
           </a:solidFill>
           <a:ln>
             <a:noFill/>
@@ -3197,24 +3197,60 @@
       </p:sp>
       <p:sp>
         <p:nvSpPr>
-          <p:cNvPr id="4" name="Rounded Rectangle 3"/>
+          <p:cNvPr id="4" name="TextBox 3"/>
+          <p:cNvSpPr txBox="1"/>
+          <p:nvPr/>
+        </p:nvSpPr>
+        <p:spPr>
+          <a:xfrm>
+            <a:off x="731520" y="109728"/>
+            <a:ext cx="10728655" cy="365760"/>
+          </a:xfrm>
+          <a:prstGeom prst="rect">
+            <a:avLst/>
+          </a:prstGeom>
+          <a:noFill/>
+        </p:spPr>
+        <p:txBody>
+          <a:bodyPr wrap="none">
+            <a:spAutoFit/>
+          </a:bodyPr>
+          <a:lstStyle/>
+          <a:p>
+            <a:pPr algn="ctr">
+              <a:defRPr sz="1050" b="1">
+                <a:solidFill>
+                  <a:srgbClr val="FFFFFF"/>
+                </a:solidFill>
+                <a:latin typeface="Segoe UI"/>
+              </a:defRPr>
+            </a:pPr>
+            <a:r>
+              <a:t>VELLORE INSTITUTE OF TECHNOLOGY (VIT), CHENNAI  •  SCHOOL OF COMPUTER SCIENCE AND ENGINEERING (SCOPE)</a:t>
+            </a:r>
+          </a:p>
+        </p:txBody>
+      </p:sp>
+      <p:sp>
+        <p:nvSpPr>
+          <p:cNvPr id="5" name="Rounded Rectangle 4"/>
           <p:cNvSpPr/>
           <p:nvPr/>
         </p:nvSpPr>
         <p:spPr>
           <a:xfrm>
-            <a:off x="914400" y="822960"/>
-            <a:ext cx="10362895" cy="5212080"/>
+            <a:off x="731520" y="822960"/>
+            <a:ext cx="10728655" cy="2286000"/>
           </a:xfrm>
           <a:prstGeom prst="roundRect">
             <a:avLst/>
           </a:prstGeom>
           <a:solidFill>
-            <a:srgbClr val="101828"/>
+            <a:srgbClr val="F8FAFC"/>
           </a:solidFill>
           <a:ln w="12700">
             <a:solidFill>
-              <a:srgbClr val="3B82F6"/>
+              <a:srgbClr val="CBD5E1"/>
             </a:solidFill>
           </a:ln>
         </p:spPr>
@@ -3242,14 +3278,14 @@
       </p:sp>
       <p:sp>
         <p:nvSpPr>
-          <p:cNvPr id="5" name="TextBox 4"/>
+          <p:cNvPr id="6" name="TextBox 5"/>
           <p:cNvSpPr txBox="1"/>
           <p:nvPr/>
         </p:nvSpPr>
         <p:spPr>
           <a:xfrm>
-            <a:off x="1280160" y="1051560"/>
-            <a:ext cx="9601200" cy="2103120"/>
+            <a:off x="1005840" y="1005840"/>
+            <a:ext cx="10180015" cy="1920240"/>
           </a:xfrm>
           <a:prstGeom prst="rect">
             <a:avLst/>
@@ -3263,9 +3299,9 @@
           <a:lstStyle/>
           <a:p>
             <a:pPr>
-              <a:defRPr sz="2800" b="1">
-                <a:solidFill>
-                  <a:srgbClr val="F8FAFC"/>
+              <a:defRPr sz="2600" b="1">
+                <a:solidFill>
+                  <a:srgbClr val="0F2547"/>
                 </a:solidFill>
                 <a:latin typeface="Segoe UI"/>
               </a:defRPr>
@@ -3279,15 +3315,15 @@
               <a:spcBef>
                 <a:spcPts val="600"/>
               </a:spcBef>
-              <a:defRPr sz="1400">
-                <a:solidFill>
-                  <a:srgbClr val="06B6D4"/>
+              <a:defRPr sz="1300" b="1">
+                <a:solidFill>
+                  <a:srgbClr val="1E40AF"/>
                 </a:solidFill>
                 <a:latin typeface="Segoe UI"/>
               </a:defRPr>
             </a:pPr>
             <a:r>
-              <a:t>Dual-Paradigm Relational &amp; Graph Database Architecture for Next-Generation Academic Libraries</a:t>
+              <a:t>Dual-Paradigm Relational (Oracle 21c) and Graph (Neo4j AuraDB) Database Application Project</a:t>
             </a:r>
           </a:p>
           <a:p>
@@ -3297,37 +3333,37 @@
               </a:spcBef>
               <a:defRPr sz="1100">
                 <a:solidFill>
-                  <a:srgbClr val="94A3B8"/>
+                  <a:srgbClr val="475569"/>
                 </a:solidFill>
                 <a:latin typeface="Segoe UI"/>
               </a:defRPr>
             </a:pPr>
             <a:r>
-              <a:t>Comprehensive Database Design, PL/SQL Automation, Neo4j AuraDB Integration &amp; RBAC Security</a:t>
-            </a:r>
-          </a:p>
-        </p:txBody>
-      </p:sp>
-      <p:sp>
-        <p:nvSpPr>
-          <p:cNvPr id="6" name="Rounded Rectangle 5"/>
+              <a:t>Course Project Assessment (DA-3) covering Schema Normalization, PL/SQL Automation, Graph Traversal &amp; Role-Based Access Control</a:t>
+            </a:r>
+          </a:p>
+        </p:txBody>
+      </p:sp>
+      <p:sp>
+        <p:nvSpPr>
+          <p:cNvPr id="7" name="Rounded Rectangle 6"/>
           <p:cNvSpPr/>
           <p:nvPr/>
         </p:nvSpPr>
         <p:spPr>
           <a:xfrm>
-            <a:off x="1280160" y="3291840"/>
-            <a:ext cx="4389120" cy="2377440"/>
+            <a:off x="731520" y="3291840"/>
+            <a:ext cx="5212080" cy="3108960"/>
           </a:xfrm>
           <a:prstGeom prst="roundRect">
             <a:avLst/>
           </a:prstGeom>
           <a:solidFill>
-            <a:srgbClr val="182238"/>
+            <a:srgbClr val="FFFFFF"/>
           </a:solidFill>
           <a:ln w="12700">
             <a:solidFill>
-              <a:srgbClr val="2D3C5A"/>
+              <a:srgbClr val="CBD5E1"/>
             </a:solidFill>
           </a:ln>
         </p:spPr>
@@ -3355,14 +3391,14 @@
       </p:sp>
       <p:sp>
         <p:nvSpPr>
-          <p:cNvPr id="7" name="TextBox 6"/>
+          <p:cNvPr id="8" name="TextBox 7"/>
           <p:cNvSpPr txBox="1"/>
           <p:nvPr/>
         </p:nvSpPr>
         <p:spPr>
           <a:xfrm>
-            <a:off x="1463040" y="3429000"/>
-            <a:ext cx="4023360" cy="2103120"/>
+            <a:off x="1005840" y="3474720"/>
+            <a:ext cx="4663440" cy="2743200"/>
           </a:xfrm>
           <a:prstGeom prst="rect">
             <a:avLst/>
@@ -3376,35 +3412,35 @@
           <a:lstStyle/>
           <a:p>
             <a:pPr>
-              <a:defRPr sz="1100" b="1">
-                <a:solidFill>
-                  <a:srgbClr val="3B82F6"/>
+              <a:defRPr sz="1200" b="1">
+                <a:solidFill>
+                  <a:srgbClr val="0F2547"/>
                 </a:solidFill>
                 <a:latin typeface="Segoe UI"/>
               </a:defRPr>
             </a:pPr>
             <a:r>
-              <a:t>ACADEMIC COURSE DETAILS</a:t>
+              <a:t>COURSE &amp; FACULTY DETAILS</a:t>
             </a:r>
           </a:p>
           <a:p>
             <a:pPr>
               <a:spcBef>
-                <a:spcPts val="300"/>
+                <a:spcPts val="400"/>
               </a:spcBef>
             </a:pPr>
             <a:r>
-              <a:rPr b="1" sz="1000">
-                <a:solidFill>
-                  <a:srgbClr val="F8FAFC"/>
+              <a:rPr b="1" sz="1050">
+                <a:solidFill>
+                  <a:srgbClr val="1E293B"/>
                 </a:solidFill>
               </a:rPr>
               <a:t>Course Code: </a:t>
             </a:r>
             <a:r>
-              <a:rPr sz="1000">
-                <a:solidFill>
-                  <a:srgbClr val="94A3B8"/>
+              <a:rPr sz="1050">
+                <a:solidFill>
+                  <a:srgbClr val="475569"/>
                 </a:solidFill>
               </a:rPr>
               <a:t>BACSE202</a:t>
@@ -3413,21 +3449,21 @@
           <a:p>
             <a:pPr>
               <a:spcBef>
-                <a:spcPts val="300"/>
+                <a:spcPts val="400"/>
               </a:spcBef>
             </a:pPr>
             <a:r>
-              <a:rPr b="1" sz="1000">
-                <a:solidFill>
-                  <a:srgbClr val="F8FAFC"/>
+              <a:rPr b="1" sz="1050">
+                <a:solidFill>
+                  <a:srgbClr val="1E293B"/>
                 </a:solidFill>
               </a:rPr>
               <a:t>Course Name: </a:t>
             </a:r>
             <a:r>
-              <a:rPr sz="1000">
-                <a:solidFill>
-                  <a:srgbClr val="94A3B8"/>
+              <a:rPr sz="1050">
+                <a:solidFill>
+                  <a:srgbClr val="475569"/>
                 </a:solidFill>
               </a:rPr>
               <a:t>Database Systems</a:t>
@@ -3436,21 +3472,21 @@
           <a:p>
             <a:pPr>
               <a:spcBef>
-                <a:spcPts val="300"/>
+                <a:spcPts val="400"/>
               </a:spcBef>
             </a:pPr>
             <a:r>
-              <a:rPr b="1" sz="1000">
-                <a:solidFill>
-                  <a:srgbClr val="F8FAFC"/>
+              <a:rPr b="1" sz="1050">
+                <a:solidFill>
+                  <a:srgbClr val="1E293B"/>
                 </a:solidFill>
               </a:rPr>
-              <a:t>Slot: </a:t>
-            </a:r>
-            <a:r>
-              <a:rPr sz="1000">
-                <a:solidFill>
-                  <a:srgbClr val="06B6D4"/>
+              <a:t>Class Slot: </a:t>
+            </a:r>
+            <a:r>
+              <a:rPr sz="1050">
+                <a:solidFill>
+                  <a:srgbClr val="1E40AF"/>
                 </a:solidFill>
               </a:rPr>
               <a:t>F1+TF1</a:t>
@@ -3459,21 +3495,21 @@
           <a:p>
             <a:pPr>
               <a:spcBef>
-                <a:spcPts val="300"/>
+                <a:spcPts val="400"/>
               </a:spcBef>
             </a:pPr>
             <a:r>
-              <a:rPr b="1" sz="1000">
-                <a:solidFill>
-                  <a:srgbClr val="F8FAFC"/>
+              <a:rPr b="1" sz="1050">
+                <a:solidFill>
+                  <a:srgbClr val="1E293B"/>
                 </a:solidFill>
               </a:rPr>
               <a:t>Faculty Guide: </a:t>
             </a:r>
             <a:r>
-              <a:rPr sz="1000">
-                <a:solidFill>
-                  <a:srgbClr val="94A3B8"/>
+              <a:rPr sz="1050">
+                <a:solidFill>
+                  <a:srgbClr val="475569"/>
                 </a:solidFill>
               </a:rPr>
               <a:t>Dr. R. Priyadarshini</a:t>
@@ -3482,71 +3518,71 @@
           <a:p>
             <a:pPr>
               <a:spcBef>
-                <a:spcPts val="300"/>
+                <a:spcPts val="400"/>
               </a:spcBef>
             </a:pPr>
             <a:r>
-              <a:rPr b="1" sz="1000">
-                <a:solidFill>
-                  <a:srgbClr val="F8FAFC"/>
+              <a:rPr b="1" sz="1050">
+                <a:solidFill>
+                  <a:srgbClr val="1E293B"/>
                 </a:solidFill>
               </a:rPr>
               <a:t>Department: </a:t>
             </a:r>
             <a:r>
-              <a:rPr sz="1000">
-                <a:solidFill>
-                  <a:srgbClr val="94A3B8"/>
+              <a:rPr sz="1050">
+                <a:solidFill>
+                  <a:srgbClr val="475569"/>
                 </a:solidFill>
               </a:rPr>
-              <a:t>School of Computer Science &amp; Eng. (SCOPE)</a:t>
+              <a:t>Department of Computer Science &amp; Engineering</a:t>
             </a:r>
           </a:p>
           <a:p>
             <a:pPr>
               <a:spcBef>
-                <a:spcPts val="300"/>
+                <a:spcPts val="400"/>
               </a:spcBef>
             </a:pPr>
             <a:r>
-              <a:rPr b="1" sz="1000">
-                <a:solidFill>
-                  <a:srgbClr val="F8FAFC"/>
+              <a:rPr b="1" sz="1050">
+                <a:solidFill>
+                  <a:srgbClr val="1E293B"/>
                 </a:solidFill>
               </a:rPr>
               <a:t>Institution: </a:t>
             </a:r>
             <a:r>
-              <a:rPr sz="1000">
-                <a:solidFill>
-                  <a:srgbClr val="94A3B8"/>
+              <a:rPr sz="1050">
+                <a:solidFill>
+                  <a:srgbClr val="475569"/>
                 </a:solidFill>
               </a:rPr>
-              <a:t>Vellore Institute of Technology, Chennai</a:t>
-            </a:r>
-          </a:p>
-        </p:txBody>
-      </p:sp>
-      <p:sp>
-        <p:nvSpPr>
-          <p:cNvPr id="8" name="Rounded Rectangle 7"/>
+              <a:t>VIT Chennai Campus</a:t>
+            </a:r>
+          </a:p>
+        </p:txBody>
+      </p:sp>
+      <p:sp>
+        <p:nvSpPr>
+          <p:cNvPr id="9" name="Rounded Rectangle 8"/>
           <p:cNvSpPr/>
           <p:nvPr/>
         </p:nvSpPr>
         <p:spPr>
           <a:xfrm>
-            <a:off x="5943600" y="3291840"/>
-            <a:ext cx="4937760" cy="2377440"/>
+            <a:off x="6217920" y="3291840"/>
+            <a:ext cx="5242255" cy="3108960"/>
           </a:xfrm>
           <a:prstGeom prst="roundRect">
             <a:avLst/>
           </a:prstGeom>
           <a:solidFill>
-            <a:srgbClr val="182238"/>
+            <a:srgbClr val="FFFFFF"/>
           </a:solidFill>
           <a:ln w="12700">
             <a:solidFill>
-              <a:srgbClr val="2D3C5A"/>
+              <a:srgbClr val="CBD5E1"/>
             </a:solidFill>
           </a:ln>
         </p:spPr>
@@ -3574,14 +3610,14 @@
       </p:sp>
       <p:sp>
         <p:nvSpPr>
-          <p:cNvPr id="9" name="TextBox 8"/>
+          <p:cNvPr id="10" name="TextBox 9"/>
           <p:cNvSpPr txBox="1"/>
           <p:nvPr/>
         </p:nvSpPr>
         <p:spPr>
           <a:xfrm>
-            <a:off x="6126480" y="3429000"/>
-            <a:ext cx="4572000" cy="2103120"/>
+            <a:off x="6492240" y="3474720"/>
+            <a:ext cx="4693615" cy="2743200"/>
           </a:xfrm>
           <a:prstGeom prst="rect">
             <a:avLst/>
@@ -3595,123 +3631,120 @@
           <a:lstStyle/>
           <a:p>
             <a:pPr>
-              <a:defRPr sz="1100" b="1">
-                <a:solidFill>
-                  <a:srgbClr val="10B981"/>
+              <a:defRPr sz="1200" b="1">
+                <a:solidFill>
+                  <a:srgbClr val="0F2547"/>
                 </a:solidFill>
                 <a:latin typeface="Segoe UI"/>
               </a:defRPr>
             </a:pPr>
             <a:r>
-              <a:t>PROJECT DEVELOPMENT TEAM</a:t>
+              <a:t>SUBMITTED BY (PROJECT TEAM)</a:t>
             </a:r>
           </a:p>
           <a:p>
             <a:pPr>
               <a:spcBef>
-                <a:spcPts val="600"/>
+                <a:spcPts val="800"/>
               </a:spcBef>
             </a:pPr>
             <a:r>
               <a:rPr b="1" sz="1100">
                 <a:solidFill>
-                  <a:srgbClr val="F8FAFC"/>
+                  <a:srgbClr val="1E293B"/>
                 </a:solidFill>
               </a:rPr>
               <a:t>KARTHIK VALLIAPPAN C  </a:t>
             </a:r>
             <a:r>
-              <a:rPr sz="1000">
-                <a:solidFill>
-                  <a:srgbClr val="F59E0B"/>
-                </a:solidFill>
-                <a:latin typeface="Consolas"/>
+              <a:rPr b="1" sz="1050">
+                <a:solidFill>
+                  <a:srgbClr val="1E40AF"/>
+                </a:solidFill>
               </a:rPr>
-              <a:t>[25BAI1051]</a:t>
-            </a:r>
-          </a:p>
-          <a:p>
-            <a:pPr>
-              <a:defRPr sz="900">
-                <a:solidFill>
-                  <a:srgbClr val="94A3B8"/>
-                </a:solidFill>
-              </a:defRPr>
-            </a:pPr>
-            <a:r>
-              <a:t>Lead Architecture, Graph Modeling, Backend &amp; RBAC</a:t>
+              <a:t>(25BAI1051)</a:t>
+            </a:r>
+          </a:p>
+          <a:p>
+            <a:pPr>
+              <a:defRPr sz="950">
+                <a:solidFill>
+                  <a:srgbClr val="475569"/>
+                </a:solidFill>
+              </a:defRPr>
+            </a:pPr>
+            <a:r>
+              <a:t>System Architecture, Neo4j Graph Model &amp; Web Controllers</a:t>
             </a:r>
           </a:p>
           <a:p>
             <a:pPr>
               <a:spcBef>
-                <a:spcPts val="600"/>
+                <a:spcPts val="800"/>
               </a:spcBef>
             </a:pPr>
             <a:r>
               <a:rPr b="1" sz="1100">
                 <a:solidFill>
-                  <a:srgbClr val="F8FAFC"/>
+                  <a:srgbClr val="1E293B"/>
                 </a:solidFill>
               </a:rPr>
               <a:t>NITHIN RANGASWAMY  </a:t>
             </a:r>
             <a:r>
-              <a:rPr sz="1000">
-                <a:solidFill>
-                  <a:srgbClr val="F59E0B"/>
-                </a:solidFill>
-                <a:latin typeface="Consolas"/>
+              <a:rPr b="1" sz="1050">
+                <a:solidFill>
+                  <a:srgbClr val="1E40AF"/>
+                </a:solidFill>
               </a:rPr>
-              <a:t>[25BAI1210]</a:t>
-            </a:r>
-          </a:p>
-          <a:p>
-            <a:pPr>
-              <a:defRPr sz="900">
-                <a:solidFill>
-                  <a:srgbClr val="94A3B8"/>
-                </a:solidFill>
-              </a:defRPr>
-            </a:pPr>
-            <a:r>
-              <a:t>Database Schema, SQL DDL/DML, Constraints &amp; Auditing</a:t>
+              <a:t>(25BAI1210)</a:t>
+            </a:r>
+          </a:p>
+          <a:p>
+            <a:pPr>
+              <a:defRPr sz="950">
+                <a:solidFill>
+                  <a:srgbClr val="475569"/>
+                </a:solidFill>
+              </a:defRPr>
+            </a:pPr>
+            <a:r>
+              <a:t>Relational Schema, Oracle DDL/DML, Constraints &amp; Auditing</a:t>
             </a:r>
           </a:p>
           <a:p>
             <a:pPr>
               <a:spcBef>
-                <a:spcPts val="600"/>
+                <a:spcPts val="800"/>
               </a:spcBef>
             </a:pPr>
             <a:r>
               <a:rPr b="1" sz="1100">
                 <a:solidFill>
-                  <a:srgbClr val="F8FAFC"/>
+                  <a:srgbClr val="1E293B"/>
                 </a:solidFill>
               </a:rPr>
               <a:t>NATRAJ  </a:t>
             </a:r>
             <a:r>
-              <a:rPr sz="1000">
-                <a:solidFill>
-                  <a:srgbClr val="F59E0B"/>
-                </a:solidFill>
-                <a:latin typeface="Consolas"/>
+              <a:rPr b="1" sz="1050">
+                <a:solidFill>
+                  <a:srgbClr val="1E40AF"/>
+                </a:solidFill>
               </a:rPr>
-              <a:t>[25BAI1079]</a:t>
-            </a:r>
-          </a:p>
-          <a:p>
-            <a:pPr>
-              <a:defRPr sz="900">
-                <a:solidFill>
-                  <a:srgbClr val="94A3B8"/>
-                </a:solidFill>
-              </a:defRPr>
-            </a:pPr>
-            <a:r>
-              <a:t>PL/SQL Programming, Stored Procedures &amp; Triggers</a:t>
+              <a:t>(25BAI1079)</a:t>
+            </a:r>
+          </a:p>
+          <a:p>
+            <a:pPr>
+              <a:defRPr sz="950">
+                <a:solidFill>
+                  <a:srgbClr val="475569"/>
+                </a:solidFill>
+              </a:defRPr>
+            </a:pPr>
+            <a:r>
+              <a:t>PL/SQL Programming, Stored Procedures, Functions &amp; Triggers</a:t>
             </a:r>
           </a:p>
         </p:txBody>
@@ -3749,7 +3782,7 @@
             <a:avLst/>
           </a:prstGeom>
           <a:solidFill>
-            <a:srgbClr val="0B0F19"/>
+            <a:srgbClr val="F8FAFC"/>
           </a:solidFill>
           <a:ln>
             <a:noFill/>
@@ -3785,14 +3818,14 @@
         </p:nvSpPr>
         <p:spPr>
           <a:xfrm>
-            <a:off x="731520" y="365760"/>
-            <a:ext cx="10728655" cy="36576"/>
+            <a:off x="0" y="0"/>
+            <a:ext cx="12191695" cy="73152"/>
           </a:xfrm>
           <a:prstGeom prst="rect">
             <a:avLst/>
           </a:prstGeom>
           <a:solidFill>
-            <a:srgbClr val="3B82F6"/>
+            <a:srgbClr val="1E40AF"/>
           </a:solidFill>
           <a:ln>
             <a:noFill/>
@@ -3828,8 +3861,8 @@
         </p:nvSpPr>
         <p:spPr>
           <a:xfrm>
-            <a:off x="731520" y="502920"/>
-            <a:ext cx="7315200" cy="274320"/>
+            <a:off x="731520" y="320040"/>
+            <a:ext cx="7772400" cy="256032"/>
           </a:xfrm>
           <a:prstGeom prst="rect">
             <a:avLst/>
@@ -3845,7 +3878,7 @@
             <a:pPr>
               <a:defRPr sz="1000" b="1">
                 <a:solidFill>
-                  <a:srgbClr val="06B6D4"/>
+                  <a:srgbClr val="1E40AF"/>
                 </a:solidFill>
                 <a:latin typeface="Segoe UI"/>
               </a:defRPr>
@@ -3864,7 +3897,7 @@
         </p:nvSpPr>
         <p:spPr>
           <a:xfrm>
-            <a:off x="731520" y="777240"/>
+            <a:off x="731520" y="594360"/>
             <a:ext cx="9601200" cy="548640"/>
           </a:xfrm>
           <a:prstGeom prst="rect">
@@ -3879,9 +3912,9 @@
           <a:lstStyle/>
           <a:p>
             <a:pPr>
-              <a:defRPr sz="2200" b="1">
-                <a:solidFill>
-                  <a:srgbClr val="F8FAFC"/>
+              <a:defRPr sz="2100" b="1">
+                <a:solidFill>
+                  <a:srgbClr val="0F2547"/>
                 </a:solidFill>
                 <a:latin typeface="Segoe UI"/>
               </a:defRPr>
@@ -3900,7 +3933,7 @@
         </p:nvSpPr>
         <p:spPr>
           <a:xfrm>
-            <a:off x="10515600" y="640080"/>
+            <a:off x="10515600" y="411480"/>
             <a:ext cx="914400" cy="365760"/>
           </a:xfrm>
           <a:prstGeom prst="rect">
@@ -3917,9 +3950,9 @@
             <a:pPr algn="r">
               <a:defRPr sz="1100" b="1">
                 <a:solidFill>
-                  <a:srgbClr val="64748B"/>
-                </a:solidFill>
-                <a:latin typeface="Consolas"/>
+                  <a:srgbClr val="475569"/>
+                </a:solidFill>
+                <a:latin typeface="Segoe UI"/>
               </a:defRPr>
             </a:pPr>
             <a:r>
@@ -3936,18 +3969,18 @@
         </p:nvSpPr>
         <p:spPr>
           <a:xfrm>
-            <a:off x="731520" y="1554480"/>
-            <a:ext cx="3456432" cy="4846320"/>
+            <a:off x="731520" y="1371600"/>
+            <a:ext cx="3456432" cy="4937760"/>
           </a:xfrm>
           <a:prstGeom prst="roundRect">
             <a:avLst/>
           </a:prstGeom>
           <a:solidFill>
-            <a:srgbClr val="0F172A"/>
+            <a:srgbClr val="FFFFFF"/>
           </a:solidFill>
           <a:ln w="12700">
             <a:solidFill>
-              <a:srgbClr val="2D3C5A"/>
+              <a:srgbClr val="CBD5E1"/>
             </a:solidFill>
           </a:ln>
         </p:spPr>
@@ -3981,14 +4014,14 @@
         </p:nvSpPr>
         <p:spPr>
           <a:xfrm>
-            <a:off x="731520" y="1554480"/>
-            <a:ext cx="3456432" cy="73152"/>
+            <a:off x="731520" y="1371600"/>
+            <a:ext cx="3456432" cy="411480"/>
           </a:xfrm>
           <a:prstGeom prst="rect">
             <a:avLst/>
           </a:prstGeom>
           <a:solidFill>
-            <a:srgbClr val="3B82F6"/>
+            <a:srgbClr val="0F2547"/>
           </a:solidFill>
           <a:ln>
             <a:noFill/>
@@ -4024,8 +4057,43 @@
         </p:nvSpPr>
         <p:spPr>
           <a:xfrm>
-            <a:off x="868680" y="1691640"/>
-            <a:ext cx="3182112" cy="4572000"/>
+            <a:off x="731520" y="1426464"/>
+            <a:ext cx="3456432" cy="320040"/>
+          </a:xfrm>
+          <a:prstGeom prst="rect">
+            <a:avLst/>
+          </a:prstGeom>
+          <a:noFill/>
+        </p:spPr>
+        <p:txBody>
+          <a:bodyPr wrap="none">
+            <a:spAutoFit/>
+          </a:bodyPr>
+          <a:lstStyle/>
+          <a:p>
+            <a:pPr algn="ctr">
+              <a:defRPr b="1" sz="950">
+                <a:solidFill>
+                  <a:srgbClr val="FFFFFF"/>
+                </a:solidFill>
+              </a:defRPr>
+            </a:pPr>
+            <a:r>
+              <a:t>DDL (DATA DEFINITION)</a:t>
+            </a:r>
+          </a:p>
+        </p:txBody>
+      </p:sp>
+      <p:sp>
+        <p:nvSpPr>
+          <p:cNvPr id="10" name="TextBox 9"/>
+          <p:cNvSpPr txBox="1"/>
+          <p:nvPr/>
+        </p:nvSpPr>
+        <p:spPr>
+          <a:xfrm>
+            <a:off x="868680" y="1874520"/>
+            <a:ext cx="3182112" cy="4343400"/>
           </a:xfrm>
           <a:prstGeom prst="rect">
             <a:avLst/>
@@ -4037,19 +4105,7 @@
             <a:spAutoFit/>
           </a:bodyPr>
           <a:lstStyle/>
-          <a:p>
-            <a:pPr>
-              <a:defRPr sz="1100" b="1">
-                <a:solidFill>
-                  <a:srgbClr val="3B82F6"/>
-                </a:solidFill>
-                <a:latin typeface="Segoe UI"/>
-              </a:defRPr>
-            </a:pPr>
-            <a:r>
-              <a:t>DDL (DATA DEFINITION LANGUAGE)</a:t>
-            </a:r>
-          </a:p>
+          <a:p/>
           <a:p>
             <a:pPr>
               <a:spcBef>
@@ -4057,7 +4113,7 @@
               </a:spcBef>
               <a:defRPr b="1" sz="950">
                 <a:solidFill>
-                  <a:srgbClr val="F8FAFC"/>
+                  <a:srgbClr val="1E40AF"/>
                 </a:solidFill>
               </a:defRPr>
             </a:pPr>
@@ -4072,7 +4128,7 @@
               </a:spcBef>
               <a:defRPr sz="800">
                 <a:solidFill>
-                  <a:srgbClr val="BAE6FD"/>
+                  <a:srgbClr val="0F172A"/>
                 </a:solidFill>
                 <a:latin typeface="Consolas"/>
               </a:defRPr>
@@ -4086,11 +4142,11 @@
             </a:r>
             <a:br/>
             <a:r>
-              <a:t>  user_id NUMBER REFERENCES USERS(user_id),</a:t>
-            </a:r>
-            <a:br/>
-            <a:r>
-              <a:t>  book_id NUMBER REFERENCES BOOKS(book_id),</a:t>
+              <a:t>  user_id NUMBER REFERENCES USERS,</a:t>
+            </a:r>
+            <a:br/>
+            <a:r>
+              <a:t>  book_id NUMBER REFERENCES BOOKS,</a:t>
             </a:r>
             <a:br/>
             <a:r>
@@ -4108,7 +4164,7 @@
               </a:spcBef>
               <a:defRPr b="1" sz="950">
                 <a:solidFill>
-                  <a:srgbClr val="F8FAFC"/>
+                  <a:srgbClr val="1E40AF"/>
                 </a:solidFill>
               </a:defRPr>
             </a:pPr>
@@ -4123,7 +4179,7 @@
               </a:spcBef>
               <a:defRPr sz="800">
                 <a:solidFill>
-                  <a:srgbClr val="BAE6FD"/>
+                  <a:srgbClr val="0F172A"/>
                 </a:solidFill>
                 <a:latin typeface="Consolas"/>
               </a:defRPr>
@@ -4143,7 +4199,7 @@
               </a:spcBef>
               <a:defRPr b="1" sz="950">
                 <a:solidFill>
-                  <a:srgbClr val="F8FAFC"/>
+                  <a:srgbClr val="1E40AF"/>
                 </a:solidFill>
               </a:defRPr>
             </a:pPr>
@@ -4158,7 +4214,7 @@
               </a:spcBef>
               <a:defRPr sz="800">
                 <a:solidFill>
-                  <a:srgbClr val="BAE6FD"/>
+                  <a:srgbClr val="0F172A"/>
                 </a:solidFill>
                 <a:latin typeface="Consolas"/>
               </a:defRPr>
@@ -4171,24 +4227,24 @@
       </p:sp>
       <p:sp>
         <p:nvSpPr>
-          <p:cNvPr id="10" name="Rounded Rectangle 9"/>
+          <p:cNvPr id="11" name="Rounded Rectangle 10"/>
           <p:cNvSpPr/>
           <p:nvPr/>
         </p:nvSpPr>
         <p:spPr>
           <a:xfrm>
-            <a:off x="4370832" y="1554480"/>
-            <a:ext cx="3456432" cy="4846320"/>
+            <a:off x="4370832" y="1371600"/>
+            <a:ext cx="3456432" cy="4937760"/>
           </a:xfrm>
           <a:prstGeom prst="roundRect">
             <a:avLst/>
           </a:prstGeom>
           <a:solidFill>
-            <a:srgbClr val="0F172A"/>
+            <a:srgbClr val="FFFFFF"/>
           </a:solidFill>
           <a:ln w="12700">
             <a:solidFill>
-              <a:srgbClr val="2D3C5A"/>
+              <a:srgbClr val="CBD5E1"/>
             </a:solidFill>
           </a:ln>
         </p:spPr>
@@ -4216,20 +4272,20 @@
       </p:sp>
       <p:sp>
         <p:nvSpPr>
-          <p:cNvPr id="11" name="Rectangle 10"/>
+          <p:cNvPr id="12" name="Rectangle 11"/>
           <p:cNvSpPr/>
           <p:nvPr/>
         </p:nvSpPr>
         <p:spPr>
           <a:xfrm>
-            <a:off x="4370832" y="1554480"/>
-            <a:ext cx="3456432" cy="73152"/>
+            <a:off x="4370832" y="1371600"/>
+            <a:ext cx="3456432" cy="411480"/>
           </a:xfrm>
           <a:prstGeom prst="rect">
             <a:avLst/>
           </a:prstGeom>
           <a:solidFill>
-            <a:srgbClr val="10B981"/>
+            <a:srgbClr val="0F2547"/>
           </a:solidFill>
           <a:ln>
             <a:noFill/>
@@ -4259,14 +4315,49 @@
       </p:sp>
       <p:sp>
         <p:nvSpPr>
-          <p:cNvPr id="12" name="TextBox 11"/>
+          <p:cNvPr id="13" name="TextBox 12"/>
           <p:cNvSpPr txBox="1"/>
           <p:nvPr/>
         </p:nvSpPr>
         <p:spPr>
           <a:xfrm>
-            <a:off x="4507992" y="1691640"/>
-            <a:ext cx="3182112" cy="4572000"/>
+            <a:off x="4370832" y="1426464"/>
+            <a:ext cx="3456432" cy="320040"/>
+          </a:xfrm>
+          <a:prstGeom prst="rect">
+            <a:avLst/>
+          </a:prstGeom>
+          <a:noFill/>
+        </p:spPr>
+        <p:txBody>
+          <a:bodyPr wrap="none">
+            <a:spAutoFit/>
+          </a:bodyPr>
+          <a:lstStyle/>
+          <a:p>
+            <a:pPr algn="ctr">
+              <a:defRPr b="1" sz="950">
+                <a:solidFill>
+                  <a:srgbClr val="FFFFFF"/>
+                </a:solidFill>
+              </a:defRPr>
+            </a:pPr>
+            <a:r>
+              <a:t>DML (DATA MANIPULATION)</a:t>
+            </a:r>
+          </a:p>
+        </p:txBody>
+      </p:sp>
+      <p:sp>
+        <p:nvSpPr>
+          <p:cNvPr id="14" name="TextBox 13"/>
+          <p:cNvSpPr txBox="1"/>
+          <p:nvPr/>
+        </p:nvSpPr>
+        <p:spPr>
+          <a:xfrm>
+            <a:off x="4507992" y="1874520"/>
+            <a:ext cx="3182112" cy="4343400"/>
           </a:xfrm>
           <a:prstGeom prst="rect">
             <a:avLst/>
@@ -4278,19 +4369,7 @@
             <a:spAutoFit/>
           </a:bodyPr>
           <a:lstStyle/>
-          <a:p>
-            <a:pPr>
-              <a:defRPr sz="1100" b="1">
-                <a:solidFill>
-                  <a:srgbClr val="10B981"/>
-                </a:solidFill>
-                <a:latin typeface="Segoe UI"/>
-              </a:defRPr>
-            </a:pPr>
-            <a:r>
-              <a:t>DML (DATA MANIPULATION LANGUAGE)</a:t>
-            </a:r>
-          </a:p>
+          <a:p/>
           <a:p>
             <a:pPr>
               <a:spcBef>
@@ -4298,7 +4377,7 @@
               </a:spcBef>
               <a:defRPr b="1" sz="950">
                 <a:solidFill>
-                  <a:srgbClr val="F8FAFC"/>
+                  <a:srgbClr val="1E40AF"/>
                 </a:solidFill>
               </a:defRPr>
             </a:pPr>
@@ -4313,7 +4392,7 @@
               </a:spcBef>
               <a:defRPr sz="800">
                 <a:solidFill>
-                  <a:srgbClr val="BAE6FD"/>
+                  <a:srgbClr val="0F172A"/>
                 </a:solidFill>
                 <a:latin typeface="Consolas"/>
               </a:defRPr>
@@ -4333,7 +4412,7 @@
               </a:spcBef>
               <a:defRPr b="1" sz="950">
                 <a:solidFill>
-                  <a:srgbClr val="F8FAFC"/>
+                  <a:srgbClr val="1E40AF"/>
                 </a:solidFill>
               </a:defRPr>
             </a:pPr>
@@ -4348,7 +4427,7 @@
               </a:spcBef>
               <a:defRPr sz="800">
                 <a:solidFill>
-                  <a:srgbClr val="BAE6FD"/>
+                  <a:srgbClr val="0F172A"/>
                 </a:solidFill>
                 <a:latin typeface="Consolas"/>
               </a:defRPr>
@@ -4368,7 +4447,7 @@
               </a:spcBef>
               <a:defRPr b="1" sz="950">
                 <a:solidFill>
-                  <a:srgbClr val="F8FAFC"/>
+                  <a:srgbClr val="1E40AF"/>
                 </a:solidFill>
               </a:defRPr>
             </a:pPr>
@@ -4383,7 +4462,7 @@
               </a:spcBef>
               <a:defRPr sz="800">
                 <a:solidFill>
-                  <a:srgbClr val="BAE6FD"/>
+                  <a:srgbClr val="0F172A"/>
                 </a:solidFill>
                 <a:latin typeface="Consolas"/>
               </a:defRPr>
@@ -4400,24 +4479,24 @@
       </p:sp>
       <p:sp>
         <p:nvSpPr>
-          <p:cNvPr id="13" name="Rounded Rectangle 12"/>
+          <p:cNvPr id="15" name="Rounded Rectangle 14"/>
           <p:cNvSpPr/>
           <p:nvPr/>
         </p:nvSpPr>
         <p:spPr>
           <a:xfrm>
-            <a:off x="8010144" y="1554480"/>
-            <a:ext cx="3456432" cy="4846320"/>
+            <a:off x="8010144" y="1371600"/>
+            <a:ext cx="3456432" cy="4937760"/>
           </a:xfrm>
           <a:prstGeom prst="roundRect">
             <a:avLst/>
           </a:prstGeom>
           <a:solidFill>
-            <a:srgbClr val="0F172A"/>
+            <a:srgbClr val="FFFFFF"/>
           </a:solidFill>
           <a:ln w="12700">
             <a:solidFill>
-              <a:srgbClr val="2D3C5A"/>
+              <a:srgbClr val="CBD5E1"/>
             </a:solidFill>
           </a:ln>
         </p:spPr>
@@ -4445,20 +4524,20 @@
       </p:sp>
       <p:sp>
         <p:nvSpPr>
-          <p:cNvPr id="14" name="Rectangle 13"/>
+          <p:cNvPr id="16" name="Rectangle 15"/>
           <p:cNvSpPr/>
           <p:nvPr/>
         </p:nvSpPr>
         <p:spPr>
           <a:xfrm>
-            <a:off x="8010144" y="1554480"/>
-            <a:ext cx="3456432" cy="73152"/>
+            <a:off x="8010144" y="1371600"/>
+            <a:ext cx="3456432" cy="411480"/>
           </a:xfrm>
           <a:prstGeom prst="rect">
             <a:avLst/>
           </a:prstGeom>
           <a:solidFill>
-            <a:srgbClr val="F59E0B"/>
+            <a:srgbClr val="0F2547"/>
           </a:solidFill>
           <a:ln>
             <a:noFill/>
@@ -4488,14 +4567,49 @@
       </p:sp>
       <p:sp>
         <p:nvSpPr>
-          <p:cNvPr id="15" name="TextBox 14"/>
+          <p:cNvPr id="17" name="TextBox 16"/>
           <p:cNvSpPr txBox="1"/>
           <p:nvPr/>
         </p:nvSpPr>
         <p:spPr>
           <a:xfrm>
-            <a:off x="8147304" y="1691640"/>
-            <a:ext cx="3182112" cy="4572000"/>
+            <a:off x="8010144" y="1426464"/>
+            <a:ext cx="3456432" cy="320040"/>
+          </a:xfrm>
+          <a:prstGeom prst="rect">
+            <a:avLst/>
+          </a:prstGeom>
+          <a:noFill/>
+        </p:spPr>
+        <p:txBody>
+          <a:bodyPr wrap="none">
+            <a:spAutoFit/>
+          </a:bodyPr>
+          <a:lstStyle/>
+          <a:p>
+            <a:pPr algn="ctr">
+              <a:defRPr b="1" sz="950">
+                <a:solidFill>
+                  <a:srgbClr val="FFFFFF"/>
+                </a:solidFill>
+              </a:defRPr>
+            </a:pPr>
+            <a:r>
+              <a:t>DCL (DATA CONTROL)</a:t>
+            </a:r>
+          </a:p>
+        </p:txBody>
+      </p:sp>
+      <p:sp>
+        <p:nvSpPr>
+          <p:cNvPr id="18" name="TextBox 17"/>
+          <p:cNvSpPr txBox="1"/>
+          <p:nvPr/>
+        </p:nvSpPr>
+        <p:spPr>
+          <a:xfrm>
+            <a:off x="8147304" y="1874520"/>
+            <a:ext cx="3182112" cy="4343400"/>
           </a:xfrm>
           <a:prstGeom prst="rect">
             <a:avLst/>
@@ -4507,19 +4621,7 @@
             <a:spAutoFit/>
           </a:bodyPr>
           <a:lstStyle/>
-          <a:p>
-            <a:pPr>
-              <a:defRPr sz="1100" b="1">
-                <a:solidFill>
-                  <a:srgbClr val="F59E0B"/>
-                </a:solidFill>
-                <a:latin typeface="Segoe UI"/>
-              </a:defRPr>
-            </a:pPr>
-            <a:r>
-              <a:t>DCL (DATA CONTROL LANGUAGE)</a:t>
-            </a:r>
-          </a:p>
+          <a:p/>
           <a:p>
             <a:pPr>
               <a:spcBef>
@@ -4527,7 +4629,7 @@
               </a:spcBef>
               <a:defRPr b="1" sz="950">
                 <a:solidFill>
-                  <a:srgbClr val="F8FAFC"/>
+                  <a:srgbClr val="1E40AF"/>
                 </a:solidFill>
               </a:defRPr>
             </a:pPr>
@@ -4542,7 +4644,7 @@
               </a:spcBef>
               <a:defRPr sz="800">
                 <a:solidFill>
-                  <a:srgbClr val="BAE6FD"/>
+                  <a:srgbClr val="0F172A"/>
                 </a:solidFill>
                 <a:latin typeface="Consolas"/>
               </a:defRPr>
@@ -4562,7 +4664,7 @@
               </a:spcBef>
               <a:defRPr b="1" sz="950">
                 <a:solidFill>
-                  <a:srgbClr val="F8FAFC"/>
+                  <a:srgbClr val="1E40AF"/>
                 </a:solidFill>
               </a:defRPr>
             </a:pPr>
@@ -4577,7 +4679,7 @@
               </a:spcBef>
               <a:defRPr sz="800">
                 <a:solidFill>
-                  <a:srgbClr val="BAE6FD"/>
+                  <a:srgbClr val="0F172A"/>
                 </a:solidFill>
                 <a:latin typeface="Consolas"/>
               </a:defRPr>
@@ -4601,7 +4703,7 @@
               </a:spcBef>
               <a:defRPr b="1" sz="950">
                 <a:solidFill>
-                  <a:srgbClr val="F8FAFC"/>
+                  <a:srgbClr val="1E40AF"/>
                 </a:solidFill>
               </a:defRPr>
             </a:pPr>
@@ -4616,7 +4718,7 @@
               </a:spcBef>
               <a:defRPr sz="800">
                 <a:solidFill>
-                  <a:srgbClr val="BAE6FD"/>
+                  <a:srgbClr val="0F172A"/>
                 </a:solidFill>
                 <a:latin typeface="Consolas"/>
               </a:defRPr>
@@ -4664,7 +4766,7 @@
             <a:avLst/>
           </a:prstGeom>
           <a:solidFill>
-            <a:srgbClr val="0B0F19"/>
+            <a:srgbClr val="F8FAFC"/>
           </a:solidFill>
           <a:ln>
             <a:noFill/>
@@ -4700,14 +4802,14 @@
         </p:nvSpPr>
         <p:spPr>
           <a:xfrm>
-            <a:off x="731520" y="365760"/>
-            <a:ext cx="10728655" cy="36576"/>
+            <a:off x="0" y="0"/>
+            <a:ext cx="12191695" cy="73152"/>
           </a:xfrm>
           <a:prstGeom prst="rect">
             <a:avLst/>
           </a:prstGeom>
           <a:solidFill>
-            <a:srgbClr val="3B82F6"/>
+            <a:srgbClr val="1E40AF"/>
           </a:solidFill>
           <a:ln>
             <a:noFill/>
@@ -4743,8 +4845,8 @@
         </p:nvSpPr>
         <p:spPr>
           <a:xfrm>
-            <a:off x="731520" y="502920"/>
-            <a:ext cx="7315200" cy="274320"/>
+            <a:off x="731520" y="320040"/>
+            <a:ext cx="7772400" cy="256032"/>
           </a:xfrm>
           <a:prstGeom prst="rect">
             <a:avLst/>
@@ -4760,7 +4862,7 @@
             <a:pPr>
               <a:defRPr sz="1000" b="1">
                 <a:solidFill>
-                  <a:srgbClr val="06B6D4"/>
+                  <a:srgbClr val="1E40AF"/>
                 </a:solidFill>
                 <a:latin typeface="Segoe UI"/>
               </a:defRPr>
@@ -4779,7 +4881,7 @@
         </p:nvSpPr>
         <p:spPr>
           <a:xfrm>
-            <a:off x="731520" y="777240"/>
+            <a:off x="731520" y="594360"/>
             <a:ext cx="9601200" cy="548640"/>
           </a:xfrm>
           <a:prstGeom prst="rect">
@@ -4794,9 +4896,9 @@
           <a:lstStyle/>
           <a:p>
             <a:pPr>
-              <a:defRPr sz="2200" b="1">
-                <a:solidFill>
-                  <a:srgbClr val="F8FAFC"/>
+              <a:defRPr sz="2100" b="1">
+                <a:solidFill>
+                  <a:srgbClr val="0F2547"/>
                 </a:solidFill>
                 <a:latin typeface="Segoe UI"/>
               </a:defRPr>
@@ -4815,7 +4917,7 @@
         </p:nvSpPr>
         <p:spPr>
           <a:xfrm>
-            <a:off x="10515600" y="640080"/>
+            <a:off x="10515600" y="411480"/>
             <a:ext cx="914400" cy="365760"/>
           </a:xfrm>
           <a:prstGeom prst="rect">
@@ -4832,9 +4934,9 @@
             <a:pPr algn="r">
               <a:defRPr sz="1100" b="1">
                 <a:solidFill>
-                  <a:srgbClr val="64748B"/>
-                </a:solidFill>
-                <a:latin typeface="Consolas"/>
+                  <a:srgbClr val="475569"/>
+                </a:solidFill>
+                <a:latin typeface="Segoe UI"/>
               </a:defRPr>
             </a:pPr>
             <a:r>
@@ -4851,18 +4953,18 @@
         </p:nvSpPr>
         <p:spPr>
           <a:xfrm>
-            <a:off x="731520" y="1554480"/>
-            <a:ext cx="10728655" cy="1508760"/>
+            <a:off x="731520" y="1371600"/>
+            <a:ext cx="10728655" cy="1536192"/>
           </a:xfrm>
           <a:prstGeom prst="roundRect">
             <a:avLst/>
           </a:prstGeom>
           <a:solidFill>
-            <a:srgbClr val="161E31"/>
+            <a:srgbClr val="FFFFFF"/>
           </a:solidFill>
           <a:ln w="12700">
             <a:solidFill>
-              <a:srgbClr val="2D3C5A"/>
+              <a:srgbClr val="CBD5E1"/>
             </a:solidFill>
           </a:ln>
         </p:spPr>
@@ -4896,8 +4998,8 @@
         </p:nvSpPr>
         <p:spPr>
           <a:xfrm>
-            <a:off x="914400" y="1627632"/>
-            <a:ext cx="10362895" cy="1371600"/>
+            <a:off x="914400" y="1444752"/>
+            <a:ext cx="10362895" cy="1417320"/>
           </a:xfrm>
           <a:prstGeom prst="rect">
             <a:avLst/>
@@ -4913,7 +5015,7 @@
             <a:pPr>
               <a:defRPr sz="1100" b="1">
                 <a:solidFill>
-                  <a:srgbClr val="06B6D4"/>
+                  <a:srgbClr val="0F2547"/>
                 </a:solidFill>
                 <a:latin typeface="Segoe UI"/>
               </a:defRPr>
@@ -4929,7 +5031,7 @@
               </a:spcBef>
               <a:defRPr sz="850">
                 <a:solidFill>
-                  <a:srgbClr val="A5F3FC"/>
+                  <a:srgbClr val="0F172A"/>
                 </a:solidFill>
                 <a:latin typeface="Consolas"/>
               </a:defRPr>
@@ -4969,7 +5071,7 @@
               </a:spcBef>
               <a:defRPr sz="900">
                 <a:solidFill>
-                  <a:srgbClr val="94A3B8"/>
+                  <a:srgbClr val="475569"/>
                 </a:solidFill>
               </a:defRPr>
             </a:pPr>
@@ -4987,18 +5089,18 @@
         </p:nvSpPr>
         <p:spPr>
           <a:xfrm>
-            <a:off x="731520" y="3154680"/>
-            <a:ext cx="10728655" cy="1508760"/>
+            <a:off x="731520" y="2999232"/>
+            <a:ext cx="10728655" cy="1536192"/>
           </a:xfrm>
           <a:prstGeom prst="roundRect">
             <a:avLst/>
           </a:prstGeom>
           <a:solidFill>
-            <a:srgbClr val="161E31"/>
+            <a:srgbClr val="FFFFFF"/>
           </a:solidFill>
           <a:ln w="12700">
             <a:solidFill>
-              <a:srgbClr val="2D3C5A"/>
+              <a:srgbClr val="CBD5E1"/>
             </a:solidFill>
           </a:ln>
         </p:spPr>
@@ -5032,8 +5134,8 @@
         </p:nvSpPr>
         <p:spPr>
           <a:xfrm>
-            <a:off x="914400" y="3227832"/>
-            <a:ext cx="10362895" cy="1371600"/>
+            <a:off x="914400" y="3072384"/>
+            <a:ext cx="10362895" cy="1417320"/>
           </a:xfrm>
           <a:prstGeom prst="rect">
             <a:avLst/>
@@ -5049,13 +5151,13 @@
             <a:pPr>
               <a:defRPr sz="1100" b="1">
                 <a:solidFill>
-                  <a:srgbClr val="06B6D4"/>
+                  <a:srgbClr val="0F2547"/>
                 </a:solidFill>
                 <a:latin typeface="Segoe UI"/>
               </a:defRPr>
             </a:pPr>
             <a:r>
-              <a:t>2. Multiple-Row Subquery with IN / NOT IN Operators</a:t>
+              <a:t>2. Multiple-Row Subquery with IN Operator</a:t>
             </a:r>
           </a:p>
           <a:p>
@@ -5065,7 +5167,7 @@
               </a:spcBef>
               <a:defRPr sz="850">
                 <a:solidFill>
-                  <a:srgbClr val="A5F3FC"/>
+                  <a:srgbClr val="0F172A"/>
                 </a:solidFill>
                 <a:latin typeface="Consolas"/>
               </a:defRPr>
@@ -5109,7 +5211,7 @@
               </a:spcBef>
               <a:defRPr sz="900">
                 <a:solidFill>
-                  <a:srgbClr val="94A3B8"/>
+                  <a:srgbClr val="475569"/>
                 </a:solidFill>
               </a:defRPr>
             </a:pPr>
@@ -5127,18 +5229,18 @@
         </p:nvSpPr>
         <p:spPr>
           <a:xfrm>
-            <a:off x="731520" y="4754880"/>
-            <a:ext cx="10728655" cy="1508760"/>
+            <a:off x="731520" y="4626864"/>
+            <a:ext cx="10728655" cy="1536192"/>
           </a:xfrm>
           <a:prstGeom prst="roundRect">
             <a:avLst/>
           </a:prstGeom>
           <a:solidFill>
-            <a:srgbClr val="161E31"/>
+            <a:srgbClr val="FFFFFF"/>
           </a:solidFill>
           <a:ln w="12700">
             <a:solidFill>
-              <a:srgbClr val="2D3C5A"/>
+              <a:srgbClr val="CBD5E1"/>
             </a:solidFill>
           </a:ln>
         </p:spPr>
@@ -5172,8 +5274,8 @@
         </p:nvSpPr>
         <p:spPr>
           <a:xfrm>
-            <a:off x="914400" y="4828032"/>
-            <a:ext cx="10362895" cy="1371600"/>
+            <a:off x="914400" y="4700016"/>
+            <a:ext cx="10362895" cy="1417320"/>
           </a:xfrm>
           <a:prstGeom prst="rect">
             <a:avLst/>
@@ -5189,7 +5291,7 @@
             <a:pPr>
               <a:defRPr sz="1100" b="1">
                 <a:solidFill>
-                  <a:srgbClr val="06B6D4"/>
+                  <a:srgbClr val="0F2547"/>
                 </a:solidFill>
                 <a:latin typeface="Segoe UI"/>
               </a:defRPr>
@@ -5205,7 +5307,7 @@
               </a:spcBef>
               <a:defRPr sz="850">
                 <a:solidFill>
-                  <a:srgbClr val="A5F3FC"/>
+                  <a:srgbClr val="0F172A"/>
                 </a:solidFill>
                 <a:latin typeface="Consolas"/>
               </a:defRPr>
@@ -5257,7 +5359,7 @@
               </a:spcBef>
               <a:defRPr sz="900">
                 <a:solidFill>
-                  <a:srgbClr val="94A3B8"/>
+                  <a:srgbClr val="475569"/>
                 </a:solidFill>
               </a:defRPr>
             </a:pPr>
@@ -5300,7 +5402,7 @@
             <a:avLst/>
           </a:prstGeom>
           <a:solidFill>
-            <a:srgbClr val="0B0F19"/>
+            <a:srgbClr val="F8FAFC"/>
           </a:solidFill>
           <a:ln>
             <a:noFill/>
@@ -5336,14 +5438,14 @@
         </p:nvSpPr>
         <p:spPr>
           <a:xfrm>
-            <a:off x="731520" y="365760"/>
-            <a:ext cx="10728655" cy="36576"/>
+            <a:off x="0" y="0"/>
+            <a:ext cx="12191695" cy="73152"/>
           </a:xfrm>
           <a:prstGeom prst="rect">
             <a:avLst/>
           </a:prstGeom>
           <a:solidFill>
-            <a:srgbClr val="3B82F6"/>
+            <a:srgbClr val="1E40AF"/>
           </a:solidFill>
           <a:ln>
             <a:noFill/>
@@ -5379,8 +5481,8 @@
         </p:nvSpPr>
         <p:spPr>
           <a:xfrm>
-            <a:off x="731520" y="502920"/>
-            <a:ext cx="7315200" cy="274320"/>
+            <a:off x="731520" y="320040"/>
+            <a:ext cx="7772400" cy="256032"/>
           </a:xfrm>
           <a:prstGeom prst="rect">
             <a:avLst/>
@@ -5396,7 +5498,7 @@
             <a:pPr>
               <a:defRPr sz="1000" b="1">
                 <a:solidFill>
-                  <a:srgbClr val="06B6D4"/>
+                  <a:srgbClr val="1E40AF"/>
                 </a:solidFill>
                 <a:latin typeface="Segoe UI"/>
               </a:defRPr>
@@ -5415,7 +5517,7 @@
         </p:nvSpPr>
         <p:spPr>
           <a:xfrm>
-            <a:off x="731520" y="777240"/>
+            <a:off x="731520" y="594360"/>
             <a:ext cx="9601200" cy="548640"/>
           </a:xfrm>
           <a:prstGeom prst="rect">
@@ -5430,9 +5532,9 @@
           <a:lstStyle/>
           <a:p>
             <a:pPr>
-              <a:defRPr sz="2200" b="1">
-                <a:solidFill>
-                  <a:srgbClr val="F8FAFC"/>
+              <a:defRPr sz="2100" b="1">
+                <a:solidFill>
+                  <a:srgbClr val="0F2547"/>
                 </a:solidFill>
                 <a:latin typeface="Segoe UI"/>
               </a:defRPr>
@@ -5451,7 +5553,7 @@
         </p:nvSpPr>
         <p:spPr>
           <a:xfrm>
-            <a:off x="10515600" y="640080"/>
+            <a:off x="10515600" y="411480"/>
             <a:ext cx="914400" cy="365760"/>
           </a:xfrm>
           <a:prstGeom prst="rect">
@@ -5468,9 +5570,9 @@
             <a:pPr algn="r">
               <a:defRPr sz="1100" b="1">
                 <a:solidFill>
-                  <a:srgbClr val="64748B"/>
-                </a:solidFill>
-                <a:latin typeface="Consolas"/>
+                  <a:srgbClr val="475569"/>
+                </a:solidFill>
+                <a:latin typeface="Segoe UI"/>
               </a:defRPr>
             </a:pPr>
             <a:r>
@@ -5487,18 +5589,18 @@
         </p:nvSpPr>
         <p:spPr>
           <a:xfrm>
-            <a:off x="731520" y="1554480"/>
-            <a:ext cx="5212080" cy="4846320"/>
+            <a:off x="731520" y="1371600"/>
+            <a:ext cx="5212080" cy="4937760"/>
           </a:xfrm>
           <a:prstGeom prst="roundRect">
             <a:avLst/>
           </a:prstGeom>
           <a:solidFill>
-            <a:srgbClr val="161E31"/>
+            <a:srgbClr val="FFFFFF"/>
           </a:solidFill>
           <a:ln w="12700">
             <a:solidFill>
-              <a:srgbClr val="2D3C5A"/>
+              <a:srgbClr val="CBD5E1"/>
             </a:solidFill>
           </a:ln>
         </p:spPr>
@@ -5532,8 +5634,8 @@
         </p:nvSpPr>
         <p:spPr>
           <a:xfrm>
-            <a:off x="914400" y="1691640"/>
-            <a:ext cx="4846320" cy="4480560"/>
+            <a:off x="914400" y="1508760"/>
+            <a:ext cx="4846320" cy="4663440"/>
           </a:xfrm>
           <a:prstGeom prst="rect">
             <a:avLst/>
@@ -5549,7 +5651,7 @@
             <a:pPr>
               <a:defRPr b="1" sz="1200">
                 <a:solidFill>
-                  <a:srgbClr val="3B82F6"/>
+                  <a:srgbClr val="0F2547"/>
                 </a:solidFill>
               </a:defRPr>
             </a:pPr>
@@ -5566,7 +5668,7 @@
             <a:r>
               <a:rPr b="1" sz="950">
                 <a:solidFill>
-                  <a:srgbClr val="F8FAFC"/>
+                  <a:srgbClr val="1E40AF"/>
                 </a:solidFill>
               </a:rPr>
               <a:t>COUNT(*), COUNT(DISTINCT l.user_id)
@@ -5575,7 +5677,7 @@
             <a:r>
               <a:rPr sz="900">
                 <a:solidFill>
-                  <a:srgbClr val="94A3B8"/>
+                  <a:srgbClr val="475569"/>
                 </a:solidFill>
               </a:rPr>
               <a:t>Measures total circulation transactions and distinct active patron engagement across semesters.</a:t>
@@ -5590,7 +5692,7 @@
             <a:r>
               <a:rPr b="1" sz="950">
                 <a:solidFill>
-                  <a:srgbClr val="F8FAFC"/>
+                  <a:srgbClr val="1E40AF"/>
                 </a:solidFill>
               </a:rPr>
               <a:t>SUM(f.fine_amount)
@@ -5599,7 +5701,7 @@
             <a:r>
               <a:rPr sz="900">
                 <a:solidFill>
-                  <a:srgbClr val="94A3B8"/>
+                  <a:srgbClr val="475569"/>
                 </a:solidFill>
               </a:rPr>
               <a:t>Computes cumulative institutional penalty revenue and outstanding unpaid receivables.</a:t>
@@ -5614,7 +5716,7 @@
             <a:r>
               <a:rPr b="1" sz="950">
                 <a:solidFill>
-                  <a:srgbClr val="F8FAFC"/>
+                  <a:srgbClr val="1E40AF"/>
                 </a:solidFill>
               </a:rPr>
               <a:t>AVG(MONTHS_BETWEEN(SYSDATE, b.acquisition_date))
@@ -5623,7 +5725,7 @@
             <a:r>
               <a:rPr sz="900">
                 <a:solidFill>
-                  <a:srgbClr val="94A3B8"/>
+                  <a:srgbClr val="475569"/>
                 </a:solidFill>
               </a:rPr>
               <a:t>Computes the mean retention age of catalog acquisitions for inventory deprecation.</a:t>
@@ -5638,7 +5740,7 @@
             <a:r>
               <a:rPr b="1" sz="950">
                 <a:solidFill>
-                  <a:srgbClr val="F8FAFC"/>
+                  <a:srgbClr val="1E40AF"/>
                 </a:solidFill>
               </a:rPr>
               <a:t>MIN(due_date), MAX(due_date)
@@ -5647,7 +5749,7 @@
             <a:r>
               <a:rPr sz="900">
                 <a:solidFill>
-                  <a:srgbClr val="94A3B8"/>
+                  <a:srgbClr val="475569"/>
                 </a:solidFill>
               </a:rPr>
               <a:t>Identifies the earliest pending return and latest active return deadlines across campus.</a:t>
@@ -5662,7 +5764,7 @@
             <a:r>
               <a:rPr b="1" sz="950">
                 <a:solidFill>
-                  <a:srgbClr val="F8FAFC"/>
+                  <a:srgbClr val="1E40AF"/>
                 </a:solidFill>
               </a:rPr>
               <a:t>GROUP BY ... HAVING COUNT(*) &gt; 5
@@ -5671,7 +5773,7 @@
             <a:r>
               <a:rPr sz="900">
                 <a:solidFill>
-                  <a:srgbClr val="94A3B8"/>
+                  <a:srgbClr val="475569"/>
                 </a:solidFill>
               </a:rPr>
               <a:t>Filters prolific authors and high-density categories exceeding borrowing thresholds.</a:t>
@@ -5687,18 +5789,18 @@
         </p:nvSpPr>
         <p:spPr>
           <a:xfrm>
-            <a:off x="6217920" y="1554480"/>
-            <a:ext cx="5242255" cy="4846320"/>
+            <a:off x="6217920" y="1371600"/>
+            <a:ext cx="5242255" cy="4937760"/>
           </a:xfrm>
           <a:prstGeom prst="roundRect">
             <a:avLst/>
           </a:prstGeom>
           <a:solidFill>
-            <a:srgbClr val="161E31"/>
+            <a:srgbClr val="FFFFFF"/>
           </a:solidFill>
           <a:ln w="12700">
             <a:solidFill>
-              <a:srgbClr val="2D3C5A"/>
+              <a:srgbClr val="CBD5E1"/>
             </a:solidFill>
           </a:ln>
         </p:spPr>
@@ -5732,8 +5834,8 @@
         </p:nvSpPr>
         <p:spPr>
           <a:xfrm>
-            <a:off x="6400800" y="1691640"/>
-            <a:ext cx="4876495" cy="4480560"/>
+            <a:off x="6400800" y="1508760"/>
+            <a:ext cx="4876495" cy="4663440"/>
           </a:xfrm>
           <a:prstGeom prst="rect">
             <a:avLst/>
@@ -5749,7 +5851,7 @@
             <a:pPr>
               <a:defRPr b="1" sz="1200">
                 <a:solidFill>
-                  <a:srgbClr val="10B981"/>
+                  <a:srgbClr val="0F2547"/>
                 </a:solidFill>
               </a:defRPr>
             </a:pPr>
@@ -5766,7 +5868,7 @@
             <a:r>
               <a:rPr b="1" sz="950">
                 <a:solidFill>
-                  <a:srgbClr val="F8FAFC"/>
+                  <a:srgbClr val="1E40AF"/>
                 </a:solidFill>
               </a:rPr>
               <a:t>TO_CHAR(issue_date, 'YYYY-MM-DD HH24:MI')
@@ -5775,7 +5877,7 @@
             <a:r>
               <a:rPr sz="900">
                 <a:solidFill>
-                  <a:srgbClr val="94A3B8"/>
+                  <a:srgbClr val="475569"/>
                 </a:solidFill>
               </a:rPr>
               <a:t>Standardizes temporal audit timestamps across disparate client locales.</a:t>
@@ -5790,7 +5892,7 @@
             <a:r>
               <a:rPr b="1" sz="950">
                 <a:solidFill>
-                  <a:srgbClr val="F8FAFC"/>
+                  <a:srgbClr val="1E40AF"/>
                 </a:solidFill>
               </a:rPr>
               <a:t>TRUNC(SYSDATE) - TRUNC(due_date)
@@ -5799,7 +5901,7 @@
             <a:r>
               <a:rPr sz="900">
                 <a:solidFill>
-                  <a:srgbClr val="94A3B8"/>
+                  <a:srgbClr val="475569"/>
                 </a:solidFill>
               </a:rPr>
               <a:t>Evaluates precise elapsed calendar days for overdue fine calculations.</a:t>
@@ -5814,7 +5916,7 @@
             <a:r>
               <a:rPr b="1" sz="950">
                 <a:solidFill>
-                  <a:srgbClr val="F8FAFC"/>
+                  <a:srgbClr val="1E40AF"/>
                 </a:solidFill>
               </a:rPr>
               <a:t>UPPER(u.username), LOWER(u.email)
@@ -5823,7 +5925,7 @@
             <a:r>
               <a:rPr sz="900">
                 <a:solidFill>
-                  <a:srgbClr val="94A3B8"/>
+                  <a:srgbClr val="475569"/>
                 </a:solidFill>
               </a:rPr>
               <a:t>Normalizes patron authentication credentials to ensure case-insensitive identity matching.</a:t>
@@ -5838,7 +5940,7 @@
             <a:r>
               <a:rPr b="1" sz="950">
                 <a:solidFill>
-                  <a:srgbClr val="F8FAFC"/>
+                  <a:srgbClr val="1E40AF"/>
                 </a:solidFill>
               </a:rPr>
               <a:t>REPLACE(b.isbn, '-', '')
@@ -5847,7 +5949,7 @@
             <a:r>
               <a:rPr sz="900">
                 <a:solidFill>
-                  <a:srgbClr val="94A3B8"/>
+                  <a:srgbClr val="475569"/>
                 </a:solidFill>
               </a:rPr>
               <a:t>Strips punctuation from ISBN strings for seamless barcode and query pattern matching.</a:t>
@@ -5862,7 +5964,7 @@
             <a:r>
               <a:rPr b="1" sz="950">
                 <a:solidFill>
-                  <a:srgbClr val="F8FAFC"/>
+                  <a:srgbClr val="1E40AF"/>
                 </a:solidFill>
               </a:rPr>
               <a:t>NVL(return_date, 'Active Loan')
@@ -5871,7 +5973,7 @@
             <a:r>
               <a:rPr sz="900">
                 <a:solidFill>
-                  <a:srgbClr val="94A3B8"/>
+                  <a:srgbClr val="475569"/>
                 </a:solidFill>
               </a:rPr>
               <a:t>Handles NULL return dates gracefully in patron financial ledgers and dashboard reports.</a:t>
@@ -5912,7 +6014,7 @@
             <a:avLst/>
           </a:prstGeom>
           <a:solidFill>
-            <a:srgbClr val="0B0F19"/>
+            <a:srgbClr val="F8FAFC"/>
           </a:solidFill>
           <a:ln>
             <a:noFill/>
@@ -5948,14 +6050,14 @@
         </p:nvSpPr>
         <p:spPr>
           <a:xfrm>
-            <a:off x="731520" y="365760"/>
-            <a:ext cx="10728655" cy="36576"/>
+            <a:off x="0" y="0"/>
+            <a:ext cx="12191695" cy="73152"/>
           </a:xfrm>
           <a:prstGeom prst="rect">
             <a:avLst/>
           </a:prstGeom>
           <a:solidFill>
-            <a:srgbClr val="3B82F6"/>
+            <a:srgbClr val="1E40AF"/>
           </a:solidFill>
           <a:ln>
             <a:noFill/>
@@ -5991,8 +6093,8 @@
         </p:nvSpPr>
         <p:spPr>
           <a:xfrm>
-            <a:off x="731520" y="502920"/>
-            <a:ext cx="7315200" cy="274320"/>
+            <a:off x="731520" y="320040"/>
+            <a:ext cx="7772400" cy="256032"/>
           </a:xfrm>
           <a:prstGeom prst="rect">
             <a:avLst/>
@@ -6008,7 +6110,7 @@
             <a:pPr>
               <a:defRPr sz="1000" b="1">
                 <a:solidFill>
-                  <a:srgbClr val="06B6D4"/>
+                  <a:srgbClr val="1E40AF"/>
                 </a:solidFill>
                 <a:latin typeface="Segoe UI"/>
               </a:defRPr>
@@ -6027,7 +6129,7 @@
         </p:nvSpPr>
         <p:spPr>
           <a:xfrm>
-            <a:off x="731520" y="777240"/>
+            <a:off x="731520" y="594360"/>
             <a:ext cx="9601200" cy="548640"/>
           </a:xfrm>
           <a:prstGeom prst="rect">
@@ -6042,9 +6144,9 @@
           <a:lstStyle/>
           <a:p>
             <a:pPr>
-              <a:defRPr sz="2200" b="1">
-                <a:solidFill>
-                  <a:srgbClr val="F8FAFC"/>
+              <a:defRPr sz="2100" b="1">
+                <a:solidFill>
+                  <a:srgbClr val="0F2547"/>
                 </a:solidFill>
                 <a:latin typeface="Segoe UI"/>
               </a:defRPr>
@@ -6063,7 +6165,7 @@
         </p:nvSpPr>
         <p:spPr>
           <a:xfrm>
-            <a:off x="10515600" y="640080"/>
+            <a:off x="10515600" y="411480"/>
             <a:ext cx="914400" cy="365760"/>
           </a:xfrm>
           <a:prstGeom prst="rect">
@@ -6080,9 +6182,9 @@
             <a:pPr algn="r">
               <a:defRPr sz="1100" b="1">
                 <a:solidFill>
-                  <a:srgbClr val="64748B"/>
-                </a:solidFill>
-                <a:latin typeface="Consolas"/>
+                  <a:srgbClr val="475569"/>
+                </a:solidFill>
+                <a:latin typeface="Segoe UI"/>
               </a:defRPr>
             </a:pPr>
             <a:r>
@@ -6099,18 +6201,18 @@
         </p:nvSpPr>
         <p:spPr>
           <a:xfrm>
-            <a:off x="731520" y="1554480"/>
+            <a:off x="731520" y="1371600"/>
             <a:ext cx="10728655" cy="2377440"/>
           </a:xfrm>
           <a:prstGeom prst="roundRect">
             <a:avLst/>
           </a:prstGeom>
           <a:solidFill>
-            <a:srgbClr val="161E31"/>
+            <a:srgbClr val="FFFFFF"/>
           </a:solidFill>
           <a:ln w="12700">
             <a:solidFill>
-              <a:srgbClr val="2D3C5A"/>
+              <a:srgbClr val="CBD5E1"/>
             </a:solidFill>
           </a:ln>
         </p:spPr>
@@ -6144,7 +6246,7 @@
         </p:nvSpPr>
         <p:spPr>
           <a:xfrm>
-            <a:off x="914400" y="1645920"/>
+            <a:off x="914400" y="1508760"/>
             <a:ext cx="10362895" cy="2103120"/>
           </a:xfrm>
           <a:prstGeom prst="rect">
@@ -6161,7 +6263,7 @@
             <a:pPr>
               <a:defRPr b="1" sz="1100">
                 <a:solidFill>
-                  <a:srgbClr val="06B6D4"/>
+                  <a:srgbClr val="0F2547"/>
                 </a:solidFill>
               </a:defRPr>
             </a:pPr>
@@ -6176,7 +6278,7 @@
               </a:spcBef>
               <a:defRPr sz="850">
                 <a:solidFill>
-                  <a:srgbClr val="A5F3FC"/>
+                  <a:srgbClr val="0F172A"/>
                 </a:solidFill>
                 <a:latin typeface="Consolas"/>
               </a:defRPr>
@@ -6223,18 +6325,18 @@
         </p:nvSpPr>
         <p:spPr>
           <a:xfrm>
-            <a:off x="731520" y="4114800"/>
-            <a:ext cx="10728655" cy="2286000"/>
+            <a:off x="731520" y="3977639"/>
+            <a:ext cx="10728655" cy="2331720"/>
           </a:xfrm>
           <a:prstGeom prst="roundRect">
             <a:avLst/>
           </a:prstGeom>
           <a:solidFill>
-            <a:srgbClr val="161E31"/>
+            <a:srgbClr val="FFFFFF"/>
           </a:solidFill>
           <a:ln w="12700">
             <a:solidFill>
-              <a:srgbClr val="2D3C5A"/>
+              <a:srgbClr val="CBD5E1"/>
             </a:solidFill>
           </a:ln>
         </p:spPr>
@@ -6268,8 +6370,8 @@
         </p:nvSpPr>
         <p:spPr>
           <a:xfrm>
-            <a:off x="914400" y="4206240"/>
-            <a:ext cx="10362895" cy="2011680"/>
+            <a:off x="914400" y="4114800"/>
+            <a:ext cx="10362895" cy="2057400"/>
           </a:xfrm>
           <a:prstGeom prst="rect">
             <a:avLst/>
@@ -6285,7 +6387,7 @@
             <a:pPr>
               <a:defRPr b="1" sz="1100">
                 <a:solidFill>
-                  <a:srgbClr val="F59E0B"/>
+                  <a:srgbClr val="0F2547"/>
                 </a:solidFill>
               </a:defRPr>
             </a:pPr>
@@ -6300,7 +6402,7 @@
               </a:spcBef>
               <a:defRPr sz="850">
                 <a:solidFill>
-                  <a:srgbClr val="FEF08A"/>
+                  <a:srgbClr val="0F172A"/>
                 </a:solidFill>
                 <a:latin typeface="Consolas"/>
               </a:defRPr>
@@ -6376,7 +6478,7 @@
             <a:avLst/>
           </a:prstGeom>
           <a:solidFill>
-            <a:srgbClr val="0B0F19"/>
+            <a:srgbClr val="F8FAFC"/>
           </a:solidFill>
           <a:ln>
             <a:noFill/>
@@ -6412,14 +6514,14 @@
         </p:nvSpPr>
         <p:spPr>
           <a:xfrm>
-            <a:off x="731520" y="365760"/>
-            <a:ext cx="10728655" cy="36576"/>
+            <a:off x="0" y="0"/>
+            <a:ext cx="12191695" cy="73152"/>
           </a:xfrm>
           <a:prstGeom prst="rect">
             <a:avLst/>
           </a:prstGeom>
           <a:solidFill>
-            <a:srgbClr val="3B82F6"/>
+            <a:srgbClr val="1E40AF"/>
           </a:solidFill>
           <a:ln>
             <a:noFill/>
@@ -6455,8 +6557,8 @@
         </p:nvSpPr>
         <p:spPr>
           <a:xfrm>
-            <a:off x="731520" y="502920"/>
-            <a:ext cx="7315200" cy="274320"/>
+            <a:off x="731520" y="320040"/>
+            <a:ext cx="7772400" cy="256032"/>
           </a:xfrm>
           <a:prstGeom prst="rect">
             <a:avLst/>
@@ -6472,7 +6574,7 @@
             <a:pPr>
               <a:defRPr sz="1000" b="1">
                 <a:solidFill>
-                  <a:srgbClr val="06B6D4"/>
+                  <a:srgbClr val="1E40AF"/>
                 </a:solidFill>
                 <a:latin typeface="Segoe UI"/>
               </a:defRPr>
@@ -6491,7 +6593,7 @@
         </p:nvSpPr>
         <p:spPr>
           <a:xfrm>
-            <a:off x="731520" y="777240"/>
+            <a:off x="731520" y="594360"/>
             <a:ext cx="9601200" cy="548640"/>
           </a:xfrm>
           <a:prstGeom prst="rect">
@@ -6506,9 +6608,9 @@
           <a:lstStyle/>
           <a:p>
             <a:pPr>
-              <a:defRPr sz="2200" b="1">
-                <a:solidFill>
-                  <a:srgbClr val="F8FAFC"/>
+              <a:defRPr sz="2100" b="1">
+                <a:solidFill>
+                  <a:srgbClr val="0F2547"/>
                 </a:solidFill>
                 <a:latin typeface="Segoe UI"/>
               </a:defRPr>
@@ -6527,7 +6629,7 @@
         </p:nvSpPr>
         <p:spPr>
           <a:xfrm>
-            <a:off x="10515600" y="640080"/>
+            <a:off x="10515600" y="411480"/>
             <a:ext cx="914400" cy="365760"/>
           </a:xfrm>
           <a:prstGeom prst="rect">
@@ -6544,9 +6646,9 @@
             <a:pPr algn="r">
               <a:defRPr sz="1100" b="1">
                 <a:solidFill>
-                  <a:srgbClr val="64748B"/>
-                </a:solidFill>
-                <a:latin typeface="Consolas"/>
+                  <a:srgbClr val="475569"/>
+                </a:solidFill>
+                <a:latin typeface="Segoe UI"/>
               </a:defRPr>
             </a:pPr>
             <a:r>
@@ -6563,18 +6665,18 @@
         </p:nvSpPr>
         <p:spPr>
           <a:xfrm>
-            <a:off x="731520" y="1554480"/>
-            <a:ext cx="5212080" cy="4846320"/>
+            <a:off x="731520" y="1371600"/>
+            <a:ext cx="5212080" cy="4937760"/>
           </a:xfrm>
           <a:prstGeom prst="roundRect">
             <a:avLst/>
           </a:prstGeom>
           <a:solidFill>
-            <a:srgbClr val="0F172A"/>
+            <a:srgbClr val="F1F5F9"/>
           </a:solidFill>
           <a:ln w="12700">
             <a:solidFill>
-              <a:srgbClr val="2D3C5A"/>
+              <a:srgbClr val="CBD5E1"/>
             </a:solidFill>
           </a:ln>
         </p:spPr>
@@ -6608,8 +6710,8 @@
         </p:nvSpPr>
         <p:spPr>
           <a:xfrm>
-            <a:off x="914400" y="1691640"/>
-            <a:ext cx="4846320" cy="4480560"/>
+            <a:off x="914400" y="1508760"/>
+            <a:ext cx="4846320" cy="4663440"/>
           </a:xfrm>
           <a:prstGeom prst="rect">
             <a:avLst/>
@@ -6625,7 +6727,7 @@
             <a:pPr>
               <a:defRPr b="1" sz="1100">
                 <a:solidFill>
-                  <a:srgbClr val="F43F5E"/>
+                  <a:srgbClr val="0F2547"/>
                 </a:solidFill>
               </a:defRPr>
             </a:pPr>
@@ -6640,7 +6742,7 @@
               </a:spcBef>
               <a:defRPr sz="850">
                 <a:solidFill>
-                  <a:srgbClr val="FDA4AF"/>
+                  <a:srgbClr val="0F172A"/>
                 </a:solidFill>
                 <a:latin typeface="Consolas"/>
               </a:defRPr>
@@ -6724,18 +6826,18 @@
         </p:nvSpPr>
         <p:spPr>
           <a:xfrm>
-            <a:off x="6217920" y="1554480"/>
-            <a:ext cx="5242255" cy="4846320"/>
+            <a:off x="6217920" y="1371600"/>
+            <a:ext cx="5242255" cy="4937760"/>
           </a:xfrm>
           <a:prstGeom prst="roundRect">
             <a:avLst/>
           </a:prstGeom>
           <a:solidFill>
-            <a:srgbClr val="0F172A"/>
+            <a:srgbClr val="F1F5F9"/>
           </a:solidFill>
           <a:ln w="12700">
             <a:solidFill>
-              <a:srgbClr val="2D3C5A"/>
+              <a:srgbClr val="CBD5E1"/>
             </a:solidFill>
           </a:ln>
         </p:spPr>
@@ -6769,8 +6871,8 @@
         </p:nvSpPr>
         <p:spPr>
           <a:xfrm>
-            <a:off x="6400800" y="1691640"/>
-            <a:ext cx="4876495" cy="4480560"/>
+            <a:off x="6400800" y="1508760"/>
+            <a:ext cx="4876495" cy="4663440"/>
           </a:xfrm>
           <a:prstGeom prst="rect">
             <a:avLst/>
@@ -6786,7 +6888,7 @@
             <a:pPr>
               <a:defRPr b="1" sz="1100">
                 <a:solidFill>
-                  <a:srgbClr val="10B981"/>
+                  <a:srgbClr val="0F2547"/>
                 </a:solidFill>
               </a:defRPr>
             </a:pPr>
@@ -6801,7 +6903,7 @@
               </a:spcBef>
               <a:defRPr sz="850">
                 <a:solidFill>
-                  <a:srgbClr val="A7F3D0"/>
+                  <a:srgbClr val="0F172A"/>
                 </a:solidFill>
                 <a:latin typeface="Consolas"/>
               </a:defRPr>
@@ -6926,7 +7028,7 @@
             <a:avLst/>
           </a:prstGeom>
           <a:solidFill>
-            <a:srgbClr val="0B0F19"/>
+            <a:srgbClr val="F8FAFC"/>
           </a:solidFill>
           <a:ln>
             <a:noFill/>
@@ -6962,14 +7064,14 @@
         </p:nvSpPr>
         <p:spPr>
           <a:xfrm>
-            <a:off x="731520" y="365760"/>
-            <a:ext cx="10728655" cy="36576"/>
+            <a:off x="0" y="0"/>
+            <a:ext cx="12191695" cy="73152"/>
           </a:xfrm>
           <a:prstGeom prst="rect">
             <a:avLst/>
           </a:prstGeom>
           <a:solidFill>
-            <a:srgbClr val="3B82F6"/>
+            <a:srgbClr val="1E40AF"/>
           </a:solidFill>
           <a:ln>
             <a:noFill/>
@@ -7005,8 +7107,8 @@
         </p:nvSpPr>
         <p:spPr>
           <a:xfrm>
-            <a:off x="731520" y="502920"/>
-            <a:ext cx="7315200" cy="274320"/>
+            <a:off x="731520" y="320040"/>
+            <a:ext cx="7772400" cy="256032"/>
           </a:xfrm>
           <a:prstGeom prst="rect">
             <a:avLst/>
@@ -7022,7 +7124,7 @@
             <a:pPr>
               <a:defRPr sz="1000" b="1">
                 <a:solidFill>
-                  <a:srgbClr val="06B6D4"/>
+                  <a:srgbClr val="1E40AF"/>
                 </a:solidFill>
                 <a:latin typeface="Segoe UI"/>
               </a:defRPr>
@@ -7041,7 +7143,7 @@
         </p:nvSpPr>
         <p:spPr>
           <a:xfrm>
-            <a:off x="731520" y="777240"/>
+            <a:off x="731520" y="594360"/>
             <a:ext cx="9601200" cy="548640"/>
           </a:xfrm>
           <a:prstGeom prst="rect">
@@ -7056,9 +7158,9 @@
           <a:lstStyle/>
           <a:p>
             <a:pPr>
-              <a:defRPr sz="2200" b="1">
-                <a:solidFill>
-                  <a:srgbClr val="F8FAFC"/>
+              <a:defRPr sz="2100" b="1">
+                <a:solidFill>
+                  <a:srgbClr val="0F2547"/>
                 </a:solidFill>
                 <a:latin typeface="Segoe UI"/>
               </a:defRPr>
@@ -7077,7 +7179,7 @@
         </p:nvSpPr>
         <p:spPr>
           <a:xfrm>
-            <a:off x="10515600" y="640080"/>
+            <a:off x="10515600" y="411480"/>
             <a:ext cx="914400" cy="365760"/>
           </a:xfrm>
           <a:prstGeom prst="rect">
@@ -7094,9 +7196,9 @@
             <a:pPr algn="r">
               <a:defRPr sz="1100" b="1">
                 <a:solidFill>
-                  <a:srgbClr val="64748B"/>
-                </a:solidFill>
-                <a:latin typeface="Consolas"/>
+                  <a:srgbClr val="475569"/>
+                </a:solidFill>
+                <a:latin typeface="Segoe UI"/>
               </a:defRPr>
             </a:pPr>
             <a:r>
@@ -7113,18 +7215,18 @@
         </p:nvSpPr>
         <p:spPr>
           <a:xfrm>
-            <a:off x="731520" y="1554480"/>
-            <a:ext cx="10728655" cy="4846320"/>
+            <a:off x="731520" y="1371600"/>
+            <a:ext cx="10728655" cy="4937760"/>
           </a:xfrm>
           <a:prstGeom prst="roundRect">
             <a:avLst/>
           </a:prstGeom>
           <a:solidFill>
-            <a:srgbClr val="0F172A"/>
+            <a:srgbClr val="F1F5F9"/>
           </a:solidFill>
           <a:ln w="12700">
             <a:solidFill>
-              <a:srgbClr val="2D3C5A"/>
+              <a:srgbClr val="CBD5E1"/>
             </a:solidFill>
           </a:ln>
         </p:spPr>
@@ -7158,8 +7260,8 @@
         </p:nvSpPr>
         <p:spPr>
           <a:xfrm>
-            <a:off x="914400" y="1691640"/>
-            <a:ext cx="10362895" cy="4480560"/>
+            <a:off x="914400" y="1508760"/>
+            <a:ext cx="10362895" cy="4663440"/>
           </a:xfrm>
           <a:prstGeom prst="rect">
             <a:avLst/>
@@ -7175,7 +7277,7 @@
             <a:pPr>
               <a:defRPr b="1" sz="1100">
                 <a:solidFill>
-                  <a:srgbClr val="06B6D4"/>
+                  <a:srgbClr val="0F2547"/>
                 </a:solidFill>
               </a:defRPr>
             </a:pPr>
@@ -7190,7 +7292,7 @@
               </a:spcBef>
               <a:defRPr sz="850">
                 <a:solidFill>
-                  <a:srgbClr val="C7D2FE"/>
+                  <a:srgbClr val="0F172A"/>
                 </a:solidFill>
                 <a:latin typeface="Consolas"/>
               </a:defRPr>
@@ -7386,7 +7488,7 @@
             <a:avLst/>
           </a:prstGeom>
           <a:solidFill>
-            <a:srgbClr val="0B0F19"/>
+            <a:srgbClr val="F8FAFC"/>
           </a:solidFill>
           <a:ln>
             <a:noFill/>
@@ -7422,14 +7524,14 @@
         </p:nvSpPr>
         <p:spPr>
           <a:xfrm>
-            <a:off x="731520" y="365760"/>
-            <a:ext cx="10728655" cy="36576"/>
+            <a:off x="0" y="0"/>
+            <a:ext cx="12191695" cy="73152"/>
           </a:xfrm>
           <a:prstGeom prst="rect">
             <a:avLst/>
           </a:prstGeom>
           <a:solidFill>
-            <a:srgbClr val="3B82F6"/>
+            <a:srgbClr val="1E40AF"/>
           </a:solidFill>
           <a:ln>
             <a:noFill/>
@@ -7465,8 +7567,8 @@
         </p:nvSpPr>
         <p:spPr>
           <a:xfrm>
-            <a:off x="731520" y="502920"/>
-            <a:ext cx="7315200" cy="274320"/>
+            <a:off x="731520" y="320040"/>
+            <a:ext cx="7772400" cy="256032"/>
           </a:xfrm>
           <a:prstGeom prst="rect">
             <a:avLst/>
@@ -7482,7 +7584,7 @@
             <a:pPr>
               <a:defRPr sz="1000" b="1">
                 <a:solidFill>
-                  <a:srgbClr val="06B6D4"/>
+                  <a:srgbClr val="1E40AF"/>
                 </a:solidFill>
                 <a:latin typeface="Segoe UI"/>
               </a:defRPr>
@@ -7501,7 +7603,7 @@
         </p:nvSpPr>
         <p:spPr>
           <a:xfrm>
-            <a:off x="731520" y="777240"/>
+            <a:off x="731520" y="594360"/>
             <a:ext cx="9601200" cy="548640"/>
           </a:xfrm>
           <a:prstGeom prst="rect">
@@ -7516,15 +7618,15 @@
           <a:lstStyle/>
           <a:p>
             <a:pPr>
-              <a:defRPr sz="2200" b="1">
-                <a:solidFill>
-                  <a:srgbClr val="F8FAFC"/>
+              <a:defRPr sz="2100" b="1">
+                <a:solidFill>
+                  <a:srgbClr val="0F2547"/>
                 </a:solidFill>
                 <a:latin typeface="Segoe UI"/>
               </a:defRPr>
             </a:pPr>
             <a:r>
-              <a:t>Application Workflow &amp; Code Architecture</a:t>
+              <a:t>Application Workflow &amp; Modular Code Architecture</a:t>
             </a:r>
           </a:p>
         </p:txBody>
@@ -7537,7 +7639,7 @@
         </p:nvSpPr>
         <p:spPr>
           <a:xfrm>
-            <a:off x="10515600" y="640080"/>
+            <a:off x="10515600" y="411480"/>
             <a:ext cx="914400" cy="365760"/>
           </a:xfrm>
           <a:prstGeom prst="rect">
@@ -7554,9 +7656,9 @@
             <a:pPr algn="r">
               <a:defRPr sz="1100" b="1">
                 <a:solidFill>
-                  <a:srgbClr val="64748B"/>
-                </a:solidFill>
-                <a:latin typeface="Consolas"/>
+                  <a:srgbClr val="475569"/>
+                </a:solidFill>
+                <a:latin typeface="Segoe UI"/>
               </a:defRPr>
             </a:pPr>
             <a:r>
@@ -7573,18 +7675,18 @@
         </p:nvSpPr>
         <p:spPr>
           <a:xfrm>
-            <a:off x="731520" y="1554480"/>
-            <a:ext cx="5212080" cy="4846320"/>
+            <a:off x="731520" y="1371600"/>
+            <a:ext cx="5212080" cy="4937760"/>
           </a:xfrm>
           <a:prstGeom prst="roundRect">
             <a:avLst/>
           </a:prstGeom>
           <a:solidFill>
-            <a:srgbClr val="0F172A"/>
+            <a:srgbClr val="F1F5F9"/>
           </a:solidFill>
           <a:ln w="12700">
             <a:solidFill>
-              <a:srgbClr val="2D3C5A"/>
+              <a:srgbClr val="CBD5E1"/>
             </a:solidFill>
           </a:ln>
         </p:spPr>
@@ -7618,8 +7720,8 @@
         </p:nvSpPr>
         <p:spPr>
           <a:xfrm>
-            <a:off x="914400" y="1691640"/>
-            <a:ext cx="4846320" cy="4480560"/>
+            <a:off x="914400" y="1508760"/>
+            <a:ext cx="4846320" cy="4663440"/>
           </a:xfrm>
           <a:prstGeom prst="rect">
             <a:avLst/>
@@ -7635,7 +7737,7 @@
             <a:pPr>
               <a:defRPr b="1" sz="1100">
                 <a:solidFill>
-                  <a:srgbClr val="F59E0B"/>
+                  <a:srgbClr val="0F2547"/>
                 </a:solidFill>
               </a:defRPr>
             </a:pPr>
@@ -7650,7 +7752,7 @@
               </a:spcBef>
               <a:defRPr sz="850">
                 <a:solidFill>
-                  <a:srgbClr val="FEF08A"/>
+                  <a:srgbClr val="0F172A"/>
                 </a:solidFill>
                 <a:latin typeface="Consolas"/>
               </a:defRPr>
@@ -7684,7 +7786,7 @@
             </a:r>
             <a:br/>
             <a:r>
-              <a:t>├── templates/            # 24 Jinja2 HTML5 Glassmorphism Views</a:t>
+              <a:t>├── templates/            # 24 Jinja2 HTML5 Professional Views</a:t>
             </a:r>
             <a:br/>
             <a:r>
@@ -7729,18 +7831,18 @@
         </p:nvSpPr>
         <p:spPr>
           <a:xfrm>
-            <a:off x="6217920" y="1554480"/>
-            <a:ext cx="5242255" cy="4846320"/>
+            <a:off x="6217920" y="1371600"/>
+            <a:ext cx="5242255" cy="4937760"/>
           </a:xfrm>
           <a:prstGeom prst="roundRect">
             <a:avLst/>
           </a:prstGeom>
           <a:solidFill>
-            <a:srgbClr val="161E31"/>
+            <a:srgbClr val="FFFFFF"/>
           </a:solidFill>
           <a:ln w="12700">
             <a:solidFill>
-              <a:srgbClr val="2D3C5A"/>
+              <a:srgbClr val="CBD5E1"/>
             </a:solidFill>
           </a:ln>
         </p:spPr>
@@ -7774,8 +7876,8 @@
         </p:nvSpPr>
         <p:spPr>
           <a:xfrm>
-            <a:off x="6400800" y="1691640"/>
-            <a:ext cx="4876495" cy="4480560"/>
+            <a:off x="6400800" y="1508760"/>
+            <a:ext cx="4876495" cy="4663440"/>
           </a:xfrm>
           <a:prstGeom prst="rect">
             <a:avLst/>
@@ -7791,7 +7893,7 @@
             <a:pPr>
               <a:defRPr b="1" sz="1100">
                 <a:solidFill>
-                  <a:srgbClr val="06B6D4"/>
+                  <a:srgbClr val="0F2547"/>
                 </a:solidFill>
               </a:defRPr>
             </a:pPr>
@@ -7808,7 +7910,7 @@
             <a:r>
               <a:rPr b="1" sz="950">
                 <a:solidFill>
-                  <a:srgbClr val="F8FAFC"/>
+                  <a:srgbClr val="1E40AF"/>
                 </a:solidFill>
               </a:rPr>
               <a:t>Step 1: Inbound HTTP Request
@@ -7817,7 +7919,7 @@
             <a:r>
               <a:rPr sz="850">
                 <a:solidFill>
-                  <a:srgbClr val="94A3B8"/>
+                  <a:srgbClr val="475569"/>
                 </a:solidFill>
               </a:rPr>
               <a:t>Client browser triggers route (e.g. POST /issue_loan) with form payload and CSRF token.</a:t>
@@ -7832,7 +7934,7 @@
             <a:r>
               <a:rPr b="1" sz="950">
                 <a:solidFill>
-                  <a:srgbClr val="F8FAFC"/>
+                  <a:srgbClr val="1E40AF"/>
                 </a:solidFill>
               </a:rPr>
               <a:t>Step 2: Security &amp; Session Middleware
@@ -7841,7 +7943,7 @@
             <a:r>
               <a:rPr sz="850">
                 <a:solidFill>
-                  <a:srgbClr val="94A3B8"/>
+                  <a:srgbClr val="475569"/>
                 </a:solidFill>
               </a:rPr>
               <a:t>Verifies active session in filesystem, validates 10-minute idle activity timestamp, and decrypts CSRF token.</a:t>
@@ -7856,7 +7958,7 @@
             <a:r>
               <a:rPr b="1" sz="950">
                 <a:solidFill>
-                  <a:srgbClr val="F8FAFC"/>
+                  <a:srgbClr val="1E40AF"/>
                 </a:solidFill>
               </a:rPr>
               <a:t>Step 3: Role-Based Authorization
@@ -7865,7 +7967,7 @@
             <a:r>
               <a:rPr sz="850">
                 <a:solidFill>
-                  <a:srgbClr val="94A3B8"/>
+                  <a:srgbClr val="475569"/>
                 </a:solidFill>
               </a:rPr>
               <a:t>@role_required(['Admin', 'Librarian']) decorator checks user role; redirects unauthorized roles to 403 Access Denied.</a:t>
@@ -7880,7 +7982,7 @@
             <a:r>
               <a:rPr b="1" sz="950">
                 <a:solidFill>
-                  <a:srgbClr val="F8FAFC"/>
+                  <a:srgbClr val="1E40AF"/>
                 </a:solidFill>
               </a:rPr>
               <a:t>Step 4: Query Execution &amp; Business Logic
@@ -7889,7 +7991,7 @@
             <a:r>
               <a:rPr sz="850">
                 <a:solidFill>
-                  <a:srgbClr val="94A3B8"/>
+                  <a:srgbClr val="475569"/>
                 </a:solidFill>
               </a:rPr>
               <a:t>Cypher query or PL/SQL procedure invoked via database driver session with parameterized injection protection.</a:t>
@@ -7904,7 +8006,7 @@
             <a:r>
               <a:rPr b="1" sz="950">
                 <a:solidFill>
-                  <a:srgbClr val="F8FAFC"/>
+                  <a:srgbClr val="1E40AF"/>
                 </a:solidFill>
               </a:rPr>
               <a:t>Step 5: Dynamic View Rendering
@@ -7913,7 +8015,7 @@
             <a:r>
               <a:rPr sz="850">
                 <a:solidFill>
-                  <a:srgbClr val="94A3B8"/>
+                  <a:srgbClr val="475569"/>
                 </a:solidFill>
               </a:rPr>
               <a:t>Jinja2 compiles response template with DateWrapper objects and privacy-masked attributes.</a:t>
@@ -7928,7 +8030,7 @@
             <a:r>
               <a:rPr b="1" sz="950">
                 <a:solidFill>
-                  <a:srgbClr val="F8FAFC"/>
+                  <a:srgbClr val="1E40AF"/>
                 </a:solidFill>
               </a:rPr>
               <a:t>Step 6: Client DOM Update
@@ -7937,10 +8039,10 @@
             <a:r>
               <a:rPr sz="850">
                 <a:solidFill>
-                  <a:srgbClr val="94A3B8"/>
+                  <a:srgbClr val="475569"/>
                 </a:solidFill>
               </a:rPr>
-              <a:t>Rendered HTML/CSS returned with glassmorphic visuals and interactive Vis.js graph physics.</a:t>
+              <a:t>Rendered HTML/CSS returned with clean professional visuals and interactive Vis.js graph physics.</a:t>
             </a:r>
           </a:p>
         </p:txBody>
@@ -7978,7 +8080,7 @@
             <a:avLst/>
           </a:prstGeom>
           <a:solidFill>
-            <a:srgbClr val="0B0F19"/>
+            <a:srgbClr val="F8FAFC"/>
           </a:solidFill>
           <a:ln>
             <a:noFill/>
@@ -8014,14 +8116,14 @@
         </p:nvSpPr>
         <p:spPr>
           <a:xfrm>
-            <a:off x="731520" y="365760"/>
-            <a:ext cx="10728655" cy="36576"/>
+            <a:off x="0" y="0"/>
+            <a:ext cx="12191695" cy="73152"/>
           </a:xfrm>
           <a:prstGeom prst="rect">
             <a:avLst/>
           </a:prstGeom>
           <a:solidFill>
-            <a:srgbClr val="3B82F6"/>
+            <a:srgbClr val="1E40AF"/>
           </a:solidFill>
           <a:ln>
             <a:noFill/>
@@ -8057,8 +8159,8 @@
         </p:nvSpPr>
         <p:spPr>
           <a:xfrm>
-            <a:off x="731520" y="502920"/>
-            <a:ext cx="7315200" cy="274320"/>
+            <a:off x="731520" y="320040"/>
+            <a:ext cx="7772400" cy="256032"/>
           </a:xfrm>
           <a:prstGeom prst="rect">
             <a:avLst/>
@@ -8074,7 +8176,7 @@
             <a:pPr>
               <a:defRPr sz="1000" b="1">
                 <a:solidFill>
-                  <a:srgbClr val="06B6D4"/>
+                  <a:srgbClr val="1E40AF"/>
                 </a:solidFill>
                 <a:latin typeface="Segoe UI"/>
               </a:defRPr>
@@ -8093,7 +8195,7 @@
         </p:nvSpPr>
         <p:spPr>
           <a:xfrm>
-            <a:off x="731520" y="777240"/>
+            <a:off x="731520" y="594360"/>
             <a:ext cx="9601200" cy="548640"/>
           </a:xfrm>
           <a:prstGeom prst="rect">
@@ -8108,9 +8210,9 @@
           <a:lstStyle/>
           <a:p>
             <a:pPr>
-              <a:defRPr sz="2200" b="1">
-                <a:solidFill>
-                  <a:srgbClr val="F8FAFC"/>
+              <a:defRPr sz="2100" b="1">
+                <a:solidFill>
+                  <a:srgbClr val="0F2547"/>
                 </a:solidFill>
                 <a:latin typeface="Segoe UI"/>
               </a:defRPr>
@@ -8129,7 +8231,7 @@
         </p:nvSpPr>
         <p:spPr>
           <a:xfrm>
-            <a:off x="10515600" y="640080"/>
+            <a:off x="10515600" y="411480"/>
             <a:ext cx="914400" cy="365760"/>
           </a:xfrm>
           <a:prstGeom prst="rect">
@@ -8146,9 +8248,9 @@
             <a:pPr algn="r">
               <a:defRPr sz="1100" b="1">
                 <a:solidFill>
-                  <a:srgbClr val="64748B"/>
-                </a:solidFill>
-                <a:latin typeface="Consolas"/>
+                  <a:srgbClr val="475569"/>
+                </a:solidFill>
+                <a:latin typeface="Segoe UI"/>
               </a:defRPr>
             </a:pPr>
             <a:r>
@@ -8165,18 +8267,18 @@
         </p:nvSpPr>
         <p:spPr>
           <a:xfrm>
-            <a:off x="731520" y="1554480"/>
-            <a:ext cx="5212080" cy="2377440"/>
+            <a:off x="731520" y="1371600"/>
+            <a:ext cx="5212080" cy="2423160"/>
           </a:xfrm>
           <a:prstGeom prst="roundRect">
             <a:avLst/>
           </a:prstGeom>
           <a:solidFill>
-            <a:srgbClr val="161E31"/>
+            <a:srgbClr val="FFFFFF"/>
           </a:solidFill>
           <a:ln w="12700">
             <a:solidFill>
-              <a:srgbClr val="2D3C5A"/>
+              <a:srgbClr val="CBD5E1"/>
             </a:solidFill>
           </a:ln>
         </p:spPr>
@@ -8218,8 +8320,8 @@
         </p:blipFill>
         <p:spPr>
           <a:xfrm>
-            <a:off x="822960" y="1645920"/>
-            <a:ext cx="5029200" cy="1920240"/>
+            <a:off x="822960" y="1463040"/>
+            <a:ext cx="5029200" cy="1965960"/>
           </a:xfrm>
           <a:prstGeom prst="rect">
             <a:avLst/>
@@ -8234,7 +8336,7 @@
         </p:nvSpPr>
         <p:spPr>
           <a:xfrm>
-            <a:off x="731520" y="3611880"/>
+            <a:off x="731520" y="3474720"/>
             <a:ext cx="5212080" cy="274320"/>
           </a:xfrm>
           <a:prstGeom prst="rect">
@@ -8251,7 +8353,7 @@
             <a:pPr algn="ctr">
               <a:defRPr sz="950" b="1">
                 <a:solidFill>
-                  <a:srgbClr val="06B6D4"/>
+                  <a:srgbClr val="0F2547"/>
                 </a:solidFill>
               </a:defRPr>
             </a:pPr>
@@ -8269,18 +8371,18 @@
         </p:nvSpPr>
         <p:spPr>
           <a:xfrm>
-            <a:off x="6217920" y="1554480"/>
-            <a:ext cx="5212080" cy="2377440"/>
+            <a:off x="6217920" y="1371600"/>
+            <a:ext cx="5212080" cy="2423160"/>
           </a:xfrm>
           <a:prstGeom prst="roundRect">
             <a:avLst/>
           </a:prstGeom>
           <a:solidFill>
-            <a:srgbClr val="161E31"/>
+            <a:srgbClr val="FFFFFF"/>
           </a:solidFill>
           <a:ln w="12700">
             <a:solidFill>
-              <a:srgbClr val="2D3C5A"/>
+              <a:srgbClr val="CBD5E1"/>
             </a:solidFill>
           </a:ln>
         </p:spPr>
@@ -8322,8 +8424,8 @@
         </p:blipFill>
         <p:spPr>
           <a:xfrm>
-            <a:off x="6309360" y="1645920"/>
-            <a:ext cx="5029200" cy="1920240"/>
+            <a:off x="6309360" y="1463040"/>
+            <a:ext cx="5029200" cy="1965960"/>
           </a:xfrm>
           <a:prstGeom prst="rect">
             <a:avLst/>
@@ -8338,7 +8440,7 @@
         </p:nvSpPr>
         <p:spPr>
           <a:xfrm>
-            <a:off x="6217920" y="3611880"/>
+            <a:off x="6217920" y="3474720"/>
             <a:ext cx="5212080" cy="274320"/>
           </a:xfrm>
           <a:prstGeom prst="rect">
@@ -8355,7 +8457,7 @@
             <a:pPr algn="ctr">
               <a:defRPr sz="950" b="1">
                 <a:solidFill>
-                  <a:srgbClr val="06B6D4"/>
+                  <a:srgbClr val="0F2547"/>
                 </a:solidFill>
               </a:defRPr>
             </a:pPr>
@@ -8373,18 +8475,18 @@
         </p:nvSpPr>
         <p:spPr>
           <a:xfrm>
-            <a:off x="731520" y="4114800"/>
-            <a:ext cx="5212080" cy="2377440"/>
+            <a:off x="731520" y="3977639"/>
+            <a:ext cx="5212080" cy="2423160"/>
           </a:xfrm>
           <a:prstGeom prst="roundRect">
             <a:avLst/>
           </a:prstGeom>
           <a:solidFill>
-            <a:srgbClr val="161E31"/>
+            <a:srgbClr val="FFFFFF"/>
           </a:solidFill>
           <a:ln w="12700">
             <a:solidFill>
-              <a:srgbClr val="2D3C5A"/>
+              <a:srgbClr val="CBD5E1"/>
             </a:solidFill>
           </a:ln>
         </p:spPr>
@@ -8426,8 +8528,8 @@
         </p:blipFill>
         <p:spPr>
           <a:xfrm>
-            <a:off x="822960" y="4206240"/>
-            <a:ext cx="5029200" cy="1920240"/>
+            <a:off x="822960" y="4069079"/>
+            <a:ext cx="5029200" cy="1965960"/>
           </a:xfrm>
           <a:prstGeom prst="rect">
             <a:avLst/>
@@ -8442,7 +8544,7 @@
         </p:nvSpPr>
         <p:spPr>
           <a:xfrm>
-            <a:off x="731520" y="6172200"/>
+            <a:off x="731520" y="6080759"/>
             <a:ext cx="5212080" cy="274320"/>
           </a:xfrm>
           <a:prstGeom prst="rect">
@@ -8459,7 +8561,7 @@
             <a:pPr algn="ctr">
               <a:defRPr sz="950" b="1">
                 <a:solidFill>
-                  <a:srgbClr val="06B6D4"/>
+                  <a:srgbClr val="0F2547"/>
                 </a:solidFill>
               </a:defRPr>
             </a:pPr>
@@ -8477,18 +8579,18 @@
         </p:nvSpPr>
         <p:spPr>
           <a:xfrm>
-            <a:off x="6217920" y="4114800"/>
-            <a:ext cx="5212080" cy="2377440"/>
+            <a:off x="6217920" y="3977639"/>
+            <a:ext cx="5212080" cy="2423160"/>
           </a:xfrm>
           <a:prstGeom prst="roundRect">
             <a:avLst/>
           </a:prstGeom>
           <a:solidFill>
-            <a:srgbClr val="161E31"/>
+            <a:srgbClr val="FFFFFF"/>
           </a:solidFill>
           <a:ln w="12700">
             <a:solidFill>
-              <a:srgbClr val="2D3C5A"/>
+              <a:srgbClr val="CBD5E1"/>
             </a:solidFill>
           </a:ln>
         </p:spPr>
@@ -8530,8 +8632,8 @@
         </p:blipFill>
         <p:spPr>
           <a:xfrm>
-            <a:off x="6309360" y="4206240"/>
-            <a:ext cx="5029200" cy="1920240"/>
+            <a:off x="6309360" y="4069079"/>
+            <a:ext cx="5029200" cy="1965960"/>
           </a:xfrm>
           <a:prstGeom prst="rect">
             <a:avLst/>
@@ -8546,7 +8648,7 @@
         </p:nvSpPr>
         <p:spPr>
           <a:xfrm>
-            <a:off x="6217920" y="6172200"/>
+            <a:off x="6217920" y="6080759"/>
             <a:ext cx="5212080" cy="274320"/>
           </a:xfrm>
           <a:prstGeom prst="rect">
@@ -8563,7 +8665,7 @@
             <a:pPr algn="ctr">
               <a:defRPr sz="950" b="1">
                 <a:solidFill>
-                  <a:srgbClr val="06B6D4"/>
+                  <a:srgbClr val="0F2547"/>
                 </a:solidFill>
               </a:defRPr>
             </a:pPr>
@@ -8606,7 +8708,7 @@
             <a:avLst/>
           </a:prstGeom>
           <a:solidFill>
-            <a:srgbClr val="0B0F19"/>
+            <a:srgbClr val="F8FAFC"/>
           </a:solidFill>
           <a:ln>
             <a:noFill/>
@@ -8642,14 +8744,14 @@
         </p:nvSpPr>
         <p:spPr>
           <a:xfrm>
-            <a:off x="731520" y="365760"/>
-            <a:ext cx="10728655" cy="36576"/>
+            <a:off x="0" y="0"/>
+            <a:ext cx="12191695" cy="73152"/>
           </a:xfrm>
           <a:prstGeom prst="rect">
             <a:avLst/>
           </a:prstGeom>
           <a:solidFill>
-            <a:srgbClr val="3B82F6"/>
+            <a:srgbClr val="1E40AF"/>
           </a:solidFill>
           <a:ln>
             <a:noFill/>
@@ -8685,8 +8787,8 @@
         </p:nvSpPr>
         <p:spPr>
           <a:xfrm>
-            <a:off x="731520" y="502920"/>
-            <a:ext cx="7315200" cy="274320"/>
+            <a:off x="731520" y="320040"/>
+            <a:ext cx="7772400" cy="256032"/>
           </a:xfrm>
           <a:prstGeom prst="rect">
             <a:avLst/>
@@ -8702,7 +8804,7 @@
             <a:pPr>
               <a:defRPr sz="1000" b="1">
                 <a:solidFill>
-                  <a:srgbClr val="06B6D4"/>
+                  <a:srgbClr val="1E40AF"/>
                 </a:solidFill>
                 <a:latin typeface="Segoe UI"/>
               </a:defRPr>
@@ -8721,7 +8823,7 @@
         </p:nvSpPr>
         <p:spPr>
           <a:xfrm>
-            <a:off x="731520" y="777240"/>
+            <a:off x="731520" y="594360"/>
             <a:ext cx="9601200" cy="548640"/>
           </a:xfrm>
           <a:prstGeom prst="rect">
@@ -8736,9 +8838,9 @@
           <a:lstStyle/>
           <a:p>
             <a:pPr>
-              <a:defRPr sz="2200" b="1">
-                <a:solidFill>
-                  <a:srgbClr val="F8FAFC"/>
+              <a:defRPr sz="2100" b="1">
+                <a:solidFill>
+                  <a:srgbClr val="0F2547"/>
                 </a:solidFill>
                 <a:latin typeface="Segoe UI"/>
               </a:defRPr>
@@ -8757,7 +8859,7 @@
         </p:nvSpPr>
         <p:spPr>
           <a:xfrm>
-            <a:off x="10515600" y="640080"/>
+            <a:off x="10515600" y="411480"/>
             <a:ext cx="914400" cy="365760"/>
           </a:xfrm>
           <a:prstGeom prst="rect">
@@ -8774,9 +8876,9 @@
             <a:pPr algn="r">
               <a:defRPr sz="1100" b="1">
                 <a:solidFill>
-                  <a:srgbClr val="64748B"/>
-                </a:solidFill>
-                <a:latin typeface="Consolas"/>
+                  <a:srgbClr val="475569"/>
+                </a:solidFill>
+                <a:latin typeface="Segoe UI"/>
               </a:defRPr>
             </a:pPr>
             <a:r>
@@ -8793,18 +8895,18 @@
         </p:nvSpPr>
         <p:spPr>
           <a:xfrm>
-            <a:off x="731520" y="1554480"/>
-            <a:ext cx="5212080" cy="2377440"/>
+            <a:off x="731520" y="1371600"/>
+            <a:ext cx="5212080" cy="2423160"/>
           </a:xfrm>
           <a:prstGeom prst="roundRect">
             <a:avLst/>
           </a:prstGeom>
           <a:solidFill>
-            <a:srgbClr val="161E31"/>
+            <a:srgbClr val="FFFFFF"/>
           </a:solidFill>
           <a:ln w="12700">
             <a:solidFill>
-              <a:srgbClr val="2D3C5A"/>
+              <a:srgbClr val="CBD5E1"/>
             </a:solidFill>
           </a:ln>
         </p:spPr>
@@ -8846,8 +8948,8 @@
         </p:blipFill>
         <p:spPr>
           <a:xfrm>
-            <a:off x="822960" y="1645920"/>
-            <a:ext cx="5029200" cy="1920240"/>
+            <a:off x="822960" y="1463040"/>
+            <a:ext cx="5029200" cy="1965960"/>
           </a:xfrm>
           <a:prstGeom prst="rect">
             <a:avLst/>
@@ -8862,7 +8964,7 @@
         </p:nvSpPr>
         <p:spPr>
           <a:xfrm>
-            <a:off x="731520" y="3611880"/>
+            <a:off x="731520" y="3474720"/>
             <a:ext cx="5212080" cy="274320"/>
           </a:xfrm>
           <a:prstGeom prst="rect">
@@ -8879,7 +8981,7 @@
             <a:pPr algn="ctr">
               <a:defRPr sz="950" b="1">
                 <a:solidFill>
-                  <a:srgbClr val="06B6D4"/>
+                  <a:srgbClr val="0F2547"/>
                 </a:solidFill>
               </a:defRPr>
             </a:pPr>
@@ -8897,18 +8999,18 @@
         </p:nvSpPr>
         <p:spPr>
           <a:xfrm>
-            <a:off x="6217920" y="1554480"/>
-            <a:ext cx="5212080" cy="2377440"/>
+            <a:off x="6217920" y="1371600"/>
+            <a:ext cx="5212080" cy="2423160"/>
           </a:xfrm>
           <a:prstGeom prst="roundRect">
             <a:avLst/>
           </a:prstGeom>
           <a:solidFill>
-            <a:srgbClr val="161E31"/>
+            <a:srgbClr val="FFFFFF"/>
           </a:solidFill>
           <a:ln w="12700">
             <a:solidFill>
-              <a:srgbClr val="2D3C5A"/>
+              <a:srgbClr val="CBD5E1"/>
             </a:solidFill>
           </a:ln>
         </p:spPr>
@@ -8950,8 +9052,8 @@
         </p:blipFill>
         <p:spPr>
           <a:xfrm>
-            <a:off x="6309360" y="1645920"/>
-            <a:ext cx="5029200" cy="1920240"/>
+            <a:off x="6309360" y="1463040"/>
+            <a:ext cx="5029200" cy="1965960"/>
           </a:xfrm>
           <a:prstGeom prst="rect">
             <a:avLst/>
@@ -8966,7 +9068,7 @@
         </p:nvSpPr>
         <p:spPr>
           <a:xfrm>
-            <a:off x="6217920" y="3611880"/>
+            <a:off x="6217920" y="3474720"/>
             <a:ext cx="5212080" cy="274320"/>
           </a:xfrm>
           <a:prstGeom prst="rect">
@@ -8983,7 +9085,7 @@
             <a:pPr algn="ctr">
               <a:defRPr sz="950" b="1">
                 <a:solidFill>
-                  <a:srgbClr val="06B6D4"/>
+                  <a:srgbClr val="0F2547"/>
                 </a:solidFill>
               </a:defRPr>
             </a:pPr>
@@ -9001,18 +9103,18 @@
         </p:nvSpPr>
         <p:spPr>
           <a:xfrm>
-            <a:off x="731520" y="4114800"/>
-            <a:ext cx="5212080" cy="2377440"/>
+            <a:off x="731520" y="3977639"/>
+            <a:ext cx="5212080" cy="2423160"/>
           </a:xfrm>
           <a:prstGeom prst="roundRect">
             <a:avLst/>
           </a:prstGeom>
           <a:solidFill>
-            <a:srgbClr val="161E31"/>
+            <a:srgbClr val="FFFFFF"/>
           </a:solidFill>
           <a:ln w="12700">
             <a:solidFill>
-              <a:srgbClr val="2D3C5A"/>
+              <a:srgbClr val="CBD5E1"/>
             </a:solidFill>
           </a:ln>
         </p:spPr>
@@ -9054,8 +9156,8 @@
         </p:blipFill>
         <p:spPr>
           <a:xfrm>
-            <a:off x="822960" y="4206240"/>
-            <a:ext cx="5029200" cy="1920240"/>
+            <a:off x="822960" y="4069079"/>
+            <a:ext cx="5029200" cy="1965960"/>
           </a:xfrm>
           <a:prstGeom prst="rect">
             <a:avLst/>
@@ -9070,7 +9172,7 @@
         </p:nvSpPr>
         <p:spPr>
           <a:xfrm>
-            <a:off x="731520" y="6172200"/>
+            <a:off x="731520" y="6080759"/>
             <a:ext cx="5212080" cy="274320"/>
           </a:xfrm>
           <a:prstGeom prst="rect">
@@ -9087,7 +9189,7 @@
             <a:pPr algn="ctr">
               <a:defRPr sz="950" b="1">
                 <a:solidFill>
-                  <a:srgbClr val="06B6D4"/>
+                  <a:srgbClr val="0F2547"/>
                 </a:solidFill>
               </a:defRPr>
             </a:pPr>
@@ -9105,18 +9207,18 @@
         </p:nvSpPr>
         <p:spPr>
           <a:xfrm>
-            <a:off x="6217920" y="4114800"/>
-            <a:ext cx="5212080" cy="2377440"/>
+            <a:off x="6217920" y="3977639"/>
+            <a:ext cx="5212080" cy="2423160"/>
           </a:xfrm>
           <a:prstGeom prst="roundRect">
             <a:avLst/>
           </a:prstGeom>
           <a:solidFill>
-            <a:srgbClr val="161E31"/>
+            <a:srgbClr val="FFFFFF"/>
           </a:solidFill>
           <a:ln w="12700">
             <a:solidFill>
-              <a:srgbClr val="2D3C5A"/>
+              <a:srgbClr val="CBD5E1"/>
             </a:solidFill>
           </a:ln>
         </p:spPr>
@@ -9158,8 +9260,8 @@
         </p:blipFill>
         <p:spPr>
           <a:xfrm>
-            <a:off x="6309360" y="4206240"/>
-            <a:ext cx="5029200" cy="1920240"/>
+            <a:off x="6309360" y="4069079"/>
+            <a:ext cx="5029200" cy="1965960"/>
           </a:xfrm>
           <a:prstGeom prst="rect">
             <a:avLst/>
@@ -9174,7 +9276,7 @@
         </p:nvSpPr>
         <p:spPr>
           <a:xfrm>
-            <a:off x="6217920" y="6172200"/>
+            <a:off x="6217920" y="6080759"/>
             <a:ext cx="5212080" cy="274320"/>
           </a:xfrm>
           <a:prstGeom prst="rect">
@@ -9191,7 +9293,7 @@
             <a:pPr algn="ctr">
               <a:defRPr sz="950" b="1">
                 <a:solidFill>
-                  <a:srgbClr val="06B6D4"/>
+                  <a:srgbClr val="0F2547"/>
                 </a:solidFill>
               </a:defRPr>
             </a:pPr>
@@ -9234,7 +9336,7 @@
             <a:avLst/>
           </a:prstGeom>
           <a:solidFill>
-            <a:srgbClr val="0B0F19"/>
+            <a:srgbClr val="F8FAFC"/>
           </a:solidFill>
           <a:ln>
             <a:noFill/>
@@ -9270,14 +9372,14 @@
         </p:nvSpPr>
         <p:spPr>
           <a:xfrm>
-            <a:off x="731520" y="365760"/>
-            <a:ext cx="10728655" cy="36576"/>
+            <a:off x="0" y="0"/>
+            <a:ext cx="12191695" cy="73152"/>
           </a:xfrm>
           <a:prstGeom prst="rect">
             <a:avLst/>
           </a:prstGeom>
           <a:solidFill>
-            <a:srgbClr val="3B82F6"/>
+            <a:srgbClr val="1E40AF"/>
           </a:solidFill>
           <a:ln>
             <a:noFill/>
@@ -9313,8 +9415,8 @@
         </p:nvSpPr>
         <p:spPr>
           <a:xfrm>
-            <a:off x="731520" y="502920"/>
-            <a:ext cx="7315200" cy="274320"/>
+            <a:off x="731520" y="320040"/>
+            <a:ext cx="7772400" cy="256032"/>
           </a:xfrm>
           <a:prstGeom prst="rect">
             <a:avLst/>
@@ -9330,7 +9432,7 @@
             <a:pPr>
               <a:defRPr sz="1000" b="1">
                 <a:solidFill>
-                  <a:srgbClr val="06B6D4"/>
+                  <a:srgbClr val="1E40AF"/>
                 </a:solidFill>
                 <a:latin typeface="Segoe UI"/>
               </a:defRPr>
@@ -9349,7 +9451,7 @@
         </p:nvSpPr>
         <p:spPr>
           <a:xfrm>
-            <a:off x="731520" y="777240"/>
+            <a:off x="731520" y="594360"/>
             <a:ext cx="9601200" cy="548640"/>
           </a:xfrm>
           <a:prstGeom prst="rect">
@@ -9364,9 +9466,9 @@
           <a:lstStyle/>
           <a:p>
             <a:pPr>
-              <a:defRPr sz="2200" b="1">
-                <a:solidFill>
-                  <a:srgbClr val="F8FAFC"/>
+              <a:defRPr sz="2100" b="1">
+                <a:solidFill>
+                  <a:srgbClr val="0F2547"/>
                 </a:solidFill>
                 <a:latin typeface="Segoe UI"/>
               </a:defRPr>
@@ -9385,7 +9487,7 @@
         </p:nvSpPr>
         <p:spPr>
           <a:xfrm>
-            <a:off x="10515600" y="640080"/>
+            <a:off x="10515600" y="411480"/>
             <a:ext cx="914400" cy="365760"/>
           </a:xfrm>
           <a:prstGeom prst="rect">
@@ -9402,9 +9504,9 @@
             <a:pPr algn="r">
               <a:defRPr sz="1100" b="1">
                 <a:solidFill>
-                  <a:srgbClr val="64748B"/>
-                </a:solidFill>
-                <a:latin typeface="Consolas"/>
+                  <a:srgbClr val="475569"/>
+                </a:solidFill>
+                <a:latin typeface="Segoe UI"/>
               </a:defRPr>
             </a:pPr>
             <a:r>
@@ -9421,18 +9523,18 @@
         </p:nvSpPr>
         <p:spPr>
           <a:xfrm>
-            <a:off x="731520" y="1554480"/>
-            <a:ext cx="5212080" cy="4846320"/>
+            <a:off x="731520" y="1371600"/>
+            <a:ext cx="5212080" cy="4937760"/>
           </a:xfrm>
           <a:prstGeom prst="roundRect">
             <a:avLst/>
           </a:prstGeom>
           <a:solidFill>
-            <a:srgbClr val="161E31"/>
+            <a:srgbClr val="FFFFFF"/>
           </a:solidFill>
           <a:ln w="12700">
             <a:solidFill>
-              <a:srgbClr val="2D3C5A"/>
+              <a:srgbClr val="CBD5E1"/>
             </a:solidFill>
           </a:ln>
         </p:spPr>
@@ -9466,8 +9568,8 @@
         </p:nvSpPr>
         <p:spPr>
           <a:xfrm>
-            <a:off x="914400" y="1691640"/>
-            <a:ext cx="4846320" cy="4480560"/>
+            <a:off x="914400" y="1508760"/>
+            <a:ext cx="4846320" cy="4663440"/>
           </a:xfrm>
           <a:prstGeom prst="rect">
             <a:avLst/>
@@ -9483,7 +9585,7 @@
             <a:pPr>
               <a:defRPr b="1" sz="1200">
                 <a:solidFill>
-                  <a:srgbClr val="3B82F6"/>
+                  <a:srgbClr val="0F2547"/>
                 </a:solidFill>
               </a:defRPr>
             </a:pPr>
@@ -9500,7 +9602,7 @@
             <a:r>
               <a:rPr b="1" sz="950">
                 <a:solidFill>
-                  <a:srgbClr val="06B6D4"/>
+                  <a:srgbClr val="1E40AF"/>
                 </a:solidFill>
               </a:rPr>
               <a:t>ADMINISTRATOR
@@ -9509,7 +9611,7 @@
             <a:r>
               <a:rPr sz="850">
                 <a:solidFill>
-                  <a:srgbClr val="94A3B8"/>
+                  <a:srgbClr val="475569"/>
                 </a:solidFill>
               </a:rPr>
               <a:t>Full authority: User provisioning, role assignment, account suspension, password reset, book catalog registration and book deletion. Complete audit visibility.</a:t>
@@ -9524,7 +9626,7 @@
             <a:r>
               <a:rPr b="1" sz="950">
                 <a:solidFill>
-                  <a:srgbClr val="06B6D4"/>
+                  <a:srgbClr val="1E40AF"/>
                 </a:solidFill>
               </a:rPr>
               <a:t>LIBRARIAN
@@ -9533,7 +9635,7 @@
             <a:r>
               <a:rPr sz="850">
                 <a:solidFill>
-                  <a:srgbClr val="94A3B8"/>
+                  <a:srgbClr val="475569"/>
                 </a:solidFill>
               </a:rPr>
               <a:t>Circulation desk manager: Book loan creation, digital request approvals, copy reservations, check-in returns, and fine settlement. Cannot manage user accounts.</a:t>
@@ -9548,7 +9650,7 @@
             <a:r>
               <a:rPr b="1" sz="950">
                 <a:solidFill>
-                  <a:srgbClr val="06B6D4"/>
+                  <a:srgbClr val="1E40AF"/>
                 </a:solidFill>
               </a:rPr>
               <a:t>STAFF (FACULTY)
@@ -9557,7 +9659,7 @@
             <a:r>
               <a:rPr sz="850">
                 <a:solidFill>
-                  <a:srgbClr val="94A3B8"/>
+                  <a:srgbClr val="475569"/>
                 </a:solidFill>
               </a:rPr>
               <a:t>Academic borrower: Search catalog, borrow up to 3 books, view academic prerequisite roadmaps, explore author degree centrality, and review fine ledgers.</a:t>
@@ -9572,7 +9674,7 @@
             <a:r>
               <a:rPr b="1" sz="950">
                 <a:solidFill>
-                  <a:srgbClr val="06B6D4"/>
+                  <a:srgbClr val="1E40AF"/>
                 </a:solidFill>
               </a:rPr>
               <a:t>STUDENT (PATRON)
@@ -9581,7 +9683,7 @@
             <a:r>
               <a:rPr sz="850">
                 <a:solidFill>
-                  <a:srgbClr val="94A3B8"/>
+                  <a:srgbClr val="475569"/>
                 </a:solidFill>
               </a:rPr>
               <a:t>Academic patron: Search catalog, submit loan requests, view personalized AI recommendations, track prerequisite roadmaps, and monitor individual fines.</a:t>
@@ -9597,18 +9699,18 @@
         </p:nvSpPr>
         <p:spPr>
           <a:xfrm>
-            <a:off x="6217920" y="1554480"/>
-            <a:ext cx="5242255" cy="4846320"/>
+            <a:off x="6217920" y="1371600"/>
+            <a:ext cx="5242255" cy="4937760"/>
           </a:xfrm>
           <a:prstGeom prst="roundRect">
             <a:avLst/>
           </a:prstGeom>
           <a:solidFill>
-            <a:srgbClr val="161E31"/>
+            <a:srgbClr val="FFFFFF"/>
           </a:solidFill>
           <a:ln w="12700">
             <a:solidFill>
-              <a:srgbClr val="2D3C5A"/>
+              <a:srgbClr val="CBD5E1"/>
             </a:solidFill>
           </a:ln>
         </p:spPr>
@@ -9642,8 +9744,8 @@
         </p:nvSpPr>
         <p:spPr>
           <a:xfrm>
-            <a:off x="6400800" y="1691640"/>
-            <a:ext cx="4876495" cy="4480560"/>
+            <a:off x="6400800" y="1508760"/>
+            <a:ext cx="4876495" cy="4663440"/>
           </a:xfrm>
           <a:prstGeom prst="rect">
             <a:avLst/>
@@ -9659,7 +9761,7 @@
             <a:pPr>
               <a:defRPr b="1" sz="1200">
                 <a:solidFill>
-                  <a:srgbClr val="10B981"/>
+                  <a:srgbClr val="0F2547"/>
                 </a:solidFill>
               </a:defRPr>
             </a:pPr>
@@ -9676,7 +9778,7 @@
             <a:r>
               <a:rPr b="1" sz="950">
                 <a:solidFill>
-                  <a:srgbClr val="F8FAFC"/>
+                  <a:srgbClr val="1E40AF"/>
                 </a:solidFill>
               </a:rPr>
               <a:t>1. Book-to-Book Bridge (Degrees of Separation)
@@ -9685,7 +9787,7 @@
             <a:r>
               <a:rPr sz="850">
                 <a:solidFill>
-                  <a:srgbClr val="94A3B8"/>
+                  <a:srgbClr val="475569"/>
                 </a:solidFill>
               </a:rPr>
               <a:t>Uses Cypher shortestPath() algorithm to uncover multi-hop links between disparate titles via prerequisites, co-authors, and categories.</a:t>
@@ -9700,7 +9802,7 @@
             <a:r>
               <a:rPr b="1" sz="950">
                 <a:solidFill>
-                  <a:srgbClr val="F8FAFC"/>
+                  <a:srgbClr val="1E40AF"/>
                 </a:solidFill>
               </a:rPr>
               <a:t>2. Academic Learning Roadmaps (Directed Acyclic Graphs)
@@ -9709,7 +9811,7 @@
             <a:r>
               <a:rPr sz="850">
                 <a:solidFill>
-                  <a:srgbClr val="94A3B8"/>
+                  <a:srgbClr val="475569"/>
                 </a:solidFill>
               </a:rPr>
               <a:t>Hierarchical Vis.js network visualizer mapping foundational courses to advanced texts across CS, AI, and Distributed Systems.</a:t>
@@ -9724,7 +9826,7 @@
             <a:r>
               <a:rPr b="1" sz="950">
                 <a:solidFill>
-                  <a:srgbClr val="F8FAFC"/>
+                  <a:srgbClr val="1E40AF"/>
                 </a:solidFill>
               </a:rPr>
               <a:t>3. Privacy-Preserving Patron Masking
@@ -9733,7 +9835,7 @@
             <a:r>
               <a:rPr sz="850">
                 <a:solidFill>
-                  <a:srgbClr val="94A3B8"/>
+                  <a:srgbClr val="475569"/>
                 </a:solidFill>
               </a:rPr>
               <a:t>When Students or Staff browse the Live Knowledge Graph, other patrons' identities and borrow requests are anonymized in real time.</a:t>
@@ -9748,7 +9850,7 @@
             <a:r>
               <a:rPr b="1" sz="950">
                 <a:solidFill>
-                  <a:srgbClr val="F8FAFC"/>
+                  <a:srgbClr val="1E40AF"/>
                 </a:solidFill>
               </a:rPr>
               <a:t>4. Author Degree Centrality &amp; Borrowing Density
@@ -9757,7 +9859,7 @@
             <a:r>
               <a:rPr sz="850">
                 <a:solidFill>
-                  <a:srgbClr val="94A3B8"/>
+                  <a:srgbClr val="475569"/>
                 </a:solidFill>
               </a:rPr>
               <a:t>Computes influential scholars by loan volume and category closeness centrality to inform faculty acquisition budgets.</a:t>
@@ -9798,7 +9900,7 @@
             <a:avLst/>
           </a:prstGeom>
           <a:solidFill>
-            <a:srgbClr val="0B0F19"/>
+            <a:srgbClr val="F8FAFC"/>
           </a:solidFill>
           <a:ln>
             <a:noFill/>
@@ -9834,14 +9936,14 @@
         </p:nvSpPr>
         <p:spPr>
           <a:xfrm>
-            <a:off x="731520" y="365760"/>
-            <a:ext cx="10728655" cy="36576"/>
+            <a:off x="0" y="0"/>
+            <a:ext cx="12191695" cy="73152"/>
           </a:xfrm>
           <a:prstGeom prst="rect">
             <a:avLst/>
           </a:prstGeom>
           <a:solidFill>
-            <a:srgbClr val="3B82F6"/>
+            <a:srgbClr val="1E40AF"/>
           </a:solidFill>
           <a:ln>
             <a:noFill/>
@@ -9877,8 +9979,8 @@
         </p:nvSpPr>
         <p:spPr>
           <a:xfrm>
-            <a:off x="731520" y="502920"/>
-            <a:ext cx="7315200" cy="274320"/>
+            <a:off x="731520" y="320040"/>
+            <a:ext cx="7772400" cy="256032"/>
           </a:xfrm>
           <a:prstGeom prst="rect">
             <a:avLst/>
@@ -9894,7 +9996,7 @@
             <a:pPr>
               <a:defRPr sz="1000" b="1">
                 <a:solidFill>
-                  <a:srgbClr val="06B6D4"/>
+                  <a:srgbClr val="1E40AF"/>
                 </a:solidFill>
                 <a:latin typeface="Segoe UI"/>
               </a:defRPr>
@@ -9913,7 +10015,7 @@
         </p:nvSpPr>
         <p:spPr>
           <a:xfrm>
-            <a:off x="731520" y="777240"/>
+            <a:off x="731520" y="594360"/>
             <a:ext cx="9601200" cy="548640"/>
           </a:xfrm>
           <a:prstGeom prst="rect">
@@ -9928,15 +10030,15 @@
           <a:lstStyle/>
           <a:p>
             <a:pPr>
-              <a:defRPr sz="2200" b="1">
-                <a:solidFill>
-                  <a:srgbClr val="F8FAFC"/>
+              <a:defRPr sz="2100" b="1">
+                <a:solidFill>
+                  <a:srgbClr val="0F2547"/>
                 </a:solidFill>
                 <a:latin typeface="Segoe UI"/>
               </a:defRPr>
             </a:pPr>
             <a:r>
-              <a:t>Executive Presentation Agenda</a:t>
+              <a:t>Presentation Roadmap &amp; Topics Covered</a:t>
             </a:r>
           </a:p>
         </p:txBody>
@@ -9949,7 +10051,7 @@
         </p:nvSpPr>
         <p:spPr>
           <a:xfrm>
-            <a:off x="10515600" y="640080"/>
+            <a:off x="10515600" y="411480"/>
             <a:ext cx="914400" cy="365760"/>
           </a:xfrm>
           <a:prstGeom prst="rect">
@@ -9966,9 +10068,9 @@
             <a:pPr algn="r">
               <a:defRPr sz="1100" b="1">
                 <a:solidFill>
-                  <a:srgbClr val="64748B"/>
-                </a:solidFill>
-                <a:latin typeface="Consolas"/>
+                  <a:srgbClr val="475569"/>
+                </a:solidFill>
+                <a:latin typeface="Segoe UI"/>
               </a:defRPr>
             </a:pPr>
             <a:r>
@@ -9985,18 +10087,18 @@
         </p:nvSpPr>
         <p:spPr>
           <a:xfrm>
-            <a:off x="731520" y="1645920"/>
-            <a:ext cx="2578608" cy="4663440"/>
+            <a:off x="731520" y="1371600"/>
+            <a:ext cx="2578608" cy="4937760"/>
           </a:xfrm>
           <a:prstGeom prst="roundRect">
             <a:avLst/>
           </a:prstGeom>
           <a:solidFill>
-            <a:srgbClr val="161E31"/>
+            <a:srgbClr val="FFFFFF"/>
           </a:solidFill>
           <a:ln w="12700">
             <a:solidFill>
-              <a:srgbClr val="2D3C5A"/>
+              <a:srgbClr val="CBD5E1"/>
             </a:solidFill>
           </a:ln>
         </p:spPr>
@@ -10030,14 +10132,14 @@
         </p:nvSpPr>
         <p:spPr>
           <a:xfrm>
-            <a:off x="731520" y="1645920"/>
-            <a:ext cx="2578608" cy="73152"/>
+            <a:off x="731520" y="1371600"/>
+            <a:ext cx="2578608" cy="640080"/>
           </a:xfrm>
           <a:prstGeom prst="rect">
             <a:avLst/>
           </a:prstGeom>
           <a:solidFill>
-            <a:srgbClr val="3B82F6"/>
+            <a:srgbClr val="0F2547"/>
           </a:solidFill>
           <a:ln>
             <a:noFill/>
@@ -10073,8 +10175,55 @@
         </p:nvSpPr>
         <p:spPr>
           <a:xfrm>
-            <a:off x="868680" y="1828800"/>
-            <a:ext cx="2304288" cy="4297680"/>
+            <a:off x="731520" y="1444752"/>
+            <a:ext cx="2578608" cy="548640"/>
+          </a:xfrm>
+          <a:prstGeom prst="rect">
+            <a:avLst/>
+          </a:prstGeom>
+          <a:noFill/>
+        </p:spPr>
+        <p:txBody>
+          <a:bodyPr wrap="none">
+            <a:spAutoFit/>
+          </a:bodyPr>
+          <a:lstStyle/>
+          <a:p>
+            <a:pPr algn="ctr">
+              <a:defRPr b="1" sz="900">
+                <a:solidFill>
+                  <a:srgbClr val="BFDBFE"/>
+                </a:solidFill>
+              </a:defRPr>
+            </a:pPr>
+            <a:r>
+              <a:t>SECTION 1</a:t>
+            </a:r>
+          </a:p>
+          <a:p>
+            <a:pPr algn="ctr">
+              <a:defRPr b="1" sz="1100">
+                <a:solidFill>
+                  <a:srgbClr val="FFFFFF"/>
+                </a:solidFill>
+              </a:defRPr>
+            </a:pPr>
+            <a:r>
+              <a:t>Introduction &amp; Architecture</a:t>
+            </a:r>
+          </a:p>
+        </p:txBody>
+      </p:sp>
+      <p:sp>
+        <p:nvSpPr>
+          <p:cNvPr id="10" name="TextBox 9"/>
+          <p:cNvSpPr txBox="1"/>
+          <p:nvPr/>
+        </p:nvSpPr>
+        <p:spPr>
+          <a:xfrm>
+            <a:off x="868680" y="2148840"/>
+            <a:ext cx="2304288" cy="4069080"/>
           </a:xfrm>
           <a:prstGeom prst="rect">
             <a:avLst/>
@@ -10086,35 +10235,6 @@
             <a:spAutoFit/>
           </a:bodyPr>
           <a:lstStyle/>
-          <a:p>
-            <a:pPr>
-              <a:defRPr sz="2800" b="1">
-                <a:solidFill>
-                  <a:srgbClr val="3B82F6"/>
-                </a:solidFill>
-                <a:latin typeface="Consolas"/>
-              </a:defRPr>
-            </a:pPr>
-            <a:r>
-              <a:t>01</a:t>
-            </a:r>
-          </a:p>
-          <a:p>
-            <a:pPr>
-              <a:spcBef>
-                <a:spcPts val="400"/>
-              </a:spcBef>
-              <a:defRPr sz="1300" b="1">
-                <a:solidFill>
-                  <a:srgbClr val="F8FAFC"/>
-                </a:solidFill>
-                <a:latin typeface="Segoe UI"/>
-              </a:defRPr>
-            </a:pPr>
-            <a:r>
-              <a:t>Project Introduction &amp; Design</a:t>
-            </a:r>
-          </a:p>
           <a:p>
             <a:pPr>
               <a:spcBef>
@@ -10122,13 +10242,12 @@
               </a:spcBef>
               <a:defRPr sz="1000">
                 <a:solidFill>
-                  <a:srgbClr val="94A3B8"/>
-                </a:solidFill>
-                <a:latin typeface="Segoe UI"/>
-              </a:defRPr>
-            </a:pPr>
-            <a:r>
-              <a:t>• Problem Statement &amp; Academic Objectives</a:t>
+                  <a:srgbClr val="1E293B"/>
+                </a:solidFill>
+              </a:defRPr>
+            </a:pPr>
+            <a:r>
+              <a:t>• Problem Statement &amp; Objectives</a:t>
             </a:r>
           </a:p>
           <a:p>
@@ -10138,13 +10257,12 @@
               </a:spcBef>
               <a:defRPr sz="1000">
                 <a:solidFill>
-                  <a:srgbClr val="94A3B8"/>
-                </a:solidFill>
-                <a:latin typeface="Segoe UI"/>
-              </a:defRPr>
-            </a:pPr>
-            <a:r>
-              <a:t>• Proposed Solution &amp; System Scope</a:t>
+                  <a:srgbClr val="1E293B"/>
+                </a:solidFill>
+              </a:defRPr>
+            </a:pPr>
+            <a:r>
+              <a:t>• Proposed Dual-Database Solution</a:t>
             </a:r>
           </a:p>
           <a:p>
@@ -10154,13 +10272,12 @@
               </a:spcBef>
               <a:defRPr sz="1000">
                 <a:solidFill>
-                  <a:srgbClr val="94A3B8"/>
-                </a:solidFill>
-                <a:latin typeface="Segoe UI"/>
-              </a:defRPr>
-            </a:pPr>
-            <a:r>
-              <a:t>• Multi-Tier Architecture &amp; Tech Stack</a:t>
+                  <a:srgbClr val="1E293B"/>
+                </a:solidFill>
+              </a:defRPr>
+            </a:pPr>
+            <a:r>
+              <a:t>• 4-Tier Architecture &amp; Tech Stack</a:t>
             </a:r>
           </a:p>
           <a:p>
@@ -10170,37 +10287,36 @@
               </a:spcBef>
               <a:defRPr sz="1000">
                 <a:solidFill>
-                  <a:srgbClr val="94A3B8"/>
-                </a:solidFill>
-                <a:latin typeface="Segoe UI"/>
-              </a:defRPr>
-            </a:pPr>
-            <a:r>
-              <a:t>• Module Responsibilities &amp; Data Flow</a:t>
-            </a:r>
-          </a:p>
-        </p:txBody>
-      </p:sp>
-      <p:sp>
-        <p:nvSpPr>
-          <p:cNvPr id="10" name="Rounded Rectangle 9"/>
+                  <a:srgbClr val="1E293B"/>
+                </a:solidFill>
+              </a:defRPr>
+            </a:pPr>
+            <a:r>
+              <a:t>• Core Modules &amp; Data Interaction</a:t>
+            </a:r>
+          </a:p>
+        </p:txBody>
+      </p:sp>
+      <p:sp>
+        <p:nvSpPr>
+          <p:cNvPr id="11" name="Rounded Rectangle 10"/>
           <p:cNvSpPr/>
           <p:nvPr/>
         </p:nvSpPr>
         <p:spPr>
           <a:xfrm>
-            <a:off x="3456432" y="1645920"/>
-            <a:ext cx="2578608" cy="4663440"/>
+            <a:off x="3456432" y="1371600"/>
+            <a:ext cx="2578608" cy="4937760"/>
           </a:xfrm>
           <a:prstGeom prst="roundRect">
             <a:avLst/>
           </a:prstGeom>
           <a:solidFill>
-            <a:srgbClr val="161E31"/>
+            <a:srgbClr val="FFFFFF"/>
           </a:solidFill>
           <a:ln w="12700">
             <a:solidFill>
-              <a:srgbClr val="2D3C5A"/>
+              <a:srgbClr val="CBD5E1"/>
             </a:solidFill>
           </a:ln>
         </p:spPr>
@@ -10228,20 +10344,20 @@
       </p:sp>
       <p:sp>
         <p:nvSpPr>
-          <p:cNvPr id="11" name="Rectangle 10"/>
+          <p:cNvPr id="12" name="Rectangle 11"/>
           <p:cNvSpPr/>
           <p:nvPr/>
         </p:nvSpPr>
         <p:spPr>
           <a:xfrm>
-            <a:off x="3456432" y="1645920"/>
-            <a:ext cx="2578608" cy="73152"/>
+            <a:off x="3456432" y="1371600"/>
+            <a:ext cx="2578608" cy="640080"/>
           </a:xfrm>
           <a:prstGeom prst="rect">
             <a:avLst/>
           </a:prstGeom>
           <a:solidFill>
-            <a:srgbClr val="06B6D4"/>
+            <a:srgbClr val="0F2547"/>
           </a:solidFill>
           <a:ln>
             <a:noFill/>
@@ -10271,14 +10387,61 @@
       </p:sp>
       <p:sp>
         <p:nvSpPr>
-          <p:cNvPr id="12" name="TextBox 11"/>
+          <p:cNvPr id="13" name="TextBox 12"/>
           <p:cNvSpPr txBox="1"/>
           <p:nvPr/>
         </p:nvSpPr>
         <p:spPr>
           <a:xfrm>
-            <a:off x="3593592" y="1828800"/>
-            <a:ext cx="2304288" cy="4297680"/>
+            <a:off x="3456432" y="1444752"/>
+            <a:ext cx="2578608" cy="548640"/>
+          </a:xfrm>
+          <a:prstGeom prst="rect">
+            <a:avLst/>
+          </a:prstGeom>
+          <a:noFill/>
+        </p:spPr>
+        <p:txBody>
+          <a:bodyPr wrap="none">
+            <a:spAutoFit/>
+          </a:bodyPr>
+          <a:lstStyle/>
+          <a:p>
+            <a:pPr algn="ctr">
+              <a:defRPr b="1" sz="900">
+                <a:solidFill>
+                  <a:srgbClr val="BFDBFE"/>
+                </a:solidFill>
+              </a:defRPr>
+            </a:pPr>
+            <a:r>
+              <a:t>SECTION 2</a:t>
+            </a:r>
+          </a:p>
+          <a:p>
+            <a:pPr algn="ctr">
+              <a:defRPr b="1" sz="1100">
+                <a:solidFill>
+                  <a:srgbClr val="FFFFFF"/>
+                </a:solidFill>
+              </a:defRPr>
+            </a:pPr>
+            <a:r>
+              <a:t>Database Design &amp; Schema</a:t>
+            </a:r>
+          </a:p>
+        </p:txBody>
+      </p:sp>
+      <p:sp>
+        <p:nvSpPr>
+          <p:cNvPr id="14" name="TextBox 13"/>
+          <p:cNvSpPr txBox="1"/>
+          <p:nvPr/>
+        </p:nvSpPr>
+        <p:spPr>
+          <a:xfrm>
+            <a:off x="3593592" y="2148840"/>
+            <a:ext cx="2304288" cy="4069080"/>
           </a:xfrm>
           <a:prstGeom prst="rect">
             <a:avLst/>
@@ -10290,35 +10453,6 @@
             <a:spAutoFit/>
           </a:bodyPr>
           <a:lstStyle/>
-          <a:p>
-            <a:pPr>
-              <a:defRPr sz="2800" b="1">
-                <a:solidFill>
-                  <a:srgbClr val="06B6D4"/>
-                </a:solidFill>
-                <a:latin typeface="Consolas"/>
-              </a:defRPr>
-            </a:pPr>
-            <a:r>
-              <a:t>02</a:t>
-            </a:r>
-          </a:p>
-          <a:p>
-            <a:pPr>
-              <a:spcBef>
-                <a:spcPts val="400"/>
-              </a:spcBef>
-              <a:defRPr sz="1300" b="1">
-                <a:solidFill>
-                  <a:srgbClr val="F8FAFC"/>
-                </a:solidFill>
-                <a:latin typeface="Segoe UI"/>
-              </a:defRPr>
-            </a:pPr>
-            <a:r>
-              <a:t>Database Design &amp; Implementation</a:t>
-            </a:r>
-          </a:p>
           <a:p>
             <a:pPr>
               <a:spcBef>
@@ -10326,13 +10460,12 @@
               </a:spcBef>
               <a:defRPr sz="1000">
                 <a:solidFill>
-                  <a:srgbClr val="94A3B8"/>
-                </a:solidFill>
-                <a:latin typeface="Segoe UI"/>
-              </a:defRPr>
-            </a:pPr>
-            <a:r>
-              <a:t>• Conceptual Entity-Relationship (ER) Diagram</a:t>
+                  <a:srgbClr val="1E293B"/>
+                </a:solidFill>
+              </a:defRPr>
+            </a:pPr>
+            <a:r>
+              <a:t>• Entity-Relationship (ER) Diagram</a:t>
             </a:r>
           </a:p>
           <a:p>
@@ -10342,13 +10475,12 @@
               </a:spcBef>
               <a:defRPr sz="1000">
                 <a:solidFill>
-                  <a:srgbClr val="94A3B8"/>
-                </a:solidFill>
-                <a:latin typeface="Segoe UI"/>
-              </a:defRPr>
-            </a:pPr>
-            <a:r>
-              <a:t>• Relational Schema Mapping &amp; Normalization (BCNF)</a:t>
+                  <a:srgbClr val="1E293B"/>
+                </a:solidFill>
+              </a:defRPr>
+            </a:pPr>
+            <a:r>
+              <a:t>• Relational Mapping &amp; Normalization (BCNF)</a:t>
             </a:r>
           </a:p>
           <a:p>
@@ -10358,13 +10490,12 @@
               </a:spcBef>
               <a:defRPr sz="1000">
                 <a:solidFill>
-                  <a:srgbClr val="94A3B8"/>
-                </a:solidFill>
-                <a:latin typeface="Segoe UI"/>
-              </a:defRPr>
-            </a:pPr>
-            <a:r>
-              <a:t>• Table DDL &amp; Comprehensive Integrity Constraints</a:t>
+                  <a:srgbClr val="1E293B"/>
+                </a:solidFill>
+              </a:defRPr>
+            </a:pPr>
+            <a:r>
+              <a:t>• Table DDL &amp; Integrity Constraints</a:t>
             </a:r>
           </a:p>
           <a:p>
@@ -10374,37 +10505,36 @@
               </a:spcBef>
               <a:defRPr sz="1000">
                 <a:solidFill>
-                  <a:srgbClr val="94A3B8"/>
-                </a:solidFill>
-                <a:latin typeface="Segoe UI"/>
-              </a:defRPr>
-            </a:pPr>
-            <a:r>
-              <a:t>• Sample Records &amp; Referential Integrity Proof</a:t>
-            </a:r>
-          </a:p>
-        </p:txBody>
-      </p:sp>
-      <p:sp>
-        <p:nvSpPr>
-          <p:cNvPr id="13" name="Rounded Rectangle 12"/>
+                  <a:srgbClr val="1E293B"/>
+                </a:solidFill>
+              </a:defRPr>
+            </a:pPr>
+            <a:r>
+              <a:t>• Sample Records &amp; Referential Integrity</a:t>
+            </a:r>
+          </a:p>
+        </p:txBody>
+      </p:sp>
+      <p:sp>
+        <p:nvSpPr>
+          <p:cNvPr id="15" name="Rounded Rectangle 14"/>
           <p:cNvSpPr/>
           <p:nvPr/>
         </p:nvSpPr>
         <p:spPr>
           <a:xfrm>
-            <a:off x="6181344" y="1645920"/>
-            <a:ext cx="2578608" cy="4663440"/>
+            <a:off x="6181344" y="1371600"/>
+            <a:ext cx="2578608" cy="4937760"/>
           </a:xfrm>
           <a:prstGeom prst="roundRect">
             <a:avLst/>
           </a:prstGeom>
           <a:solidFill>
-            <a:srgbClr val="161E31"/>
+            <a:srgbClr val="FFFFFF"/>
           </a:solidFill>
           <a:ln w="12700">
             <a:solidFill>
-              <a:srgbClr val="2D3C5A"/>
+              <a:srgbClr val="CBD5E1"/>
             </a:solidFill>
           </a:ln>
         </p:spPr>
@@ -10432,20 +10562,20 @@
       </p:sp>
       <p:sp>
         <p:nvSpPr>
-          <p:cNvPr id="14" name="Rectangle 13"/>
+          <p:cNvPr id="16" name="Rectangle 15"/>
           <p:cNvSpPr/>
           <p:nvPr/>
         </p:nvSpPr>
         <p:spPr>
           <a:xfrm>
-            <a:off x="6181344" y="1645920"/>
-            <a:ext cx="2578608" cy="73152"/>
+            <a:off x="6181344" y="1371600"/>
+            <a:ext cx="2578608" cy="640080"/>
           </a:xfrm>
           <a:prstGeom prst="rect">
             <a:avLst/>
           </a:prstGeom>
           <a:solidFill>
-            <a:srgbClr val="10B981"/>
+            <a:srgbClr val="0F2547"/>
           </a:solidFill>
           <a:ln>
             <a:noFill/>
@@ -10475,14 +10605,61 @@
       </p:sp>
       <p:sp>
         <p:nvSpPr>
-          <p:cNvPr id="15" name="TextBox 14"/>
+          <p:cNvPr id="17" name="TextBox 16"/>
           <p:cNvSpPr txBox="1"/>
           <p:nvPr/>
         </p:nvSpPr>
         <p:spPr>
           <a:xfrm>
-            <a:off x="6318504" y="1828800"/>
-            <a:ext cx="2304288" cy="4297680"/>
+            <a:off x="6181344" y="1444752"/>
+            <a:ext cx="2578608" cy="548640"/>
+          </a:xfrm>
+          <a:prstGeom prst="rect">
+            <a:avLst/>
+          </a:prstGeom>
+          <a:noFill/>
+        </p:spPr>
+        <p:txBody>
+          <a:bodyPr wrap="none">
+            <a:spAutoFit/>
+          </a:bodyPr>
+          <a:lstStyle/>
+          <a:p>
+            <a:pPr algn="ctr">
+              <a:defRPr b="1" sz="900">
+                <a:solidFill>
+                  <a:srgbClr val="BFDBFE"/>
+                </a:solidFill>
+              </a:defRPr>
+            </a:pPr>
+            <a:r>
+              <a:t>SECTION 3</a:t>
+            </a:r>
+          </a:p>
+          <a:p>
+            <a:pPr algn="ctr">
+              <a:defRPr b="1" sz="1100">
+                <a:solidFill>
+                  <a:srgbClr val="FFFFFF"/>
+                </a:solidFill>
+              </a:defRPr>
+            </a:pPr>
+            <a:r>
+              <a:t>SQL &amp; Database Programming</a:t>
+            </a:r>
+          </a:p>
+        </p:txBody>
+      </p:sp>
+      <p:sp>
+        <p:nvSpPr>
+          <p:cNvPr id="18" name="TextBox 17"/>
+          <p:cNvSpPr txBox="1"/>
+          <p:nvPr/>
+        </p:nvSpPr>
+        <p:spPr>
+          <a:xfrm>
+            <a:off x="6318504" y="2148840"/>
+            <a:ext cx="2304288" cy="4069080"/>
           </a:xfrm>
           <a:prstGeom prst="rect">
             <a:avLst/>
@@ -10494,35 +10671,6 @@
             <a:spAutoFit/>
           </a:bodyPr>
           <a:lstStyle/>
-          <a:p>
-            <a:pPr>
-              <a:defRPr sz="2800" b="1">
-                <a:solidFill>
-                  <a:srgbClr val="10B981"/>
-                </a:solidFill>
-                <a:latin typeface="Consolas"/>
-              </a:defRPr>
-            </a:pPr>
-            <a:r>
-              <a:t>03</a:t>
-            </a:r>
-          </a:p>
-          <a:p>
-            <a:pPr>
-              <a:spcBef>
-                <a:spcPts val="400"/>
-              </a:spcBef>
-              <a:defRPr sz="1300" b="1">
-                <a:solidFill>
-                  <a:srgbClr val="F8FAFC"/>
-                </a:solidFill>
-                <a:latin typeface="Segoe UI"/>
-              </a:defRPr>
-            </a:pPr>
-            <a:r>
-              <a:t>SQL Queries &amp; Database Programming</a:t>
-            </a:r>
-          </a:p>
           <a:p>
             <a:pPr>
               <a:spcBef>
@@ -10530,13 +10678,12 @@
               </a:spcBef>
               <a:defRPr sz="1000">
                 <a:solidFill>
-                  <a:srgbClr val="94A3B8"/>
-                </a:solidFill>
-                <a:latin typeface="Segoe UI"/>
-              </a:defRPr>
-            </a:pPr>
-            <a:r>
-              <a:t>• Application Feature-to-Query Mapping</a:t>
+                  <a:srgbClr val="1E293B"/>
+                </a:solidFill>
+              </a:defRPr>
+            </a:pPr>
+            <a:r>
+              <a:t>• Feature-to-Query Mapping</a:t>
             </a:r>
           </a:p>
           <a:p>
@@ -10546,9 +10693,8 @@
               </a:spcBef>
               <a:defRPr sz="1000">
                 <a:solidFill>
-                  <a:srgbClr val="94A3B8"/>
-                </a:solidFill>
-                <a:latin typeface="Segoe UI"/>
+                  <a:srgbClr val="1E293B"/>
+                </a:solidFill>
               </a:defRPr>
             </a:pPr>
             <a:r>
@@ -10562,13 +10708,12 @@
               </a:spcBef>
               <a:defRPr sz="1000">
                 <a:solidFill>
-                  <a:srgbClr val="94A3B8"/>
-                </a:solidFill>
-                <a:latin typeface="Segoe UI"/>
-              </a:defRPr>
-            </a:pPr>
-            <a:r>
-              <a:t>• Analytical Subqueries &amp; Complex Joins / Views</a:t>
+                  <a:srgbClr val="1E293B"/>
+                </a:solidFill>
+              </a:defRPr>
+            </a:pPr>
+            <a:r>
+              <a:t>• Analytical Subqueries &amp; Complex Joins</a:t>
             </a:r>
           </a:p>
           <a:p>
@@ -10578,37 +10723,36 @@
               </a:spcBef>
               <a:defRPr sz="1000">
                 <a:solidFill>
-                  <a:srgbClr val="94A3B8"/>
-                </a:solidFill>
-                <a:latin typeface="Segoe UI"/>
-              </a:defRPr>
-            </a:pPr>
-            <a:r>
-              <a:t>• PL/SQL Triggers, Cursors, Procedures &amp; Exceptions</a:t>
-            </a:r>
-          </a:p>
-        </p:txBody>
-      </p:sp>
-      <p:sp>
-        <p:nvSpPr>
-          <p:cNvPr id="16" name="Rounded Rectangle 15"/>
+                  <a:srgbClr val="1E293B"/>
+                </a:solidFill>
+              </a:defRPr>
+            </a:pPr>
+            <a:r>
+              <a:t>• PL/SQL Triggers, Cursors &amp; Procedures</a:t>
+            </a:r>
+          </a:p>
+        </p:txBody>
+      </p:sp>
+      <p:sp>
+        <p:nvSpPr>
+          <p:cNvPr id="19" name="Rounded Rectangle 18"/>
           <p:cNvSpPr/>
           <p:nvPr/>
         </p:nvSpPr>
         <p:spPr>
           <a:xfrm>
-            <a:off x="8906256" y="1645920"/>
-            <a:ext cx="2578608" cy="4663440"/>
+            <a:off x="8906256" y="1371600"/>
+            <a:ext cx="2578608" cy="4937760"/>
           </a:xfrm>
           <a:prstGeom prst="roundRect">
             <a:avLst/>
           </a:prstGeom>
           <a:solidFill>
-            <a:srgbClr val="161E31"/>
+            <a:srgbClr val="FFFFFF"/>
           </a:solidFill>
           <a:ln w="12700">
             <a:solidFill>
-              <a:srgbClr val="2D3C5A"/>
+              <a:srgbClr val="CBD5E1"/>
             </a:solidFill>
           </a:ln>
         </p:spPr>
@@ -10636,20 +10780,20 @@
       </p:sp>
       <p:sp>
         <p:nvSpPr>
-          <p:cNvPr id="17" name="Rectangle 16"/>
+          <p:cNvPr id="20" name="Rectangle 19"/>
           <p:cNvSpPr/>
           <p:nvPr/>
         </p:nvSpPr>
         <p:spPr>
           <a:xfrm>
-            <a:off x="8906256" y="1645920"/>
-            <a:ext cx="2578608" cy="73152"/>
+            <a:off x="8906256" y="1371600"/>
+            <a:ext cx="2578608" cy="640080"/>
           </a:xfrm>
           <a:prstGeom prst="rect">
             <a:avLst/>
           </a:prstGeom>
           <a:solidFill>
-            <a:srgbClr val="F59E0B"/>
+            <a:srgbClr val="0F2547"/>
           </a:solidFill>
           <a:ln>
             <a:noFill/>
@@ -10679,14 +10823,61 @@
       </p:sp>
       <p:sp>
         <p:nvSpPr>
-          <p:cNvPr id="18" name="TextBox 17"/>
+          <p:cNvPr id="21" name="TextBox 20"/>
           <p:cNvSpPr txBox="1"/>
           <p:nvPr/>
         </p:nvSpPr>
         <p:spPr>
           <a:xfrm>
-            <a:off x="9043416" y="1828800"/>
-            <a:ext cx="2304288" cy="4297680"/>
+            <a:off x="8906256" y="1444752"/>
+            <a:ext cx="2578608" cy="548640"/>
+          </a:xfrm>
+          <a:prstGeom prst="rect">
+            <a:avLst/>
+          </a:prstGeom>
+          <a:noFill/>
+        </p:spPr>
+        <p:txBody>
+          <a:bodyPr wrap="none">
+            <a:spAutoFit/>
+          </a:bodyPr>
+          <a:lstStyle/>
+          <a:p>
+            <a:pPr algn="ctr">
+              <a:defRPr b="1" sz="900">
+                <a:solidFill>
+                  <a:srgbClr val="BFDBFE"/>
+                </a:solidFill>
+              </a:defRPr>
+            </a:pPr>
+            <a:r>
+              <a:t>SECTION 4</a:t>
+            </a:r>
+          </a:p>
+          <a:p>
+            <a:pPr algn="ctr">
+              <a:defRPr b="1" sz="1100">
+                <a:solidFill>
+                  <a:srgbClr val="FFFFFF"/>
+                </a:solidFill>
+              </a:defRPr>
+            </a:pPr>
+            <a:r>
+              <a:t>Implementation &amp; Results</a:t>
+            </a:r>
+          </a:p>
+        </p:txBody>
+      </p:sp>
+      <p:sp>
+        <p:nvSpPr>
+          <p:cNvPr id="22" name="TextBox 21"/>
+          <p:cNvSpPr txBox="1"/>
+          <p:nvPr/>
+        </p:nvSpPr>
+        <p:spPr>
+          <a:xfrm>
+            <a:off x="9043416" y="2148840"/>
+            <a:ext cx="2304288" cy="4069080"/>
           </a:xfrm>
           <a:prstGeom prst="rect">
             <a:avLst/>
@@ -10698,35 +10889,6 @@
             <a:spAutoFit/>
           </a:bodyPr>
           <a:lstStyle/>
-          <a:p>
-            <a:pPr>
-              <a:defRPr sz="2800" b="1">
-                <a:solidFill>
-                  <a:srgbClr val="F59E0B"/>
-                </a:solidFill>
-                <a:latin typeface="Consolas"/>
-              </a:defRPr>
-            </a:pPr>
-            <a:r>
-              <a:t>04</a:t>
-            </a:r>
-          </a:p>
-          <a:p>
-            <a:pPr>
-              <a:spcBef>
-                <a:spcPts val="400"/>
-              </a:spcBef>
-              <a:defRPr sz="1300" b="1">
-                <a:solidFill>
-                  <a:srgbClr val="F8FAFC"/>
-                </a:solidFill>
-                <a:latin typeface="Segoe UI"/>
-              </a:defRPr>
-            </a:pPr>
-            <a:r>
-              <a:t>Application Demonstration &amp; Verification</a:t>
-            </a:r>
-          </a:p>
           <a:p>
             <a:pPr>
               <a:spcBef>
@@ -10734,13 +10896,12 @@
               </a:spcBef>
               <a:defRPr sz="1000">
                 <a:solidFill>
-                  <a:srgbClr val="94A3B8"/>
-                </a:solidFill>
-                <a:latin typeface="Segoe UI"/>
-              </a:defRPr>
-            </a:pPr>
-            <a:r>
-              <a:t>• Application Workflow &amp; Code Architecture</a:t>
+                  <a:srgbClr val="1E293B"/>
+                </a:solidFill>
+              </a:defRPr>
+            </a:pPr>
+            <a:r>
+              <a:t>• Application Workflow &amp; Code Structure</a:t>
             </a:r>
           </a:p>
           <a:p>
@@ -10750,13 +10911,12 @@
               </a:spcBef>
               <a:defRPr sz="1000">
                 <a:solidFill>
-                  <a:srgbClr val="94A3B8"/>
-                </a:solidFill>
-                <a:latin typeface="Segoe UI"/>
-              </a:defRPr>
-            </a:pPr>
-            <a:r>
-              <a:t>• Live UI Screenshots: Circulation, Ledgers &amp; Admin</a:t>
+                  <a:srgbClr val="1E293B"/>
+                </a:solidFill>
+              </a:defRPr>
+            </a:pPr>
+            <a:r>
+              <a:t>• Working Application Screenshots (8 views)</a:t>
             </a:r>
           </a:p>
           <a:p>
@@ -10766,13 +10926,12 @@
               </a:spcBef>
               <a:defRPr sz="1000">
                 <a:solidFill>
-                  <a:srgbClr val="94A3B8"/>
-                </a:solidFill>
-                <a:latin typeface="Segoe UI"/>
-              </a:defRPr>
-            </a:pPr>
-            <a:r>
-              <a:t>• Graph Innovations: Explorer, Book Bridge &amp; Recs</a:t>
+                  <a:srgbClr val="1E293B"/>
+                </a:solidFill>
+              </a:defRPr>
+            </a:pPr>
+            <a:r>
+              <a:t>• Role-Based Access Control &amp; Innovations</a:t>
             </a:r>
           </a:p>
           <a:p>
@@ -10782,13 +10941,12 @@
               </a:spcBef>
               <a:defRPr sz="1000">
                 <a:solidFill>
-                  <a:srgbClr val="94A3B8"/>
-                </a:solidFill>
-                <a:latin typeface="Segoe UI"/>
-              </a:defRPr>
-            </a:pPr>
-            <a:r>
-              <a:t>• Build Instructions, GitHub Repo &amp; Outcomes</a:t>
+                  <a:srgbClr val="1E293B"/>
+                </a:solidFill>
+              </a:defRPr>
+            </a:pPr>
+            <a:r>
+              <a:t>• Build Steps, GitHub Repository &amp; Conclusion</a:t>
             </a:r>
           </a:p>
         </p:txBody>
@@ -10826,7 +10984,7 @@
             <a:avLst/>
           </a:prstGeom>
           <a:solidFill>
-            <a:srgbClr val="0B0F19"/>
+            <a:srgbClr val="F8FAFC"/>
           </a:solidFill>
           <a:ln>
             <a:noFill/>
@@ -10862,14 +11020,14 @@
         </p:nvSpPr>
         <p:spPr>
           <a:xfrm>
-            <a:off x="731520" y="365760"/>
-            <a:ext cx="10728655" cy="36576"/>
+            <a:off x="0" y="0"/>
+            <a:ext cx="12191695" cy="73152"/>
           </a:xfrm>
           <a:prstGeom prst="rect">
             <a:avLst/>
           </a:prstGeom>
           <a:solidFill>
-            <a:srgbClr val="3B82F6"/>
+            <a:srgbClr val="1E40AF"/>
           </a:solidFill>
           <a:ln>
             <a:noFill/>
@@ -10905,8 +11063,8 @@
         </p:nvSpPr>
         <p:spPr>
           <a:xfrm>
-            <a:off x="731520" y="502920"/>
-            <a:ext cx="7315200" cy="274320"/>
+            <a:off x="731520" y="320040"/>
+            <a:ext cx="7772400" cy="256032"/>
           </a:xfrm>
           <a:prstGeom prst="rect">
             <a:avLst/>
@@ -10922,7 +11080,7 @@
             <a:pPr>
               <a:defRPr sz="1000" b="1">
                 <a:solidFill>
-                  <a:srgbClr val="06B6D4"/>
+                  <a:srgbClr val="1E40AF"/>
                 </a:solidFill>
                 <a:latin typeface="Segoe UI"/>
               </a:defRPr>
@@ -10941,7 +11099,7 @@
         </p:nvSpPr>
         <p:spPr>
           <a:xfrm>
-            <a:off x="731520" y="777240"/>
+            <a:off x="731520" y="594360"/>
             <a:ext cx="9601200" cy="548640"/>
           </a:xfrm>
           <a:prstGeom prst="rect">
@@ -10956,9 +11114,9 @@
           <a:lstStyle/>
           <a:p>
             <a:pPr>
-              <a:defRPr sz="2200" b="1">
-                <a:solidFill>
-                  <a:srgbClr val="F8FAFC"/>
+              <a:defRPr sz="2100" b="1">
+                <a:solidFill>
+                  <a:srgbClr val="0F2547"/>
                 </a:solidFill>
                 <a:latin typeface="Segoe UI"/>
               </a:defRPr>
@@ -10977,7 +11135,7 @@
         </p:nvSpPr>
         <p:spPr>
           <a:xfrm>
-            <a:off x="10515600" y="640080"/>
+            <a:off x="10515600" y="411480"/>
             <a:ext cx="914400" cy="365760"/>
           </a:xfrm>
           <a:prstGeom prst="rect">
@@ -10994,9 +11152,9 @@
             <a:pPr algn="r">
               <a:defRPr sz="1100" b="1">
                 <a:solidFill>
-                  <a:srgbClr val="64748B"/>
-                </a:solidFill>
-                <a:latin typeface="Consolas"/>
+                  <a:srgbClr val="475569"/>
+                </a:solidFill>
+                <a:latin typeface="Segoe UI"/>
               </a:defRPr>
             </a:pPr>
             <a:r>
@@ -11013,18 +11171,18 @@
         </p:nvSpPr>
         <p:spPr>
           <a:xfrm>
-            <a:off x="731520" y="1554480"/>
-            <a:ext cx="10728655" cy="1097280"/>
+            <a:off x="731520" y="1371600"/>
+            <a:ext cx="10728655" cy="1115568"/>
           </a:xfrm>
           <a:prstGeom prst="roundRect">
             <a:avLst/>
           </a:prstGeom>
           <a:solidFill>
-            <a:srgbClr val="161E31"/>
+            <a:srgbClr val="FFFFFF"/>
           </a:solidFill>
           <a:ln w="12700">
             <a:solidFill>
-              <a:srgbClr val="2D3C5A"/>
+              <a:srgbClr val="CBD5E1"/>
             </a:solidFill>
           </a:ln>
         </p:spPr>
@@ -11058,14 +11216,14 @@
         </p:nvSpPr>
         <p:spPr>
           <a:xfrm>
-            <a:off x="731520" y="1554480"/>
-            <a:ext cx="109728" cy="1097280"/>
+            <a:off x="731520" y="1371600"/>
+            <a:ext cx="109728" cy="1115568"/>
           </a:xfrm>
           <a:prstGeom prst="rect">
             <a:avLst/>
           </a:prstGeom>
           <a:solidFill>
-            <a:srgbClr val="3B82F6"/>
+            <a:srgbClr val="1E40AF"/>
           </a:solidFill>
           <a:ln>
             <a:noFill/>
@@ -11101,8 +11259,8 @@
         </p:nvSpPr>
         <p:spPr>
           <a:xfrm>
-            <a:off x="1005840" y="1627632"/>
-            <a:ext cx="10241280" cy="950976"/>
+            <a:off x="1005840" y="1444752"/>
+            <a:ext cx="10241280" cy="969264"/>
           </a:xfrm>
           <a:prstGeom prst="rect">
             <a:avLst/>
@@ -11118,13 +11276,13 @@
             <a:pPr>
               <a:defRPr sz="1100" b="1">
                 <a:solidFill>
-                  <a:srgbClr val="3B82F6"/>
+                  <a:srgbClr val="0F2547"/>
                 </a:solidFill>
                 <a:latin typeface="Segoe UI"/>
               </a:defRPr>
             </a:pPr>
             <a:r>
-              <a:t>STEP 1: CLONE &amp; VIRTUAL ENVIRONMENT</a:t>
+              <a:t>STEP 1: CLONE REPOSITORY &amp; CREATE VIRTUAL ENVIRONMENT</a:t>
             </a:r>
           </a:p>
           <a:p>
@@ -11134,7 +11292,7 @@
               </a:spcBef>
               <a:defRPr sz="850">
                 <a:solidFill>
-                  <a:srgbClr val="F8FAFC"/>
+                  <a:srgbClr val="1E293B"/>
                 </a:solidFill>
                 <a:latin typeface="Consolas"/>
               </a:defRPr>
@@ -11150,7 +11308,7 @@
               </a:spcBef>
               <a:defRPr sz="850">
                 <a:solidFill>
-                  <a:srgbClr val="94A3B8"/>
+                  <a:srgbClr val="475569"/>
                 </a:solidFill>
                 <a:latin typeface="Segoe UI"/>
               </a:defRPr>
@@ -11166,7 +11324,7 @@
               </a:spcBef>
               <a:defRPr sz="850">
                 <a:solidFill>
-                  <a:srgbClr val="F8FAFC"/>
+                  <a:srgbClr val="1E293B"/>
                 </a:solidFill>
                 <a:latin typeface="Consolas"/>
               </a:defRPr>
@@ -11182,7 +11340,7 @@
               </a:spcBef>
               <a:defRPr sz="850">
                 <a:solidFill>
-                  <a:srgbClr val="94A3B8"/>
+                  <a:srgbClr val="475569"/>
                 </a:solidFill>
                 <a:latin typeface="Segoe UI"/>
               </a:defRPr>
@@ -11201,18 +11359,18 @@
         </p:nvSpPr>
         <p:spPr>
           <a:xfrm>
-            <a:off x="731520" y="2788920"/>
-            <a:ext cx="10728655" cy="1097280"/>
+            <a:off x="731520" y="2606040"/>
+            <a:ext cx="10728655" cy="1115568"/>
           </a:xfrm>
           <a:prstGeom prst="roundRect">
             <a:avLst/>
           </a:prstGeom>
           <a:solidFill>
-            <a:srgbClr val="161E31"/>
+            <a:srgbClr val="FFFFFF"/>
           </a:solidFill>
           <a:ln w="12700">
             <a:solidFill>
-              <a:srgbClr val="2D3C5A"/>
+              <a:srgbClr val="CBD5E1"/>
             </a:solidFill>
           </a:ln>
         </p:spPr>
@@ -11246,14 +11404,14 @@
         </p:nvSpPr>
         <p:spPr>
           <a:xfrm>
-            <a:off x="731520" y="2788920"/>
-            <a:ext cx="109728" cy="1097280"/>
+            <a:off x="731520" y="2606040"/>
+            <a:ext cx="109728" cy="1115568"/>
           </a:xfrm>
           <a:prstGeom prst="rect">
             <a:avLst/>
           </a:prstGeom>
           <a:solidFill>
-            <a:srgbClr val="06B6D4"/>
+            <a:srgbClr val="1E40AF"/>
           </a:solidFill>
           <a:ln>
             <a:noFill/>
@@ -11289,8 +11447,8 @@
         </p:nvSpPr>
         <p:spPr>
           <a:xfrm>
-            <a:off x="1005840" y="2862072"/>
-            <a:ext cx="10241280" cy="950976"/>
+            <a:off x="1005840" y="2679192"/>
+            <a:ext cx="10241280" cy="969264"/>
           </a:xfrm>
           <a:prstGeom prst="rect">
             <a:avLst/>
@@ -11306,13 +11464,13 @@
             <a:pPr>
               <a:defRPr sz="1100" b="1">
                 <a:solidFill>
-                  <a:srgbClr val="06B6D4"/>
+                  <a:srgbClr val="0F2547"/>
                 </a:solidFill>
                 <a:latin typeface="Segoe UI"/>
               </a:defRPr>
             </a:pPr>
             <a:r>
-              <a:t>STEP 2: INSTALL DEPENDENCIES &amp; CONFIGURE</a:t>
+              <a:t>STEP 2: INSTALL DEPENDENCIES &amp; CONFIGURE ENVIRONMENT</a:t>
             </a:r>
           </a:p>
           <a:p>
@@ -11322,7 +11480,7 @@
               </a:spcBef>
               <a:defRPr sz="850">
                 <a:solidFill>
-                  <a:srgbClr val="94A3B8"/>
+                  <a:srgbClr val="475569"/>
                 </a:solidFill>
                 <a:latin typeface="Consolas"/>
               </a:defRPr>
@@ -11338,7 +11496,7 @@
               </a:spcBef>
               <a:defRPr sz="850">
                 <a:solidFill>
-                  <a:srgbClr val="94A3B8"/>
+                  <a:srgbClr val="475569"/>
                 </a:solidFill>
                 <a:latin typeface="Segoe UI"/>
               </a:defRPr>
@@ -11354,7 +11512,7 @@
               </a:spcBef>
               <a:defRPr sz="850">
                 <a:solidFill>
-                  <a:srgbClr val="94A3B8"/>
+                  <a:srgbClr val="475569"/>
                 </a:solidFill>
                 <a:latin typeface="Segoe UI"/>
               </a:defRPr>
@@ -11370,7 +11528,7 @@
               </a:spcBef>
               <a:defRPr sz="850">
                 <a:solidFill>
-                  <a:srgbClr val="94A3B8"/>
+                  <a:srgbClr val="475569"/>
                 </a:solidFill>
                 <a:latin typeface="Segoe UI"/>
               </a:defRPr>
@@ -11389,18 +11547,18 @@
         </p:nvSpPr>
         <p:spPr>
           <a:xfrm>
-            <a:off x="731520" y="4023360"/>
-            <a:ext cx="10728655" cy="1097280"/>
+            <a:off x="731520" y="3840480"/>
+            <a:ext cx="10728655" cy="1115568"/>
           </a:xfrm>
           <a:prstGeom prst="roundRect">
             <a:avLst/>
           </a:prstGeom>
           <a:solidFill>
-            <a:srgbClr val="161E31"/>
+            <a:srgbClr val="FFFFFF"/>
           </a:solidFill>
           <a:ln w="12700">
             <a:solidFill>
-              <a:srgbClr val="2D3C5A"/>
+              <a:srgbClr val="CBD5E1"/>
             </a:solidFill>
           </a:ln>
         </p:spPr>
@@ -11434,14 +11592,14 @@
         </p:nvSpPr>
         <p:spPr>
           <a:xfrm>
-            <a:off x="731520" y="4023360"/>
-            <a:ext cx="109728" cy="1097280"/>
+            <a:off x="731520" y="3840480"/>
+            <a:ext cx="109728" cy="1115568"/>
           </a:xfrm>
           <a:prstGeom prst="rect">
             <a:avLst/>
           </a:prstGeom>
           <a:solidFill>
-            <a:srgbClr val="10B981"/>
+            <a:srgbClr val="1E40AF"/>
           </a:solidFill>
           <a:ln>
             <a:noFill/>
@@ -11477,8 +11635,8 @@
         </p:nvSpPr>
         <p:spPr>
           <a:xfrm>
-            <a:off x="1005840" y="4096512"/>
-            <a:ext cx="10241280" cy="950976"/>
+            <a:off x="1005840" y="3913632"/>
+            <a:ext cx="10241280" cy="969264"/>
           </a:xfrm>
           <a:prstGeom prst="rect">
             <a:avLst/>
@@ -11494,13 +11652,13 @@
             <a:pPr>
               <a:defRPr sz="1100" b="1">
                 <a:solidFill>
-                  <a:srgbClr val="10B981"/>
+                  <a:srgbClr val="0F2547"/>
                 </a:solidFill>
                 <a:latin typeface="Segoe UI"/>
               </a:defRPr>
             </a:pPr>
             <a:r>
-              <a:t>STEP 3: SEED GRAPH DATABASE (OPTIONAL / INITIAL)</a:t>
+              <a:t>STEP 3: SEED GRAPH DATABASE (INITIAL SETUP)</a:t>
             </a:r>
           </a:p>
           <a:p>
@@ -11510,7 +11668,7 @@
               </a:spcBef>
               <a:defRPr sz="850">
                 <a:solidFill>
-                  <a:srgbClr val="F8FAFC"/>
+                  <a:srgbClr val="1E293B"/>
                 </a:solidFill>
                 <a:latin typeface="Consolas"/>
               </a:defRPr>
@@ -11526,7 +11684,7 @@
               </a:spcBef>
               <a:defRPr sz="850">
                 <a:solidFill>
-                  <a:srgbClr val="94A3B8"/>
+                  <a:srgbClr val="475569"/>
                 </a:solidFill>
                 <a:latin typeface="Segoe UI"/>
               </a:defRPr>
@@ -11542,7 +11700,7 @@
               </a:spcBef>
               <a:defRPr sz="850">
                 <a:solidFill>
-                  <a:srgbClr val="94A3B8"/>
+                  <a:srgbClr val="475569"/>
                 </a:solidFill>
                 <a:latin typeface="Segoe UI"/>
               </a:defRPr>
@@ -11561,18 +11719,18 @@
         </p:nvSpPr>
         <p:spPr>
           <a:xfrm>
-            <a:off x="731520" y="5257800"/>
-            <a:ext cx="10728655" cy="1097280"/>
+            <a:off x="731520" y="5074920"/>
+            <a:ext cx="10728655" cy="1115568"/>
           </a:xfrm>
           <a:prstGeom prst="roundRect">
             <a:avLst/>
           </a:prstGeom>
           <a:solidFill>
-            <a:srgbClr val="161E31"/>
+            <a:srgbClr val="FFFFFF"/>
           </a:solidFill>
           <a:ln w="12700">
             <a:solidFill>
-              <a:srgbClr val="2D3C5A"/>
+              <a:srgbClr val="CBD5E1"/>
             </a:solidFill>
           </a:ln>
         </p:spPr>
@@ -11606,14 +11764,14 @@
         </p:nvSpPr>
         <p:spPr>
           <a:xfrm>
-            <a:off x="731520" y="5257800"/>
-            <a:ext cx="109728" cy="1097280"/>
+            <a:off x="731520" y="5074920"/>
+            <a:ext cx="109728" cy="1115568"/>
           </a:xfrm>
           <a:prstGeom prst="rect">
             <a:avLst/>
           </a:prstGeom>
           <a:solidFill>
-            <a:srgbClr val="F59E0B"/>
+            <a:srgbClr val="1E40AF"/>
           </a:solidFill>
           <a:ln>
             <a:noFill/>
@@ -11649,8 +11807,8 @@
         </p:nvSpPr>
         <p:spPr>
           <a:xfrm>
-            <a:off x="1005840" y="5330952"/>
-            <a:ext cx="10241280" cy="950976"/>
+            <a:off x="1005840" y="5148072"/>
+            <a:ext cx="10241280" cy="969264"/>
           </a:xfrm>
           <a:prstGeom prst="rect">
             <a:avLst/>
@@ -11666,7 +11824,7 @@
             <a:pPr>
               <a:defRPr sz="1100" b="1">
                 <a:solidFill>
-                  <a:srgbClr val="F59E0B"/>
+                  <a:srgbClr val="0F2547"/>
                 </a:solidFill>
                 <a:latin typeface="Segoe UI"/>
               </a:defRPr>
@@ -11682,7 +11840,7 @@
               </a:spcBef>
               <a:defRPr sz="850">
                 <a:solidFill>
-                  <a:srgbClr val="F8FAFC"/>
+                  <a:srgbClr val="1E293B"/>
                 </a:solidFill>
                 <a:latin typeface="Consolas"/>
               </a:defRPr>
@@ -11698,7 +11856,7 @@
               </a:spcBef>
               <a:defRPr sz="850">
                 <a:solidFill>
-                  <a:srgbClr val="94A3B8"/>
+                  <a:srgbClr val="475569"/>
                 </a:solidFill>
                 <a:latin typeface="Segoe UI"/>
               </a:defRPr>
@@ -11714,7 +11872,7 @@
               </a:spcBef>
               <a:defRPr sz="850">
                 <a:solidFill>
-                  <a:srgbClr val="94A3B8"/>
+                  <a:srgbClr val="475569"/>
                 </a:solidFill>
                 <a:latin typeface="Segoe UI"/>
               </a:defRPr>
@@ -11730,7 +11888,7 @@
               </a:spcBef>
               <a:defRPr sz="850">
                 <a:solidFill>
-                  <a:srgbClr val="F8FAFC"/>
+                  <a:srgbClr val="1E293B"/>
                 </a:solidFill>
                 <a:latin typeface="Consolas"/>
               </a:defRPr>
@@ -11774,7 +11932,7 @@
             <a:avLst/>
           </a:prstGeom>
           <a:solidFill>
-            <a:srgbClr val="0B0F19"/>
+            <a:srgbClr val="F8FAFC"/>
           </a:solidFill>
           <a:ln>
             <a:noFill/>
@@ -11810,14 +11968,14 @@
         </p:nvSpPr>
         <p:spPr>
           <a:xfrm>
-            <a:off x="731520" y="365760"/>
-            <a:ext cx="10728655" cy="36576"/>
+            <a:off x="0" y="0"/>
+            <a:ext cx="12191695" cy="73152"/>
           </a:xfrm>
           <a:prstGeom prst="rect">
             <a:avLst/>
           </a:prstGeom>
           <a:solidFill>
-            <a:srgbClr val="3B82F6"/>
+            <a:srgbClr val="1E40AF"/>
           </a:solidFill>
           <a:ln>
             <a:noFill/>
@@ -11853,8 +12011,8 @@
         </p:nvSpPr>
         <p:spPr>
           <a:xfrm>
-            <a:off x="731520" y="502920"/>
-            <a:ext cx="7315200" cy="274320"/>
+            <a:off x="731520" y="320040"/>
+            <a:ext cx="7772400" cy="256032"/>
           </a:xfrm>
           <a:prstGeom prst="rect">
             <a:avLst/>
@@ -11870,7 +12028,7 @@
             <a:pPr>
               <a:defRPr sz="1000" b="1">
                 <a:solidFill>
-                  <a:srgbClr val="06B6D4"/>
+                  <a:srgbClr val="1E40AF"/>
                 </a:solidFill>
                 <a:latin typeface="Segoe UI"/>
               </a:defRPr>
@@ -11889,7 +12047,7 @@
         </p:nvSpPr>
         <p:spPr>
           <a:xfrm>
-            <a:off x="731520" y="777240"/>
+            <a:off x="731520" y="594360"/>
             <a:ext cx="9601200" cy="548640"/>
           </a:xfrm>
           <a:prstGeom prst="rect">
@@ -11904,9 +12062,9 @@
           <a:lstStyle/>
           <a:p>
             <a:pPr>
-              <a:defRPr sz="2200" b="1">
-                <a:solidFill>
-                  <a:srgbClr val="F8FAFC"/>
+              <a:defRPr sz="2100" b="1">
+                <a:solidFill>
+                  <a:srgbClr val="0F2547"/>
                 </a:solidFill>
                 <a:latin typeface="Segoe UI"/>
               </a:defRPr>
@@ -11925,7 +12083,7 @@
         </p:nvSpPr>
         <p:spPr>
           <a:xfrm>
-            <a:off x="10515600" y="640080"/>
+            <a:off x="10515600" y="411480"/>
             <a:ext cx="914400" cy="365760"/>
           </a:xfrm>
           <a:prstGeom prst="rect">
@@ -11942,9 +12100,9 @@
             <a:pPr algn="r">
               <a:defRPr sz="1100" b="1">
                 <a:solidFill>
-                  <a:srgbClr val="64748B"/>
-                </a:solidFill>
-                <a:latin typeface="Consolas"/>
+                  <a:srgbClr val="475569"/>
+                </a:solidFill>
+                <a:latin typeface="Segoe UI"/>
               </a:defRPr>
             </a:pPr>
             <a:r>
@@ -11961,18 +12119,18 @@
         </p:nvSpPr>
         <p:spPr>
           <a:xfrm>
-            <a:off x="731520" y="1554480"/>
-            <a:ext cx="5212080" cy="4846320"/>
+            <a:off x="731520" y="1371600"/>
+            <a:ext cx="5212080" cy="4937760"/>
           </a:xfrm>
           <a:prstGeom prst="roundRect">
             <a:avLst/>
           </a:prstGeom>
           <a:solidFill>
-            <a:srgbClr val="161E31"/>
+            <a:srgbClr val="FFFFFF"/>
           </a:solidFill>
           <a:ln w="12700">
             <a:solidFill>
-              <a:srgbClr val="2D3C5A"/>
+              <a:srgbClr val="CBD5E1"/>
             </a:solidFill>
           </a:ln>
         </p:spPr>
@@ -12006,8 +12164,8 @@
         </p:nvSpPr>
         <p:spPr>
           <a:xfrm>
-            <a:off x="914400" y="1691640"/>
-            <a:ext cx="4846320" cy="4480560"/>
+            <a:off x="914400" y="1508760"/>
+            <a:ext cx="4846320" cy="4663440"/>
           </a:xfrm>
           <a:prstGeom prst="rect">
             <a:avLst/>
@@ -12023,7 +12181,7 @@
             <a:pPr>
               <a:defRPr b="1" sz="1200">
                 <a:solidFill>
-                  <a:srgbClr val="3B82F6"/>
+                  <a:srgbClr val="0F2547"/>
                 </a:solidFill>
               </a:defRPr>
             </a:pPr>
@@ -12038,7 +12196,7 @@
               </a:spcBef>
               <a:defRPr sz="950">
                 <a:solidFill>
-                  <a:srgbClr val="06B6D4"/>
+                  <a:srgbClr val="1E40AF"/>
                 </a:solidFill>
                 <a:latin typeface="Consolas"/>
               </a:defRPr>
@@ -12060,7 +12218,7 @@
             <a:r>
               <a:rPr b="1" sz="950">
                 <a:solidFill>
-                  <a:srgbClr val="F8FAFC"/>
+                  <a:srgbClr val="1E293B"/>
                 </a:solidFill>
               </a:rPr>
               <a:t>Production Codebase
@@ -12069,7 +12227,7 @@
             <a:r>
               <a:rPr sz="850">
                 <a:solidFill>
-                  <a:srgbClr val="94A3B8"/>
+                  <a:srgbClr val="475569"/>
                 </a:solidFill>
               </a:rPr>
               <a:t>Contains app.py (4,230 lines), seed scripts, 24 template views, and full verification test suites.</a:t>
@@ -12084,7 +12242,7 @@
             <a:r>
               <a:rPr b="1" sz="950">
                 <a:solidFill>
-                  <a:srgbClr val="F8FAFC"/>
+                  <a:srgbClr val="1E293B"/>
                 </a:solidFill>
               </a:rPr>
               <a:t>Branching &amp; Hygiene
@@ -12093,7 +12251,7 @@
             <a:r>
               <a:rPr sz="850">
                 <a:solidFill>
-                  <a:srgbClr val="94A3B8"/>
+                  <a:srgbClr val="475569"/>
                 </a:solidFill>
               </a:rPr>
               <a:t>Clean Git commit history on branch main with .gitignore preventing credential exposure and cache staging.</a:t>
@@ -12108,7 +12266,7 @@
             <a:r>
               <a:rPr b="1" sz="950">
                 <a:solidFill>
-                  <a:srgbClr val="F8FAFC"/>
+                  <a:srgbClr val="1E293B"/>
                 </a:solidFill>
               </a:rPr>
               <a:t>Documentation &amp; Dossier
@@ -12117,7 +12275,7 @@
             <a:r>
               <a:rPr sz="850">
                 <a:solidFill>
-                  <a:srgbClr val="94A3B8"/>
+                  <a:srgbClr val="475569"/>
                 </a:solidFill>
               </a:rPr>
               <a:t>Includes detailed README.md setup instructions and the 211-page master forensic audit report PDF.</a:t>
@@ -12133,18 +12291,18 @@
         </p:nvSpPr>
         <p:spPr>
           <a:xfrm>
-            <a:off x="6217920" y="1554480"/>
-            <a:ext cx="5242255" cy="4846320"/>
+            <a:off x="6217920" y="1371600"/>
+            <a:ext cx="5242255" cy="4937760"/>
           </a:xfrm>
           <a:prstGeom prst="roundRect">
             <a:avLst/>
           </a:prstGeom>
           <a:solidFill>
-            <a:srgbClr val="161E31"/>
+            <a:srgbClr val="FFFFFF"/>
           </a:solidFill>
           <a:ln w="12700">
             <a:solidFill>
-              <a:srgbClr val="2D3C5A"/>
+              <a:srgbClr val="CBD5E1"/>
             </a:solidFill>
           </a:ln>
         </p:spPr>
@@ -12178,8 +12336,8 @@
         </p:nvSpPr>
         <p:spPr>
           <a:xfrm>
-            <a:off x="6400800" y="1691640"/>
-            <a:ext cx="4876495" cy="4480560"/>
+            <a:off x="6400800" y="1508760"/>
+            <a:ext cx="4876495" cy="4663440"/>
           </a:xfrm>
           <a:prstGeom prst="rect">
             <a:avLst/>
@@ -12195,7 +12353,7 @@
             <a:pPr>
               <a:defRPr b="1" sz="1200">
                 <a:solidFill>
-                  <a:srgbClr val="10B981"/>
+                  <a:srgbClr val="0F2547"/>
                 </a:solidFill>
               </a:defRPr>
             </a:pPr>
@@ -12212,7 +12370,7 @@
             <a:r>
               <a:rPr b="1" sz="950">
                 <a:solidFill>
-                  <a:srgbClr val="F8FAFC"/>
+                  <a:srgbClr val="1E40AF"/>
                 </a:solidFill>
               </a:rPr>
               <a:t>Dual-Database Mastery
@@ -12221,7 +12379,7 @@
             <a:r>
               <a:rPr sz="850">
                 <a:solidFill>
-                  <a:srgbClr val="94A3B8"/>
+                  <a:srgbClr val="475569"/>
                 </a:solidFill>
               </a:rPr>
               <a:t>Gained deep architectural expertise in bridging transactional relational schemas (Oracle 21c) with connected graph stores (Neo4j AuraDB).</a:t>
@@ -12236,7 +12394,7 @@
             <a:r>
               <a:rPr b="1" sz="950">
                 <a:solidFill>
-                  <a:srgbClr val="F8FAFC"/>
+                  <a:srgbClr val="1E40AF"/>
                 </a:solidFill>
               </a:rPr>
               <a:t>PL/SQL &amp; Constraint Automation
@@ -12245,7 +12403,7 @@
             <a:r>
               <a:rPr sz="850">
                 <a:solidFill>
-                  <a:srgbClr val="94A3B8"/>
+                  <a:srgbClr val="475569"/>
                 </a:solidFill>
               </a:rPr>
               <a:t>Successfully replaced error-prone application validation with autonomous database triggers, procedures, and check constraints.</a:t>
@@ -12260,7 +12418,7 @@
             <a:r>
               <a:rPr b="1" sz="950">
                 <a:solidFill>
-                  <a:srgbClr val="F8FAFC"/>
+                  <a:srgbClr val="1E40AF"/>
                 </a:solidFill>
               </a:rPr>
               <a:t>Enterprise RBAC Implementation
@@ -12269,7 +12427,7 @@
             <a:r>
               <a:rPr sz="850">
                 <a:solidFill>
-                  <a:srgbClr val="94A3B8"/>
+                  <a:srgbClr val="475569"/>
                 </a:solidFill>
               </a:rPr>
               <a:t>Engineered strict multi-role permission separation with patron privacy masking and audit trail logging.</a:t>
@@ -12284,7 +12442,7 @@
             <a:r>
               <a:rPr b="1" sz="950">
                 <a:solidFill>
-                  <a:srgbClr val="F8FAFC"/>
+                  <a:srgbClr val="1E40AF"/>
                 </a:solidFill>
               </a:rPr>
               <a:t>Future Roadmap 1: RFID Hardware Integration
@@ -12293,7 +12451,7 @@
             <a:r>
               <a:rPr sz="850">
                 <a:solidFill>
-                  <a:srgbClr val="94A3B8"/>
+                  <a:srgbClr val="475569"/>
                 </a:solidFill>
               </a:rPr>
               <a:t>Deploy physical RFID return drop-boxes for automated instantaneous check-in without librarian intervention.</a:t>
@@ -12308,7 +12466,7 @@
             <a:r>
               <a:rPr b="1" sz="950">
                 <a:solidFill>
-                  <a:srgbClr val="F8FAFC"/>
+                  <a:srgbClr val="1E40AF"/>
                 </a:solidFill>
               </a:rPr>
               <a:t>Future Roadmap 2: SMS &amp; Webhook Alerts
@@ -12317,7 +12475,7 @@
             <a:r>
               <a:rPr sz="850">
                 <a:solidFill>
-                  <a:srgbClr val="94A3B8"/>
+                  <a:srgbClr val="475569"/>
                 </a:solidFill>
               </a:rPr>
               <a:t>Automated email and WhatsApp notifications for books nearing return deadlines to minimize disciplinary fines.</a:t>
@@ -12358,7 +12516,7 @@
             <a:avLst/>
           </a:prstGeom>
           <a:solidFill>
-            <a:srgbClr val="0B0F19"/>
+            <a:srgbClr val="F8FAFC"/>
           </a:solidFill>
           <a:ln>
             <a:noFill/>
@@ -12401,11 +12559,11 @@
             <a:avLst/>
           </a:prstGeom>
           <a:solidFill>
-            <a:srgbClr val="121A2D"/>
+            <a:srgbClr val="FFFFFF"/>
           </a:solidFill>
           <a:ln w="12700">
             <a:solidFill>
-              <a:srgbClr val="3B82F6"/>
+              <a:srgbClr val="0F2547"/>
             </a:solidFill>
           </a:ln>
         </p:spPr>
@@ -12456,7 +12614,7 @@
             <a:pPr algn="ctr">
               <a:defRPr sz="3600" b="1">
                 <a:solidFill>
-                  <a:srgbClr val="F8FAFC"/>
+                  <a:srgbClr val="0F2547"/>
                 </a:solidFill>
                 <a:latin typeface="Segoe UI"/>
               </a:defRPr>
@@ -12470,9 +12628,9 @@
               <a:spcBef>
                 <a:spcPts val="800"/>
               </a:spcBef>
-              <a:defRPr sz="1800" b="1">
-                <a:solidFill>
-                  <a:srgbClr val="06B6D4"/>
+              <a:defRPr sz="1700" b="1">
+                <a:solidFill>
+                  <a:srgbClr val="1E40AF"/>
                 </a:solidFill>
                 <a:latin typeface="Segoe UI"/>
               </a:defRPr>
@@ -12486,9 +12644,9 @@
               <a:spcBef>
                 <a:spcPts val="1400"/>
               </a:spcBef>
-              <a:defRPr sz="1300">
-                <a:solidFill>
-                  <a:srgbClr val="94A3B8"/>
+              <a:defRPr sz="1200">
+                <a:solidFill>
+                  <a:srgbClr val="475569"/>
                 </a:solidFill>
               </a:defRPr>
             </a:pPr>
@@ -12507,7 +12665,7 @@
               </a:spcBef>
               <a:defRPr sz="1200" b="1">
                 <a:solidFill>
-                  <a:srgbClr val="F59E0B"/>
+                  <a:srgbClr val="0F2547"/>
                 </a:solidFill>
               </a:defRPr>
             </a:pPr>
@@ -12526,7 +12684,7 @@
               </a:spcBef>
               <a:defRPr sz="1100">
                 <a:solidFill>
-                  <a:srgbClr val="F8FAFC"/>
+                  <a:srgbClr val="1E293B"/>
                 </a:solidFill>
               </a:defRPr>
             </a:pPr>
@@ -12573,7 +12731,7 @@
             <a:avLst/>
           </a:prstGeom>
           <a:solidFill>
-            <a:srgbClr val="0B0F19"/>
+            <a:srgbClr val="F8FAFC"/>
           </a:solidFill>
           <a:ln>
             <a:noFill/>
@@ -12609,14 +12767,14 @@
         </p:nvSpPr>
         <p:spPr>
           <a:xfrm>
-            <a:off x="731520" y="365760"/>
-            <a:ext cx="10728655" cy="36576"/>
+            <a:off x="0" y="0"/>
+            <a:ext cx="12191695" cy="73152"/>
           </a:xfrm>
           <a:prstGeom prst="rect">
             <a:avLst/>
           </a:prstGeom>
           <a:solidFill>
-            <a:srgbClr val="3B82F6"/>
+            <a:srgbClr val="1E40AF"/>
           </a:solidFill>
           <a:ln>
             <a:noFill/>
@@ -12652,8 +12810,8 @@
         </p:nvSpPr>
         <p:spPr>
           <a:xfrm>
-            <a:off x="731520" y="502920"/>
-            <a:ext cx="7315200" cy="274320"/>
+            <a:off x="731520" y="320040"/>
+            <a:ext cx="7772400" cy="256032"/>
           </a:xfrm>
           <a:prstGeom prst="rect">
             <a:avLst/>
@@ -12669,7 +12827,7 @@
             <a:pPr>
               <a:defRPr sz="1000" b="1">
                 <a:solidFill>
-                  <a:srgbClr val="06B6D4"/>
+                  <a:srgbClr val="1E40AF"/>
                 </a:solidFill>
                 <a:latin typeface="Segoe UI"/>
               </a:defRPr>
@@ -12688,7 +12846,7 @@
         </p:nvSpPr>
         <p:spPr>
           <a:xfrm>
-            <a:off x="731520" y="777240"/>
+            <a:off x="731520" y="594360"/>
             <a:ext cx="9601200" cy="548640"/>
           </a:xfrm>
           <a:prstGeom prst="rect">
@@ -12703,15 +12861,15 @@
           <a:lstStyle/>
           <a:p>
             <a:pPr>
-              <a:defRPr sz="2200" b="1">
-                <a:solidFill>
-                  <a:srgbClr val="F8FAFC"/>
+              <a:defRPr sz="2100" b="1">
+                <a:solidFill>
+                  <a:srgbClr val="0F2547"/>
                 </a:solidFill>
                 <a:latin typeface="Segoe UI"/>
               </a:defRPr>
             </a:pPr>
             <a:r>
-              <a:t>Introduction &amp; Project Overview</a:t>
+              <a:t>Problem Statement, Objectives &amp; Solution Scope</a:t>
             </a:r>
           </a:p>
         </p:txBody>
@@ -12724,7 +12882,7 @@
         </p:nvSpPr>
         <p:spPr>
           <a:xfrm>
-            <a:off x="10515600" y="640080"/>
+            <a:off x="10515600" y="411480"/>
             <a:ext cx="914400" cy="365760"/>
           </a:xfrm>
           <a:prstGeom prst="rect">
@@ -12741,9 +12899,9 @@
             <a:pPr algn="r">
               <a:defRPr sz="1100" b="1">
                 <a:solidFill>
-                  <a:srgbClr val="64748B"/>
-                </a:solidFill>
-                <a:latin typeface="Consolas"/>
+                  <a:srgbClr val="475569"/>
+                </a:solidFill>
+                <a:latin typeface="Segoe UI"/>
               </a:defRPr>
             </a:pPr>
             <a:r>
@@ -12760,18 +12918,18 @@
         </p:nvSpPr>
         <p:spPr>
           <a:xfrm>
-            <a:off x="731520" y="1554480"/>
-            <a:ext cx="3383280" cy="4754880"/>
+            <a:off x="731520" y="1371600"/>
+            <a:ext cx="3383280" cy="4937760"/>
           </a:xfrm>
           <a:prstGeom prst="roundRect">
             <a:avLst/>
           </a:prstGeom>
           <a:solidFill>
-            <a:srgbClr val="161E31"/>
+            <a:srgbClr val="FFFFFF"/>
           </a:solidFill>
           <a:ln w="12700">
             <a:solidFill>
-              <a:srgbClr val="2D3C5A"/>
+              <a:srgbClr val="CBD5E1"/>
             </a:solidFill>
           </a:ln>
         </p:spPr>
@@ -12805,8 +12963,8 @@
         </p:nvSpPr>
         <p:spPr>
           <a:xfrm>
-            <a:off x="914400" y="1691640"/>
-            <a:ext cx="3017520" cy="4389120"/>
+            <a:off x="914400" y="1554480"/>
+            <a:ext cx="3017520" cy="4572000"/>
           </a:xfrm>
           <a:prstGeom prst="rect">
             <a:avLst/>
@@ -12820,9 +12978,9 @@
           <a:lstStyle/>
           <a:p>
             <a:pPr>
-              <a:defRPr b="1" sz="1300">
-                <a:solidFill>
-                  <a:srgbClr val="F43F5E"/>
+              <a:defRPr b="1" sz="1200">
+                <a:solidFill>
+                  <a:srgbClr val="0F2547"/>
                 </a:solidFill>
               </a:defRPr>
             </a:pPr>
@@ -12835,14 +12993,14 @@
               <a:spcBef>
                 <a:spcPts val="800"/>
               </a:spcBef>
-              <a:defRPr sz="1050">
-                <a:solidFill>
-                  <a:srgbClr val="94A3B8"/>
-                </a:solidFill>
-              </a:defRPr>
-            </a:pPr>
-            <a:r>
-              <a:t>• Traditional library systems rely solely on relational tables with high-latency recursive joins for prerequisite tracking.</a:t>
+              <a:defRPr sz="1000">
+                <a:solidFill>
+                  <a:srgbClr val="475569"/>
+                </a:solidFill>
+              </a:defRPr>
+            </a:pPr>
+            <a:r>
+              <a:t>• Traditional relational library management systems struggle with recursive multi-table joins when discovering multi-degree book connections.</a:t>
             </a:r>
           </a:p>
           <a:p>
@@ -12850,14 +13008,14 @@
               <a:spcBef>
                 <a:spcPts val="800"/>
               </a:spcBef>
-              <a:defRPr sz="1050">
-                <a:solidFill>
-                  <a:srgbClr val="94A3B8"/>
-                </a:solidFill>
-              </a:defRPr>
-            </a:pPr>
-            <a:r>
-              <a:t>• Students lack visibility into multi-degree academic reading roadmaps across disciplines.</a:t>
+              <a:defRPr sz="1000">
+                <a:solidFill>
+                  <a:srgbClr val="475569"/>
+                </a:solidFill>
+              </a:defRPr>
+            </a:pPr>
+            <a:r>
+              <a:t>• Students lack structured academic reading roadmaps showing prerequisite foundational books before advanced texts.</a:t>
             </a:r>
           </a:p>
           <a:p>
@@ -12865,14 +13023,14 @@
               <a:spcBef>
                 <a:spcPts val="800"/>
               </a:spcBef>
-              <a:defRPr sz="1050">
-                <a:solidFill>
-                  <a:srgbClr val="94A3B8"/>
-                </a:solidFill>
-              </a:defRPr>
-            </a:pPr>
-            <a:r>
-              <a:t>• Disciplinary fines and loan quotas are frequently bypassed due to lack of real-time database constraints.</a:t>
+              <a:defRPr sz="1000">
+                <a:solidFill>
+                  <a:srgbClr val="475569"/>
+                </a:solidFill>
+              </a:defRPr>
+            </a:pPr>
+            <a:r>
+              <a:t>• Manual circulation desk verification often fails to enforce patron loan limits (3 books) and calculate overdue penalties reliably.</a:t>
             </a:r>
           </a:p>
           <a:p>
@@ -12880,14 +13038,14 @@
               <a:spcBef>
                 <a:spcPts val="800"/>
               </a:spcBef>
-              <a:defRPr sz="1050">
-                <a:solidFill>
-                  <a:srgbClr val="94A3B8"/>
-                </a:solidFill>
-              </a:defRPr>
-            </a:pPr>
-            <a:r>
-              <a:t>• Patron privacy is vulnerable when borrowing histories are exposed without RBAC masking.</a:t>
+              <a:defRPr sz="1000">
+                <a:solidFill>
+                  <a:srgbClr val="475569"/>
+                </a:solidFill>
+              </a:defRPr>
+            </a:pPr>
+            <a:r>
+              <a:t>• Borrowing histories are exposed across patrons without proper role-based privacy masking.</a:t>
             </a:r>
           </a:p>
         </p:txBody>
@@ -12900,18 +13058,18 @@
         </p:nvSpPr>
         <p:spPr>
           <a:xfrm>
-            <a:off x="4389120" y="1554480"/>
-            <a:ext cx="3383280" cy="4754880"/>
+            <a:off x="4389120" y="1371600"/>
+            <a:ext cx="3383280" cy="4937760"/>
           </a:xfrm>
           <a:prstGeom prst="roundRect">
             <a:avLst/>
           </a:prstGeom>
           <a:solidFill>
-            <a:srgbClr val="161E31"/>
+            <a:srgbClr val="FFFFFF"/>
           </a:solidFill>
           <a:ln w="12700">
             <a:solidFill>
-              <a:srgbClr val="2D3C5A"/>
+              <a:srgbClr val="CBD5E1"/>
             </a:solidFill>
           </a:ln>
         </p:spPr>
@@ -12945,8 +13103,8 @@
         </p:nvSpPr>
         <p:spPr>
           <a:xfrm>
-            <a:off x="4572000" y="1691640"/>
-            <a:ext cx="3017520" cy="4389120"/>
+            <a:off x="4572000" y="1554480"/>
+            <a:ext cx="3017520" cy="4572000"/>
           </a:xfrm>
           <a:prstGeom prst="rect">
             <a:avLst/>
@@ -12960,9 +13118,9 @@
           <a:lstStyle/>
           <a:p>
             <a:pPr>
-              <a:defRPr b="1" sz="1300">
-                <a:solidFill>
-                  <a:srgbClr val="10B981"/>
+              <a:defRPr b="1" sz="1200">
+                <a:solidFill>
+                  <a:srgbClr val="0F2547"/>
                 </a:solidFill>
               </a:defRPr>
             </a:pPr>
@@ -12975,14 +13133,14 @@
               <a:spcBef>
                 <a:spcPts val="800"/>
               </a:spcBef>
-              <a:defRPr sz="1050">
-                <a:solidFill>
-                  <a:srgbClr val="94A3B8"/>
-                </a:solidFill>
-              </a:defRPr>
-            </a:pPr>
-            <a:r>
-              <a:t>• Engineered a Dual-Paradigm Architecture: Enterprise Relational Schema in Oracle 21c + Property Graph in Neo4j AuraDB.</a:t>
+              <a:defRPr sz="1000">
+                <a:solidFill>
+                  <a:srgbClr val="475569"/>
+                </a:solidFill>
+              </a:defRPr>
+            </a:pPr>
+            <a:r>
+              <a:t>• Dual-Database Engineering: Combines an enterprise Oracle 21c relational schema with a Neo4j AuraDB property graph.</a:t>
             </a:r>
           </a:p>
           <a:p>
@@ -12990,14 +13148,14 @@
               <a:spcBef>
                 <a:spcPts val="800"/>
               </a:spcBef>
-              <a:defRPr sz="1050">
-                <a:solidFill>
-                  <a:srgbClr val="94A3B8"/>
-                </a:solidFill>
-              </a:defRPr>
-            </a:pPr>
-            <a:r>
-              <a:t>• Strict 4-Role RBAC: Admin, Librarian, Faculty/Staff, and Academic Student.</a:t>
+              <a:defRPr sz="1000">
+                <a:solidFill>
+                  <a:srgbClr val="475569"/>
+                </a:solidFill>
+              </a:defRPr>
+            </a:pPr>
+            <a:r>
+              <a:t>• Role-Based Access Control (RBAC): Provides four distinct experiences for Admin, Librarian, Staff (Faculty), and Students.</a:t>
             </a:r>
           </a:p>
           <a:p>
@@ -13005,14 +13163,14 @@
               <a:spcBef>
                 <a:spcPts val="800"/>
               </a:spcBef>
-              <a:defRPr sz="1050">
-                <a:solidFill>
-                  <a:srgbClr val="94A3B8"/>
-                </a:solidFill>
-              </a:defRPr>
-            </a:pPr>
-            <a:r>
-              <a:t>• Automated Circulation Controls: 3-book patron quota enforcement, daily overdue fine auto-calculation (Rs. 5/day).</a:t>
+              <a:defRPr sz="1000">
+                <a:solidFill>
+                  <a:srgbClr val="475569"/>
+                </a:solidFill>
+              </a:defRPr>
+            </a:pPr>
+            <a:r>
+              <a:t>• Automated Circulation Rules: Real-time 3-book borrowing quota enforcement and daily Rs. 5/day overdue fine calculation.</a:t>
             </a:r>
           </a:p>
           <a:p>
@@ -13020,14 +13178,14 @@
               <a:spcBef>
                 <a:spcPts val="800"/>
               </a:spcBef>
-              <a:defRPr sz="1050">
-                <a:solidFill>
-                  <a:srgbClr val="94A3B8"/>
-                </a:solidFill>
-              </a:defRPr>
-            </a:pPr>
-            <a:r>
-              <a:t>• Graph-Native Innovations: Live Interactive Graph Explorer, Book-to-Book Shortest Path Bridge, and Acyclic Prerequisite Roadmaps.</a:t>
+              <a:defRPr sz="1000">
+                <a:solidFill>
+                  <a:srgbClr val="475569"/>
+                </a:solidFill>
+              </a:defRPr>
+            </a:pPr>
+            <a:r>
+              <a:t>• Interactive Graph Capabilities: Real-time knowledge graph visualizer, shortest-path degrees of separation, and DAG prerequisite learning tracks.</a:t>
             </a:r>
           </a:p>
         </p:txBody>
@@ -13040,18 +13198,18 @@
         </p:nvSpPr>
         <p:spPr>
           <a:xfrm>
-            <a:off x="8046720" y="1554480"/>
-            <a:ext cx="3383280" cy="4754880"/>
+            <a:off x="8046720" y="1371600"/>
+            <a:ext cx="3383280" cy="4937760"/>
           </a:xfrm>
           <a:prstGeom prst="roundRect">
             <a:avLst/>
           </a:prstGeom>
           <a:solidFill>
-            <a:srgbClr val="161E31"/>
+            <a:srgbClr val="FFFFFF"/>
           </a:solidFill>
           <a:ln w="12700">
             <a:solidFill>
-              <a:srgbClr val="2D3C5A"/>
+              <a:srgbClr val="CBD5E1"/>
             </a:solidFill>
           </a:ln>
         </p:spPr>
@@ -13085,8 +13243,8 @@
         </p:nvSpPr>
         <p:spPr>
           <a:xfrm>
-            <a:off x="8229600" y="1691640"/>
-            <a:ext cx="3017520" cy="4389120"/>
+            <a:off x="8229600" y="1554480"/>
+            <a:ext cx="3017520" cy="4572000"/>
           </a:xfrm>
           <a:prstGeom prst="rect">
             <a:avLst/>
@@ -13100,14 +13258,14 @@
           <a:lstStyle/>
           <a:p>
             <a:pPr>
-              <a:defRPr b="1" sz="1300">
-                <a:solidFill>
-                  <a:srgbClr val="06B6D4"/>
-                </a:solidFill>
-              </a:defRPr>
-            </a:pPr>
-            <a:r>
-              <a:t>TECHNOLOGY STACK</a:t>
+              <a:defRPr b="1" sz="1200">
+                <a:solidFill>
+                  <a:srgbClr val="0F2547"/>
+                </a:solidFill>
+              </a:defRPr>
+            </a:pPr>
+            <a:r>
+              <a:t>TECHNOLOGY STACK SUMMARY</a:t>
             </a:r>
           </a:p>
           <a:p>
@@ -13119,19 +13277,19 @@
             <a:r>
               <a:rPr b="1" sz="1000">
                 <a:solidFill>
-                  <a:srgbClr val="F8FAFC"/>
+                  <a:srgbClr val="1E293B"/>
                 </a:solidFill>
               </a:rPr>
-              <a:t>Frontend Presentation
+              <a:t>Web Framework
 </a:t>
             </a:r>
             <a:r>
               <a:rPr sz="950">
                 <a:solidFill>
-                  <a:srgbClr val="94A3B8"/>
+                  <a:srgbClr val="475569"/>
                 </a:solidFill>
               </a:rPr>
-              <a:t>HTML5, Vanilla CSS Glassmorphism Dark Theme, Plus Jakarta Sans, JetBrains Mono</a:t>
+              <a:t>Python 3.12, Flask 3.1, Flask-Session, Flask-WTF CSRF</a:t>
             </a:r>
           </a:p>
           <a:p>
@@ -13143,19 +13301,19 @@
             <a:r>
               <a:rPr b="1" sz="1000">
                 <a:solidFill>
-                  <a:srgbClr val="F8FAFC"/>
+                  <a:srgbClr val="1E293B"/>
                 </a:solidFill>
               </a:rPr>
-              <a:t>Interactive Graphics
+              <a:t>Relational Engine
 </a:t>
             </a:r>
             <a:r>
               <a:rPr sz="950">
                 <a:solidFill>
-                  <a:srgbClr val="94A3B8"/>
+                  <a:srgbClr val="475569"/>
                 </a:solidFill>
               </a:rPr>
-              <a:t>Vis.js Network v9.1.2 (Physics-driven hierarchical graph canvas)</a:t>
+              <a:t>Oracle Database 21c (Tables, Constraints, PL/SQL)</a:t>
             </a:r>
           </a:p>
           <a:p>
@@ -13167,19 +13325,19 @@
             <a:r>
               <a:rPr b="1" sz="1000">
                 <a:solidFill>
-                  <a:srgbClr val="F8FAFC"/>
+                  <a:srgbClr val="1E293B"/>
                 </a:solidFill>
               </a:rPr>
-              <a:t>Application Backend
+              <a:t>Graph Engine
 </a:t>
             </a:r>
             <a:r>
               <a:rPr sz="950">
                 <a:solidFill>
-                  <a:srgbClr val="94A3B8"/>
+                  <a:srgbClr val="475569"/>
                 </a:solidFill>
               </a:rPr>
-              <a:t>Python 3.12+, Flask 3.1, Flask-Session (Server-side files), Flask-WTF (CSRF)</a:t>
+              <a:t>Neo4j AuraDB v5+ (Cypher, Graph Traversal Algorithms)</a:t>
             </a:r>
           </a:p>
           <a:p>
@@ -13191,19 +13349,19 @@
             <a:r>
               <a:rPr b="1" sz="1000">
                 <a:solidFill>
-                  <a:srgbClr val="F8FAFC"/>
+                  <a:srgbClr val="1E293B"/>
                 </a:solidFill>
               </a:rPr>
-              <a:t>Relational Database
+              <a:t>Frontend UI
 </a:t>
             </a:r>
             <a:r>
               <a:rPr sz="950">
                 <a:solidFill>
-                  <a:srgbClr val="94A3B8"/>
+                  <a:srgbClr val="475569"/>
                 </a:solidFill>
               </a:rPr>
-              <a:t>Oracle Database 21c Enterprise (PL/SQL Triggers, Procedures, Constraints)</a:t>
+              <a:t>HTML5, Vanilla CSS, Plus Jakarta Sans, JetBrains Mono</a:t>
             </a:r>
           </a:p>
           <a:p>
@@ -13215,19 +13373,19 @@
             <a:r>
               <a:rPr b="1" sz="1000">
                 <a:solidFill>
-                  <a:srgbClr val="F8FAFC"/>
+                  <a:srgbClr val="1E293B"/>
                 </a:solidFill>
               </a:rPr>
-              <a:t>Graph Database
+              <a:t>Graph Canvas
 </a:t>
             </a:r>
             <a:r>
               <a:rPr sz="950">
                 <a:solidFill>
-                  <a:srgbClr val="94A3B8"/>
+                  <a:srgbClr val="475569"/>
                 </a:solidFill>
               </a:rPr>
-              <a:t>Neo4j AuraDB Cloud v5+ (Cypher traversal, shortestPath algorithms)</a:t>
+              <a:t>Vis.js Network v9.1.2 (Interactive Physics Rendering)</a:t>
             </a:r>
           </a:p>
           <a:p>
@@ -13239,19 +13397,19 @@
             <a:r>
               <a:rPr b="1" sz="1000">
                 <a:solidFill>
-                  <a:srgbClr val="F8FAFC"/>
+                  <a:srgbClr val="1E293B"/>
                 </a:solidFill>
               </a:rPr>
-              <a:t>Quality Assurance
+              <a:t>Verification
 </a:t>
             </a:r>
             <a:r>
               <a:rPr sz="950">
                 <a:solidFill>
-                  <a:srgbClr val="94A3B8"/>
+                  <a:srgbClr val="475569"/>
                 </a:solidFill>
               </a:rPr>
-              <a:t>7 Automated Test Suites with 100% Phase-by-Phase Verification</a:t>
+              <a:t>7 End-to-End Automated Verification Suites (100% Pass)</a:t>
             </a:r>
           </a:p>
         </p:txBody>
@@ -13289,7 +13447,7 @@
             <a:avLst/>
           </a:prstGeom>
           <a:solidFill>
-            <a:srgbClr val="0B0F19"/>
+            <a:srgbClr val="F8FAFC"/>
           </a:solidFill>
           <a:ln>
             <a:noFill/>
@@ -13325,14 +13483,14 @@
         </p:nvSpPr>
         <p:spPr>
           <a:xfrm>
-            <a:off x="731520" y="365760"/>
-            <a:ext cx="10728655" cy="36576"/>
+            <a:off x="0" y="0"/>
+            <a:ext cx="12191695" cy="73152"/>
           </a:xfrm>
           <a:prstGeom prst="rect">
             <a:avLst/>
           </a:prstGeom>
           <a:solidFill>
-            <a:srgbClr val="3B82F6"/>
+            <a:srgbClr val="1E40AF"/>
           </a:solidFill>
           <a:ln>
             <a:noFill/>
@@ -13368,8 +13526,8 @@
         </p:nvSpPr>
         <p:spPr>
           <a:xfrm>
-            <a:off x="731520" y="502920"/>
-            <a:ext cx="7315200" cy="274320"/>
+            <a:off x="731520" y="320040"/>
+            <a:ext cx="7772400" cy="256032"/>
           </a:xfrm>
           <a:prstGeom prst="rect">
             <a:avLst/>
@@ -13385,7 +13543,7 @@
             <a:pPr>
               <a:defRPr sz="1000" b="1">
                 <a:solidFill>
-                  <a:srgbClr val="06B6D4"/>
+                  <a:srgbClr val="1E40AF"/>
                 </a:solidFill>
                 <a:latin typeface="Segoe UI"/>
               </a:defRPr>
@@ -13404,7 +13562,7 @@
         </p:nvSpPr>
         <p:spPr>
           <a:xfrm>
-            <a:off x="731520" y="777240"/>
+            <a:off x="731520" y="594360"/>
             <a:ext cx="9601200" cy="548640"/>
           </a:xfrm>
           <a:prstGeom prst="rect">
@@ -13419,15 +13577,15 @@
           <a:lstStyle/>
           <a:p>
             <a:pPr>
-              <a:defRPr sz="2200" b="1">
-                <a:solidFill>
-                  <a:srgbClr val="F8FAFC"/>
+              <a:defRPr sz="2100" b="1">
+                <a:solidFill>
+                  <a:srgbClr val="0F2547"/>
                 </a:solidFill>
                 <a:latin typeface="Segoe UI"/>
               </a:defRPr>
             </a:pPr>
             <a:r>
-              <a:t>System Design &amp; Multi-Tier Architecture</a:t>
+              <a:t>Overall System Architecture &amp; Multi-Tier Data Interaction</a:t>
             </a:r>
           </a:p>
         </p:txBody>
@@ -13440,7 +13598,7 @@
         </p:nvSpPr>
         <p:spPr>
           <a:xfrm>
-            <a:off x="10515600" y="640080"/>
+            <a:off x="10515600" y="411480"/>
             <a:ext cx="914400" cy="365760"/>
           </a:xfrm>
           <a:prstGeom prst="rect">
@@ -13457,9 +13615,9 @@
             <a:pPr algn="r">
               <a:defRPr sz="1100" b="1">
                 <a:solidFill>
-                  <a:srgbClr val="64748B"/>
-                </a:solidFill>
-                <a:latin typeface="Consolas"/>
+                  <a:srgbClr val="475569"/>
+                </a:solidFill>
+                <a:latin typeface="Segoe UI"/>
               </a:defRPr>
             </a:pPr>
             <a:r>
@@ -13476,18 +13634,18 @@
         </p:nvSpPr>
         <p:spPr>
           <a:xfrm>
-            <a:off x="731520" y="1554480"/>
-            <a:ext cx="10728655" cy="1097280"/>
+            <a:off x="731520" y="1371600"/>
+            <a:ext cx="10728655" cy="1115568"/>
           </a:xfrm>
           <a:prstGeom prst="roundRect">
             <a:avLst/>
           </a:prstGeom>
           <a:solidFill>
-            <a:srgbClr val="161E31"/>
+            <a:srgbClr val="FFFFFF"/>
           </a:solidFill>
           <a:ln w="12700">
             <a:solidFill>
-              <a:srgbClr val="2D3C5A"/>
+              <a:srgbClr val="CBD5E1"/>
             </a:solidFill>
           </a:ln>
         </p:spPr>
@@ -13521,14 +13679,14 @@
         </p:nvSpPr>
         <p:spPr>
           <a:xfrm>
-            <a:off x="731520" y="1554480"/>
-            <a:ext cx="109728" cy="1097280"/>
+            <a:off x="731520" y="1371600"/>
+            <a:ext cx="109728" cy="1115568"/>
           </a:xfrm>
           <a:prstGeom prst="rect">
             <a:avLst/>
           </a:prstGeom>
           <a:solidFill>
-            <a:srgbClr val="3B82F6"/>
+            <a:srgbClr val="1E40AF"/>
           </a:solidFill>
           <a:ln>
             <a:noFill/>
@@ -13564,8 +13722,8 @@
         </p:nvSpPr>
         <p:spPr>
           <a:xfrm>
-            <a:off x="1005840" y="1627632"/>
-            <a:ext cx="2926080" cy="950976"/>
+            <a:off x="1005840" y="1444752"/>
+            <a:ext cx="3291840" cy="969264"/>
           </a:xfrm>
           <a:prstGeom prst="rect">
             <a:avLst/>
@@ -13581,25 +13739,25 @@
             <a:pPr>
               <a:defRPr sz="1100" b="1">
                 <a:solidFill>
-                  <a:srgbClr val="3B82F6"/>
+                  <a:srgbClr val="0F2547"/>
                 </a:solidFill>
                 <a:latin typeface="Segoe UI"/>
               </a:defRPr>
             </a:pPr>
             <a:r>
-              <a:t>TIER 1: PRESENTATION LAYER</a:t>
+              <a:t>Tier 1: Client &amp; Presentation Layer</a:t>
             </a:r>
           </a:p>
           <a:p>
             <a:pPr>
               <a:defRPr sz="950">
                 <a:solidFill>
-                  <a:srgbClr val="94A3B8"/>
-                </a:solidFill>
-              </a:defRPr>
-            </a:pPr>
-            <a:r>
-              <a:t>Client-Side User Interface</a:t>
+                  <a:srgbClr val="475569"/>
+                </a:solidFill>
+              </a:defRPr>
+            </a:pPr>
+            <a:r>
+              <a:t>Web Browser UI &amp; Interactive Graph Canvas</a:t>
             </a:r>
           </a:p>
         </p:txBody>
@@ -13612,8 +13770,8 @@
         </p:nvSpPr>
         <p:spPr>
           <a:xfrm>
-            <a:off x="4023360" y="1627632"/>
-            <a:ext cx="7315200" cy="950976"/>
+            <a:off x="4389120" y="1444752"/>
+            <a:ext cx="6858000" cy="969264"/>
           </a:xfrm>
           <a:prstGeom prst="rect">
             <a:avLst/>
@@ -13629,12 +13787,12 @@
             <a:pPr>
               <a:defRPr sz="950">
                 <a:solidFill>
-                  <a:srgbClr val="F8FAFC"/>
-                </a:solidFill>
-              </a:defRPr>
-            </a:pPr>
-            <a:r>
-              <a:t>• Glassmorphism Dark-Mode Web Portal (Vanilla CSS &amp; HTML5)</a:t>
+                  <a:srgbClr val="1E293B"/>
+                </a:solidFill>
+              </a:defRPr>
+            </a:pPr>
+            <a:r>
+              <a:t>• Responsive Web Portal implemented in HTML5 and clean Vanilla CSS (Modern Slate Theme).</a:t>
             </a:r>
           </a:p>
           <a:p>
@@ -13644,12 +13802,12 @@
               </a:spcBef>
               <a:defRPr sz="950">
                 <a:solidFill>
-                  <a:srgbClr val="F8FAFC"/>
-                </a:solidFill>
-              </a:defRPr>
-            </a:pPr>
-            <a:r>
-              <a:t>• Vis.js Interactive Physics Network for Knowledge Graphs</a:t>
+                  <a:srgbClr val="1E293B"/>
+                </a:solidFill>
+              </a:defRPr>
+            </a:pPr>
+            <a:r>
+              <a:t>• Vis.js physics-driven canvas rendering interactive knowledge graphs and prerequisite roadmaps.</a:t>
             </a:r>
           </a:p>
           <a:p>
@@ -13659,27 +13817,12 @@
               </a:spcBef>
               <a:defRPr sz="950">
                 <a:solidFill>
-                  <a:srgbClr val="F8FAFC"/>
-                </a:solidFill>
-              </a:defRPr>
-            </a:pPr>
-            <a:r>
-              <a:t>• Role-Adapted Views: Admin, Librarian, Faculty/Staff, Student</a:t>
-            </a:r>
-          </a:p>
-          <a:p>
-            <a:pPr>
-              <a:spcBef>
-                <a:spcPts val="200"/>
-              </a:spcBef>
-              <a:defRPr sz="950">
-                <a:solidFill>
-                  <a:srgbClr val="F8FAFC"/>
-                </a:solidFill>
-              </a:defRPr>
-            </a:pPr>
-            <a:r>
-              <a:t>• Real-Time Barcode &amp; Hyphen-Agnostic ISBN Search</a:t>
+                  <a:srgbClr val="1E293B"/>
+                </a:solidFill>
+              </a:defRPr>
+            </a:pPr>
+            <a:r>
+              <a:t>• Role-specific UI views tailored for Admin, Librarian, Faculty/Staff, and Students.</a:t>
             </a:r>
           </a:p>
         </p:txBody>
@@ -13692,18 +13835,18 @@
         </p:nvSpPr>
         <p:spPr>
           <a:xfrm>
-            <a:off x="731520" y="2788920"/>
-            <a:ext cx="10728655" cy="1097280"/>
+            <a:off x="731520" y="2606040"/>
+            <a:ext cx="10728655" cy="1115568"/>
           </a:xfrm>
           <a:prstGeom prst="roundRect">
             <a:avLst/>
           </a:prstGeom>
           <a:solidFill>
-            <a:srgbClr val="161E31"/>
+            <a:srgbClr val="FFFFFF"/>
           </a:solidFill>
           <a:ln w="12700">
             <a:solidFill>
-              <a:srgbClr val="2D3C5A"/>
+              <a:srgbClr val="CBD5E1"/>
             </a:solidFill>
           </a:ln>
         </p:spPr>
@@ -13737,14 +13880,14 @@
         </p:nvSpPr>
         <p:spPr>
           <a:xfrm>
-            <a:off x="731520" y="2788920"/>
-            <a:ext cx="109728" cy="1097280"/>
+            <a:off x="731520" y="2606040"/>
+            <a:ext cx="109728" cy="1115568"/>
           </a:xfrm>
           <a:prstGeom prst="rect">
             <a:avLst/>
           </a:prstGeom>
           <a:solidFill>
-            <a:srgbClr val="06B6D4"/>
+            <a:srgbClr val="1E40AF"/>
           </a:solidFill>
           <a:ln>
             <a:noFill/>
@@ -13780,8 +13923,8 @@
         </p:nvSpPr>
         <p:spPr>
           <a:xfrm>
-            <a:off x="1005840" y="2862072"/>
-            <a:ext cx="2926080" cy="950976"/>
+            <a:off x="1005840" y="2679192"/>
+            <a:ext cx="3291840" cy="969264"/>
           </a:xfrm>
           <a:prstGeom prst="rect">
             <a:avLst/>
@@ -13797,25 +13940,25 @@
             <a:pPr>
               <a:defRPr sz="1100" b="1">
                 <a:solidFill>
-                  <a:srgbClr val="06B6D4"/>
+                  <a:srgbClr val="0F2547"/>
                 </a:solidFill>
                 <a:latin typeface="Segoe UI"/>
               </a:defRPr>
             </a:pPr>
             <a:r>
-              <a:t>TIER 2: APPLICATION &amp; SECURITY LAYER</a:t>
+              <a:t>Tier 2: Application Controller &amp; Security Layer</a:t>
             </a:r>
           </a:p>
           <a:p>
             <a:pPr>
               <a:defRPr sz="950">
                 <a:solidFill>
-                  <a:srgbClr val="94A3B8"/>
-                </a:solidFill>
-              </a:defRPr>
-            </a:pPr>
-            <a:r>
-              <a:t>Flask WSGI Middleware &amp; RBAC</a:t>
+                  <a:srgbClr val="475569"/>
+                </a:solidFill>
+              </a:defRPr>
+            </a:pPr>
+            <a:r>
+              <a:t>Flask WSGI Middleware &amp; RBAC Controllers</a:t>
             </a:r>
           </a:p>
         </p:txBody>
@@ -13828,8 +13971,8 @@
         </p:nvSpPr>
         <p:spPr>
           <a:xfrm>
-            <a:off x="4023360" y="2862072"/>
-            <a:ext cx="7315200" cy="950976"/>
+            <a:off x="4389120" y="2679192"/>
+            <a:ext cx="6858000" cy="969264"/>
           </a:xfrm>
           <a:prstGeom prst="rect">
             <a:avLst/>
@@ -13845,12 +13988,12 @@
             <a:pPr>
               <a:defRPr sz="950">
                 <a:solidFill>
-                  <a:srgbClr val="F8FAFC"/>
-                </a:solidFill>
-              </a:defRPr>
-            </a:pPr>
-            <a:r>
-              <a:t>• Central Controller (app.py) managing 24 template endpoints</a:t>
+                  <a:srgbClr val="1E293B"/>
+                </a:solidFill>
+              </a:defRPr>
+            </a:pPr>
+            <a:r>
+              <a:t>• Central request router managing authentication, catalog browsing, loan processing, and graph APIs.</a:t>
             </a:r>
           </a:p>
           <a:p>
@@ -13860,12 +14003,12 @@
               </a:spcBef>
               <a:defRPr sz="950">
                 <a:solidFill>
-                  <a:srgbClr val="F8FAFC"/>
-                </a:solidFill>
-              </a:defRPr>
-            </a:pPr>
-            <a:r>
-              <a:t>• Flask-WTF CSRF Protection on all mutable POST requests</a:t>
+                  <a:srgbClr val="1E293B"/>
+                </a:solidFill>
+              </a:defRPr>
+            </a:pPr>
+            <a:r>
+              <a:t>• Flask-WTF CSRF token validation on all mutable operations (loan issue, returns, password updates).</a:t>
             </a:r>
           </a:p>
           <a:p>
@@ -13875,27 +14018,12 @@
               </a:spcBef>
               <a:defRPr sz="950">
                 <a:solidFill>
-                  <a:srgbClr val="F8FAFC"/>
-                </a:solidFill>
-              </a:defRPr>
-            </a:pPr>
-            <a:r>
-              <a:t>• Role-Based Access Control (@role_required, @login_required)</a:t>
-            </a:r>
-          </a:p>
-          <a:p>
-            <a:pPr>
-              <a:spcBef>
-                <a:spcPts val="200"/>
-              </a:spcBef>
-              <a:defRPr sz="950">
-                <a:solidFill>
-                  <a:srgbClr val="F8FAFC"/>
-                </a:solidFill>
-              </a:defRPr>
-            </a:pPr>
-            <a:r>
-              <a:t>• 10-minute Server-Side Idle Session Expiration &amp; Sanitization</a:t>
+                  <a:srgbClr val="1E293B"/>
+                </a:solidFill>
+              </a:defRPr>
+            </a:pPr>
+            <a:r>
+              <a:t>• 10-minute idle session timeout with automatic server-side cleanup and institutional email checks.</a:t>
             </a:r>
           </a:p>
         </p:txBody>
@@ -13908,18 +14036,18 @@
         </p:nvSpPr>
         <p:spPr>
           <a:xfrm>
-            <a:off x="731520" y="4023360"/>
-            <a:ext cx="10728655" cy="1097280"/>
+            <a:off x="731520" y="3840480"/>
+            <a:ext cx="10728655" cy="1115568"/>
           </a:xfrm>
           <a:prstGeom prst="roundRect">
             <a:avLst/>
           </a:prstGeom>
           <a:solidFill>
-            <a:srgbClr val="161E31"/>
+            <a:srgbClr val="FFFFFF"/>
           </a:solidFill>
           <a:ln w="12700">
             <a:solidFill>
-              <a:srgbClr val="2D3C5A"/>
+              <a:srgbClr val="CBD5E1"/>
             </a:solidFill>
           </a:ln>
         </p:spPr>
@@ -13953,14 +14081,14 @@
         </p:nvSpPr>
         <p:spPr>
           <a:xfrm>
-            <a:off x="731520" y="4023360"/>
-            <a:ext cx="109728" cy="1097280"/>
+            <a:off x="731520" y="3840480"/>
+            <a:ext cx="109728" cy="1115568"/>
           </a:xfrm>
           <a:prstGeom prst="rect">
             <a:avLst/>
           </a:prstGeom>
           <a:solidFill>
-            <a:srgbClr val="10B981"/>
+            <a:srgbClr val="1E40AF"/>
           </a:solidFill>
           <a:ln>
             <a:noFill/>
@@ -13996,8 +14124,8 @@
         </p:nvSpPr>
         <p:spPr>
           <a:xfrm>
-            <a:off x="1005840" y="4096512"/>
-            <a:ext cx="2926080" cy="950976"/>
+            <a:off x="1005840" y="3913632"/>
+            <a:ext cx="3291840" cy="969264"/>
           </a:xfrm>
           <a:prstGeom prst="rect">
             <a:avLst/>
@@ -14013,25 +14141,25 @@
             <a:pPr>
               <a:defRPr sz="1100" b="1">
                 <a:solidFill>
-                  <a:srgbClr val="10B981"/>
+                  <a:srgbClr val="0F2547"/>
                 </a:solidFill>
                 <a:latin typeface="Segoe UI"/>
               </a:defRPr>
             </a:pPr>
             <a:r>
-              <a:t>TIER 3: DATA ACCESS &amp; ORCHESTRATION</a:t>
+              <a:t>Tier 3: Data Access &amp; Business Logic Layer</a:t>
             </a:r>
           </a:p>
           <a:p>
             <a:pPr>
               <a:defRPr sz="950">
                 <a:solidFill>
-                  <a:srgbClr val="94A3B8"/>
-                </a:solidFill>
-              </a:defRPr>
-            </a:pPr>
-            <a:r>
-              <a:t>Dual Database Drivers</a:t>
+                  <a:srgbClr val="475569"/>
+                </a:solidFill>
+              </a:defRPr>
+            </a:pPr>
+            <a:r>
+              <a:t>Parameterized Database Drivers &amp; Controllers</a:t>
             </a:r>
           </a:p>
         </p:txBody>
@@ -14044,8 +14172,8 @@
         </p:nvSpPr>
         <p:spPr>
           <a:xfrm>
-            <a:off x="4023360" y="4096512"/>
-            <a:ext cx="7315200" cy="950976"/>
+            <a:off x="4389120" y="3913632"/>
+            <a:ext cx="6858000" cy="969264"/>
           </a:xfrm>
           <a:prstGeom prst="rect">
             <a:avLst/>
@@ -14061,12 +14189,12 @@
             <a:pPr>
               <a:defRPr sz="950">
                 <a:solidFill>
-                  <a:srgbClr val="F8FAFC"/>
-                </a:solidFill>
-              </a:defRPr>
-            </a:pPr>
-            <a:r>
-              <a:t>• Neo4j Bolt Protocol (neo4j+s://) with Cypher Query Language</a:t>
+                  <a:srgbClr val="1E293B"/>
+                </a:solidFill>
+              </a:defRPr>
+            </a:pPr>
+            <a:r>
+              <a:t>• Neo4j Bolt Protocol (neo4j+s://) executing optimized Cypher shortestPath() and prerequisite queries.</a:t>
             </a:r>
           </a:p>
           <a:p>
@@ -14076,12 +14204,12 @@
               </a:spcBef>
               <a:defRPr sz="950">
                 <a:solidFill>
-                  <a:srgbClr val="F8FAFC"/>
-                </a:solidFill>
-              </a:defRPr>
-            </a:pPr>
-            <a:r>
-              <a:t>• cx_Oracle / Oracle Client Driver for Relational Transactions</a:t>
+                  <a:srgbClr val="1E293B"/>
+                </a:solidFill>
+              </a:defRPr>
+            </a:pPr>
+            <a:r>
+              <a:t>• Oracle Client / cx_Oracle connector executing transaction-managed PL/SQL stored procedures.</a:t>
             </a:r>
           </a:p>
           <a:p>
@@ -14091,27 +14219,12 @@
               </a:spcBef>
               <a:defRPr sz="950">
                 <a:solidFill>
-                  <a:srgbClr val="F8FAFC"/>
-                </a:solidFill>
-              </a:defRPr>
-            </a:pPr>
-            <a:r>
-              <a:t>• Transaction Controller: Atomic Copy Status &amp; Loan Handover</a:t>
-            </a:r>
-          </a:p>
-          <a:p>
-            <a:pPr>
-              <a:spcBef>
-                <a:spcPts val="200"/>
-              </a:spcBef>
-              <a:defRPr sz="950">
-                <a:solidFill>
-                  <a:srgbClr val="F8FAFC"/>
-                </a:solidFill>
-              </a:defRPr>
-            </a:pPr>
-            <a:r>
-              <a:t>• Dynamic Date Wrapping &amp; Patron Privacy Masking Middleware</a:t>
+                  <a:srgbClr val="1E293B"/>
+                </a:solidFill>
+              </a:defRPr>
+            </a:pPr>
+            <a:r>
+              <a:t>• Dynamic patron privacy masking to anonymize fellow student loan requests on shared canvases.</a:t>
             </a:r>
           </a:p>
         </p:txBody>
@@ -14124,18 +14237,18 @@
         </p:nvSpPr>
         <p:spPr>
           <a:xfrm>
-            <a:off x="731520" y="5257800"/>
-            <a:ext cx="10728655" cy="1097280"/>
+            <a:off x="731520" y="5074920"/>
+            <a:ext cx="10728655" cy="1115568"/>
           </a:xfrm>
           <a:prstGeom prst="roundRect">
             <a:avLst/>
           </a:prstGeom>
           <a:solidFill>
-            <a:srgbClr val="161E31"/>
+            <a:srgbClr val="FFFFFF"/>
           </a:solidFill>
           <a:ln w="12700">
             <a:solidFill>
-              <a:srgbClr val="2D3C5A"/>
+              <a:srgbClr val="CBD5E1"/>
             </a:solidFill>
           </a:ln>
         </p:spPr>
@@ -14169,14 +14282,14 @@
         </p:nvSpPr>
         <p:spPr>
           <a:xfrm>
-            <a:off x="731520" y="5257800"/>
-            <a:ext cx="109728" cy="1097280"/>
+            <a:off x="731520" y="5074920"/>
+            <a:ext cx="109728" cy="1115568"/>
           </a:xfrm>
           <a:prstGeom prst="rect">
             <a:avLst/>
           </a:prstGeom>
           <a:solidFill>
-            <a:srgbClr val="F59E0B"/>
+            <a:srgbClr val="1E40AF"/>
           </a:solidFill>
           <a:ln>
             <a:noFill/>
@@ -14212,8 +14325,8 @@
         </p:nvSpPr>
         <p:spPr>
           <a:xfrm>
-            <a:off x="1005840" y="5330952"/>
-            <a:ext cx="2926080" cy="950976"/>
+            <a:off x="1005840" y="5148072"/>
+            <a:ext cx="3291840" cy="969264"/>
           </a:xfrm>
           <a:prstGeom prst="rect">
             <a:avLst/>
@@ -14229,25 +14342,25 @@
             <a:pPr>
               <a:defRPr sz="1100" b="1">
                 <a:solidFill>
-                  <a:srgbClr val="F59E0B"/>
+                  <a:srgbClr val="0F2547"/>
                 </a:solidFill>
                 <a:latin typeface="Segoe UI"/>
               </a:defRPr>
             </a:pPr>
             <a:r>
-              <a:t>TIER 4: PERSISTENCE &amp; STORAGE TIER</a:t>
+              <a:t>Tier 4: Enterprise Storage Tier</a:t>
             </a:r>
           </a:p>
           <a:p>
             <a:pPr>
               <a:defRPr sz="950">
                 <a:solidFill>
-                  <a:srgbClr val="94A3B8"/>
-                </a:solidFill>
-              </a:defRPr>
-            </a:pPr>
-            <a:r>
-              <a:t>Dual-Paradigm Database</a:t>
+                  <a:srgbClr val="475569"/>
+                </a:solidFill>
+              </a:defRPr>
+            </a:pPr>
+            <a:r>
+              <a:t>Relational Database (Oracle) &amp; Property Graph (Neo4j)</a:t>
             </a:r>
           </a:p>
         </p:txBody>
@@ -14260,8 +14373,8 @@
         </p:nvSpPr>
         <p:spPr>
           <a:xfrm>
-            <a:off x="4023360" y="5330952"/>
-            <a:ext cx="7315200" cy="950976"/>
+            <a:off x="4389120" y="5148072"/>
+            <a:ext cx="6858000" cy="969264"/>
           </a:xfrm>
           <a:prstGeom prst="rect">
             <a:avLst/>
@@ -14277,12 +14390,12 @@
             <a:pPr>
               <a:defRPr sz="950">
                 <a:solidFill>
-                  <a:srgbClr val="F8FAFC"/>
-                </a:solidFill>
-              </a:defRPr>
-            </a:pPr>
-            <a:r>
-              <a:t>• Oracle 21c Relational Tables: 10 tables in BCNF, constraints, PL/SQL</a:t>
+                  <a:srgbClr val="1E293B"/>
+                </a:solidFill>
+              </a:defRPr>
+            </a:pPr>
+            <a:r>
+              <a:t>• Oracle 21c Database: 10 normalized tables in BCNF, foreign key cascades, triggers, and views.</a:t>
             </a:r>
           </a:p>
           <a:p>
@@ -14292,12 +14405,12 @@
               </a:spcBef>
               <a:defRPr sz="950">
                 <a:solidFill>
-                  <a:srgbClr val="F8FAFC"/>
-                </a:solidFill>
-              </a:defRPr>
-            </a:pPr>
-            <a:r>
-              <a:t>• Neo4j AuraDB Graph: 9 node entity types, 7 relationship edges</a:t>
+                  <a:srgbClr val="1E293B"/>
+                </a:solidFill>
+              </a:defRPr>
+            </a:pPr>
+            <a:r>
+              <a:t>• Neo4j AuraDB: 9 node entity types, 7 relationship edges, and 12 schema uniqueness constraints.</a:t>
             </a:r>
           </a:p>
           <a:p>
@@ -14307,27 +14420,12 @@
               </a:spcBef>
               <a:defRPr sz="950">
                 <a:solidFill>
-                  <a:srgbClr val="F8FAFC"/>
-                </a:solidFill>
-              </a:defRPr>
-            </a:pPr>
-            <a:r>
-              <a:t>• Autonomous Triggers: Quota enforcement, copy synchronization</a:t>
-            </a:r>
-          </a:p>
-          <a:p>
-            <a:pPr>
-              <a:spcBef>
-                <a:spcPts val="200"/>
-              </a:spcBef>
-              <a:defRPr sz="950">
-                <a:solidFill>
-                  <a:srgbClr val="F8FAFC"/>
-                </a:solidFill>
-              </a:defRPr>
-            </a:pPr>
-            <a:r>
-              <a:t>• Continuous Integrity Checks: Foreign Key Cascades &amp; Locks</a:t>
+                  <a:srgbClr val="1E293B"/>
+                </a:solidFill>
+              </a:defRPr>
+            </a:pPr>
+            <a:r>
+              <a:t>• Automated quota enforcement, copy status synchronization, and audit logging.</a:t>
             </a:r>
           </a:p>
         </p:txBody>
@@ -14365,7 +14463,7 @@
             <a:avLst/>
           </a:prstGeom>
           <a:solidFill>
-            <a:srgbClr val="0B0F19"/>
+            <a:srgbClr val="F8FAFC"/>
           </a:solidFill>
           <a:ln>
             <a:noFill/>
@@ -14401,14 +14499,14 @@
         </p:nvSpPr>
         <p:spPr>
           <a:xfrm>
-            <a:off x="731520" y="365760"/>
-            <a:ext cx="10728655" cy="36576"/>
+            <a:off x="0" y="0"/>
+            <a:ext cx="12191695" cy="73152"/>
           </a:xfrm>
           <a:prstGeom prst="rect">
             <a:avLst/>
           </a:prstGeom>
           <a:solidFill>
-            <a:srgbClr val="3B82F6"/>
+            <a:srgbClr val="1E40AF"/>
           </a:solidFill>
           <a:ln>
             <a:noFill/>
@@ -14444,8 +14542,8 @@
         </p:nvSpPr>
         <p:spPr>
           <a:xfrm>
-            <a:off x="731520" y="502920"/>
-            <a:ext cx="7315200" cy="274320"/>
+            <a:off x="731520" y="320040"/>
+            <a:ext cx="7772400" cy="256032"/>
           </a:xfrm>
           <a:prstGeom prst="rect">
             <a:avLst/>
@@ -14461,7 +14559,7 @@
             <a:pPr>
               <a:defRPr sz="1000" b="1">
                 <a:solidFill>
-                  <a:srgbClr val="06B6D4"/>
+                  <a:srgbClr val="1E40AF"/>
                 </a:solidFill>
                 <a:latin typeface="Segoe UI"/>
               </a:defRPr>
@@ -14480,7 +14578,7 @@
         </p:nvSpPr>
         <p:spPr>
           <a:xfrm>
-            <a:off x="731520" y="777240"/>
+            <a:off x="731520" y="594360"/>
             <a:ext cx="9601200" cy="548640"/>
           </a:xfrm>
           <a:prstGeom prst="rect">
@@ -14495,15 +14593,15 @@
           <a:lstStyle/>
           <a:p>
             <a:pPr>
-              <a:defRPr sz="2200" b="1">
-                <a:solidFill>
-                  <a:srgbClr val="F8FAFC"/>
+              <a:defRPr sz="2100" b="1">
+                <a:solidFill>
+                  <a:srgbClr val="0F2547"/>
                 </a:solidFill>
                 <a:latin typeface="Segoe UI"/>
               </a:defRPr>
             </a:pPr>
             <a:r>
-              <a:t>Conceptual Data Modeling — ER Diagram &amp; Entity Mapping</a:t>
+              <a:t>Conceptual Data Model — Entity-Relationship (ER) Diagram</a:t>
             </a:r>
           </a:p>
         </p:txBody>
@@ -14516,7 +14614,7 @@
         </p:nvSpPr>
         <p:spPr>
           <a:xfrm>
-            <a:off x="10515600" y="640080"/>
+            <a:off x="10515600" y="411480"/>
             <a:ext cx="914400" cy="365760"/>
           </a:xfrm>
           <a:prstGeom prst="rect">
@@ -14533,9 +14631,9 @@
             <a:pPr algn="r">
               <a:defRPr sz="1100" b="1">
                 <a:solidFill>
-                  <a:srgbClr val="64748B"/>
-                </a:solidFill>
-                <a:latin typeface="Consolas"/>
+                  <a:srgbClr val="475569"/>
+                </a:solidFill>
+                <a:latin typeface="Segoe UI"/>
               </a:defRPr>
             </a:pPr>
             <a:r>
@@ -14552,18 +14650,18 @@
         </p:nvSpPr>
         <p:spPr>
           <a:xfrm>
-            <a:off x="731520" y="1554480"/>
-            <a:ext cx="6217920" cy="4846320"/>
+            <a:off x="731520" y="1371600"/>
+            <a:ext cx="6217920" cy="4937760"/>
           </a:xfrm>
           <a:prstGeom prst="roundRect">
             <a:avLst/>
           </a:prstGeom>
           <a:solidFill>
-            <a:srgbClr val="161E31"/>
+            <a:srgbClr val="FFFFFF"/>
           </a:solidFill>
           <a:ln w="12700">
             <a:solidFill>
-              <a:srgbClr val="2D3C5A"/>
+              <a:srgbClr val="CBD5E1"/>
             </a:solidFill>
           </a:ln>
         </p:spPr>
@@ -14605,7 +14703,7 @@
         </p:blipFill>
         <p:spPr>
           <a:xfrm>
-            <a:off x="868680" y="1691640"/>
+            <a:off x="868680" y="1508760"/>
             <a:ext cx="5943600" cy="3343275"/>
           </a:xfrm>
           <a:prstGeom prst="rect">
@@ -14621,8 +14719,8 @@
         </p:nvSpPr>
         <p:spPr>
           <a:xfrm>
-            <a:off x="731520" y="6035040"/>
-            <a:ext cx="6217920" cy="365760"/>
+            <a:off x="731520" y="5897880"/>
+            <a:ext cx="6217920" cy="320040"/>
           </a:xfrm>
           <a:prstGeom prst="rect">
             <a:avLst/>
@@ -14638,12 +14736,12 @@
             <a:pPr algn="ctr">
               <a:defRPr sz="900" i="1">
                 <a:solidFill>
-                  <a:srgbClr val="94A3B8"/>
-                </a:solidFill>
-              </a:defRPr>
-            </a:pPr>
-            <a:r>
-              <a:t>Figure: Conceptual Entity-Relationship (ER) Diagram of the Library System</a:t>
+                  <a:srgbClr val="475569"/>
+                </a:solidFill>
+              </a:defRPr>
+            </a:pPr>
+            <a:r>
+              <a:t>Figure: Conceptual Entity-Relationship (ER) Diagram of the Library Management System</a:t>
             </a:r>
           </a:p>
         </p:txBody>
@@ -14656,18 +14754,18 @@
         </p:nvSpPr>
         <p:spPr>
           <a:xfrm>
-            <a:off x="7132320" y="1554480"/>
-            <a:ext cx="4327855" cy="4846320"/>
+            <a:off x="7132320" y="1371600"/>
+            <a:ext cx="4327855" cy="4937760"/>
           </a:xfrm>
           <a:prstGeom prst="roundRect">
             <a:avLst/>
           </a:prstGeom>
           <a:solidFill>
-            <a:srgbClr val="161E31"/>
+            <a:srgbClr val="FFFFFF"/>
           </a:solidFill>
           <a:ln w="12700">
             <a:solidFill>
-              <a:srgbClr val="2D3C5A"/>
+              <a:srgbClr val="CBD5E1"/>
             </a:solidFill>
           </a:ln>
         </p:spPr>
@@ -14701,8 +14799,8 @@
         </p:nvSpPr>
         <p:spPr>
           <a:xfrm>
-            <a:off x="7315200" y="1691640"/>
-            <a:ext cx="3962095" cy="4480560"/>
+            <a:off x="7315200" y="1554480"/>
+            <a:ext cx="3962095" cy="4572000"/>
           </a:xfrm>
           <a:prstGeom prst="rect">
             <a:avLst/>
@@ -14716,9 +14814,9 @@
           <a:lstStyle/>
           <a:p>
             <a:pPr>
-              <a:defRPr b="1" sz="1300">
-                <a:solidFill>
-                  <a:srgbClr val="06B6D4"/>
+              <a:defRPr b="1" sz="1200">
+                <a:solidFill>
+                  <a:srgbClr val="0F2547"/>
                 </a:solidFill>
               </a:defRPr>
             </a:pPr>
@@ -14735,19 +14833,19 @@
             <a:r>
               <a:rPr b="1" sz="1000">
                 <a:solidFill>
-                  <a:srgbClr val="F59E0B"/>
+                  <a:srgbClr val="1E40AF"/>
                 </a:solidFill>
               </a:rPr>
-              <a:t>1:N PUBLISHER -&gt; BOOKS
+              <a:t>1:N Publisher to Books
 </a:t>
             </a:r>
             <a:r>
               <a:rPr sz="900">
                 <a:solidFill>
-                  <a:srgbClr val="94A3B8"/>
+                  <a:srgbClr val="475569"/>
                 </a:solidFill>
               </a:rPr>
-              <a:t>One publisher produces many book titles; each title belongs to exactly one publisher.</a:t>
+              <a:t>Each publisher publishes multiple titles; every book is linked to a single registered publisher.</a:t>
             </a:r>
           </a:p>
           <a:p>
@@ -14759,19 +14857,19 @@
             <a:r>
               <a:rPr b="1" sz="1000">
                 <a:solidFill>
-                  <a:srgbClr val="F59E0B"/>
+                  <a:srgbClr val="1E40AF"/>
                 </a:solidFill>
               </a:rPr>
-              <a:t>M:N BOOKS &lt;-&gt; AUTHORS
+              <a:t>M:N Books to Authors
 </a:t>
             </a:r>
             <a:r>
               <a:rPr sz="900">
                 <a:solidFill>
-                  <a:srgbClr val="94A3B8"/>
+                  <a:srgbClr val="475569"/>
                 </a:solidFill>
               </a:rPr>
-              <a:t>A book can have multiple co-authors; an author writes multiple books. Resolved via BOOK_AUTHORS associative table.</a:t>
+              <a:t>A book may have co-authors, and authors write multiple books. Mapped into the BOOK_AUTHORS relationship table.</a:t>
             </a:r>
           </a:p>
           <a:p>
@@ -14783,19 +14881,19 @@
             <a:r>
               <a:rPr b="1" sz="1000">
                 <a:solidFill>
-                  <a:srgbClr val="F59E0B"/>
+                  <a:srgbClr val="1E40AF"/>
                 </a:solidFill>
               </a:rPr>
-              <a:t>1:N BOOK -&gt; BOOK_COPIES
+              <a:t>1:N Book to Copies
 </a:t>
             </a:r>
             <a:r>
               <a:rPr sz="900">
                 <a:solidFill>
-                  <a:srgbClr val="94A3B8"/>
+                  <a:srgbClr val="475569"/>
                 </a:solidFill>
               </a:rPr>
-              <a:t>Decouples abstract bibliographic metadata from physical trackable inventory copies.</a:t>
+              <a:t>Separates abstract bibliographic titles from physical inventory tracking copies (status: Available, Borrowed, Reserved).</a:t>
             </a:r>
           </a:p>
           <a:p>
@@ -14807,19 +14905,19 @@
             <a:r>
               <a:rPr b="1" sz="1000">
                 <a:solidFill>
-                  <a:srgbClr val="F59E0B"/>
+                  <a:srgbClr val="1E40AF"/>
                 </a:solidFill>
               </a:rPr>
-              <a:t>1:N USER -&gt; LOANS
+              <a:t>1:N User to Loans
 </a:t>
             </a:r>
             <a:r>
               <a:rPr sz="900">
                 <a:solidFill>
-                  <a:srgbClr val="94A3B8"/>
+                  <a:srgbClr val="475569"/>
                 </a:solidFill>
               </a:rPr>
-              <a:t>A patron can have multiple historical borrowing events, strictly capped at 3 active concurrent loans.</a:t>
+              <a:t>Patrons record historical loans over time, strictly capped at 3 active concurrent borrowed books.</a:t>
             </a:r>
           </a:p>
           <a:p>
@@ -14831,19 +14929,19 @@
             <a:r>
               <a:rPr b="1" sz="1000">
                 <a:solidFill>
-                  <a:srgbClr val="F59E0B"/>
+                  <a:srgbClr val="1E40AF"/>
                 </a:solidFill>
               </a:rPr>
-              <a:t>1:1 LOAN -&gt; FINES
+              <a:t>1:1 Loan to Fines
 </a:t>
             </a:r>
             <a:r>
               <a:rPr sz="900">
                 <a:solidFill>
-                  <a:srgbClr val="94A3B8"/>
+                  <a:srgbClr val="475569"/>
                 </a:solidFill>
               </a:rPr>
-              <a:t>An overdue loan generates a financial penalty record with automated Rs. 5/day calculation.</a:t>
+              <a:t>Overdue book returns automatically generate a financial disciplinary record (Rs. 5 per overdue day).</a:t>
             </a:r>
           </a:p>
           <a:p>
@@ -14855,19 +14953,19 @@
             <a:r>
               <a:rPr b="1" sz="1000">
                 <a:solidFill>
-                  <a:srgbClr val="F59E0B"/>
+                  <a:srgbClr val="1E40AF"/>
                 </a:solidFill>
               </a:rPr>
-              <a:t>RELATIONAL NORMALIZATION
+              <a:t>Relational Normalization
 </a:t>
             </a:r>
             <a:r>
               <a:rPr sz="900">
                 <a:solidFill>
-                  <a:srgbClr val="94A3B8"/>
+                  <a:srgbClr val="475569"/>
                 </a:solidFill>
               </a:rPr>
-              <a:t>Member, Employee, and Admin conceptual entities unified into USERS table with Role-Based Access Control.</a:t>
+              <a:t>Conceptual Member, Employee, and Admin roles are unified into the USERS entity with Role-Based Access Control.</a:t>
             </a:r>
           </a:p>
         </p:txBody>
@@ -14905,7 +15003,7 @@
             <a:avLst/>
           </a:prstGeom>
           <a:solidFill>
-            <a:srgbClr val="0B0F19"/>
+            <a:srgbClr val="F8FAFC"/>
           </a:solidFill>
           <a:ln>
             <a:noFill/>
@@ -14941,14 +15039,14 @@
         </p:nvSpPr>
         <p:spPr>
           <a:xfrm>
-            <a:off x="731520" y="365760"/>
-            <a:ext cx="10728655" cy="36576"/>
+            <a:off x="0" y="0"/>
+            <a:ext cx="12191695" cy="73152"/>
           </a:xfrm>
           <a:prstGeom prst="rect">
             <a:avLst/>
           </a:prstGeom>
           <a:solidFill>
-            <a:srgbClr val="3B82F6"/>
+            <a:srgbClr val="1E40AF"/>
           </a:solidFill>
           <a:ln>
             <a:noFill/>
@@ -14984,8 +15082,8 @@
         </p:nvSpPr>
         <p:spPr>
           <a:xfrm>
-            <a:off x="731520" y="502920"/>
-            <a:ext cx="7315200" cy="274320"/>
+            <a:off x="731520" y="320040"/>
+            <a:ext cx="7772400" cy="256032"/>
           </a:xfrm>
           <a:prstGeom prst="rect">
             <a:avLst/>
@@ -15001,7 +15099,7 @@
             <a:pPr>
               <a:defRPr sz="1000" b="1">
                 <a:solidFill>
-                  <a:srgbClr val="06B6D4"/>
+                  <a:srgbClr val="1E40AF"/>
                 </a:solidFill>
                 <a:latin typeface="Segoe UI"/>
               </a:defRPr>
@@ -15020,7 +15118,7 @@
         </p:nvSpPr>
         <p:spPr>
           <a:xfrm>
-            <a:off x="731520" y="777240"/>
+            <a:off x="731520" y="594360"/>
             <a:ext cx="9601200" cy="548640"/>
           </a:xfrm>
           <a:prstGeom prst="rect">
@@ -15035,15 +15133,15 @@
           <a:lstStyle/>
           <a:p>
             <a:pPr>
-              <a:defRPr sz="2200" b="1">
-                <a:solidFill>
-                  <a:srgbClr val="F8FAFC"/>
+              <a:defRPr sz="2100" b="1">
+                <a:solidFill>
+                  <a:srgbClr val="0F2547"/>
                 </a:solidFill>
                 <a:latin typeface="Segoe UI"/>
               </a:defRPr>
             </a:pPr>
             <a:r>
-              <a:t>Relational Schema &amp; Normalization Proof (BCNF)</a:t>
+              <a:t>Relational Schema &amp; Functional Dependency Normalization (BCNF)</a:t>
             </a:r>
           </a:p>
         </p:txBody>
@@ -15056,7 +15154,7 @@
         </p:nvSpPr>
         <p:spPr>
           <a:xfrm>
-            <a:off x="10515600" y="640080"/>
+            <a:off x="10515600" y="411480"/>
             <a:ext cx="914400" cy="365760"/>
           </a:xfrm>
           <a:prstGeom prst="rect">
@@ -15073,9 +15171,9 @@
             <a:pPr algn="r">
               <a:defRPr sz="1100" b="1">
                 <a:solidFill>
-                  <a:srgbClr val="64748B"/>
-                </a:solidFill>
-                <a:latin typeface="Consolas"/>
+                  <a:srgbClr val="475569"/>
+                </a:solidFill>
+                <a:latin typeface="Segoe UI"/>
               </a:defRPr>
             </a:pPr>
             <a:r>
@@ -15092,18 +15190,18 @@
         </p:nvSpPr>
         <p:spPr>
           <a:xfrm>
-            <a:off x="731520" y="1554480"/>
-            <a:ext cx="6400800" cy="4846320"/>
+            <a:off x="731520" y="1371600"/>
+            <a:ext cx="6400800" cy="4937760"/>
           </a:xfrm>
           <a:prstGeom prst="roundRect">
             <a:avLst/>
           </a:prstGeom>
           <a:solidFill>
-            <a:srgbClr val="161E31"/>
+            <a:srgbClr val="FFFFFF"/>
           </a:solidFill>
           <a:ln w="12700">
             <a:solidFill>
-              <a:srgbClr val="2D3C5A"/>
+              <a:srgbClr val="CBD5E1"/>
             </a:solidFill>
           </a:ln>
         </p:spPr>
@@ -15137,8 +15235,8 @@
         </p:nvSpPr>
         <p:spPr>
           <a:xfrm>
-            <a:off x="914400" y="1691640"/>
-            <a:ext cx="6035040" cy="4480560"/>
+            <a:off x="914400" y="1508760"/>
+            <a:ext cx="6035040" cy="4663440"/>
           </a:xfrm>
           <a:prstGeom prst="rect">
             <a:avLst/>
@@ -15154,12 +15252,12 @@
             <a:pPr>
               <a:defRPr b="1" sz="1200">
                 <a:solidFill>
-                  <a:srgbClr val="3B82F6"/>
-                </a:solidFill>
-              </a:defRPr>
-            </a:pPr>
-            <a:r>
-              <a:t>RELATIONAL SCHEMA (PRIMARY &amp; FOREIGN KEYS)</a:t>
+                  <a:srgbClr val="0F2547"/>
+                </a:solidFill>
+              </a:defRPr>
+            </a:pPr>
+            <a:r>
+              <a:t>RELATIONAL SCHEMA SPECIFICATIONS</a:t>
             </a:r>
           </a:p>
           <a:p>
@@ -15171,27 +15269,19 @@
             <a:r>
               <a:rPr b="1" sz="950">
                 <a:solidFill>
-                  <a:srgbClr val="06B6D4"/>
+                  <a:srgbClr val="1E40AF"/>
                 </a:solidFill>
               </a:rPr>
-              <a:t>CATEGORIES (</a:t>
-            </a:r>
-            <a:r>
-              <a:rPr sz="900">
-                <a:solidFill>
-                  <a:srgbClr val="F8FAFC"/>
+              <a:t>CATEGORIES </a:t>
+            </a:r>
+            <a:r>
+              <a:rPr sz="850">
+                <a:solidFill>
+                  <a:srgbClr val="1E293B"/>
                 </a:solidFill>
                 <a:latin typeface="Consolas"/>
               </a:rPr>
-              <a:t>category_id [PK], category_name, description</a:t>
-            </a:r>
-            <a:r>
-              <a:rPr b="1" sz="950">
-                <a:solidFill>
-                  <a:srgbClr val="06B6D4"/>
-                </a:solidFill>
-              </a:rPr>
-              <a:t>)</a:t>
+              <a:t>(category_id [PK], category_name, description)</a:t>
             </a:r>
           </a:p>
           <a:p>
@@ -15203,27 +15293,19 @@
             <a:r>
               <a:rPr b="1" sz="950">
                 <a:solidFill>
-                  <a:srgbClr val="06B6D4"/>
+                  <a:srgbClr val="1E40AF"/>
                 </a:solidFill>
               </a:rPr>
-              <a:t>PUBLISHERS (</a:t>
-            </a:r>
-            <a:r>
-              <a:rPr sz="900">
-                <a:solidFill>
-                  <a:srgbClr val="F8FAFC"/>
+              <a:t>PUBLISHERS </a:t>
+            </a:r>
+            <a:r>
+              <a:rPr sz="850">
+                <a:solidFill>
+                  <a:srgbClr val="1E293B"/>
                 </a:solidFill>
                 <a:latin typeface="Consolas"/>
               </a:rPr>
-              <a:t>publisher_id [PK], name, address, phone, email</a:t>
-            </a:r>
-            <a:r>
-              <a:rPr b="1" sz="950">
-                <a:solidFill>
-                  <a:srgbClr val="06B6D4"/>
-                </a:solidFill>
-              </a:rPr>
-              <a:t>)</a:t>
+              <a:t>(publisher_id [PK], name, address, phone, email)</a:t>
             </a:r>
           </a:p>
           <a:p>
@@ -15235,27 +15317,19 @@
             <a:r>
               <a:rPr b="1" sz="950">
                 <a:solidFill>
-                  <a:srgbClr val="06B6D4"/>
+                  <a:srgbClr val="1E40AF"/>
                 </a:solidFill>
               </a:rPr>
-              <a:t>AUTHORS (</a:t>
-            </a:r>
-            <a:r>
-              <a:rPr sz="900">
-                <a:solidFill>
-                  <a:srgbClr val="F8FAFC"/>
+              <a:t>AUTHORS </a:t>
+            </a:r>
+            <a:r>
+              <a:rPr sz="850">
+                <a:solidFill>
+                  <a:srgbClr val="1E293B"/>
                 </a:solidFill>
                 <a:latin typeface="Consolas"/>
               </a:rPr>
-              <a:t>author_id [PK], first_name, last_name, bio</a:t>
-            </a:r>
-            <a:r>
-              <a:rPr b="1" sz="950">
-                <a:solidFill>
-                  <a:srgbClr val="06B6D4"/>
-                </a:solidFill>
-              </a:rPr>
-              <a:t>)</a:t>
+              <a:t>(author_id [PK], first_name, last_name, bio)</a:t>
             </a:r>
           </a:p>
           <a:p>
@@ -15267,27 +15341,19 @@
             <a:r>
               <a:rPr b="1" sz="950">
                 <a:solidFill>
-                  <a:srgbClr val="06B6D4"/>
+                  <a:srgbClr val="1E40AF"/>
                 </a:solidFill>
               </a:rPr>
-              <a:t>BOOKS (</a:t>
-            </a:r>
-            <a:r>
-              <a:rPr sz="900">
-                <a:solidFill>
-                  <a:srgbClr val="F8FAFC"/>
+              <a:t>BOOKS </a:t>
+            </a:r>
+            <a:r>
+              <a:rPr sz="850">
+                <a:solidFill>
+                  <a:srgbClr val="1E293B"/>
                 </a:solidFill>
                 <a:latin typeface="Consolas"/>
               </a:rPr>
-              <a:t>book_id [PK], title, isbn, publication_year, category_id [FK], publisher_id [FK]</a:t>
-            </a:r>
-            <a:r>
-              <a:rPr b="1" sz="950">
-                <a:solidFill>
-                  <a:srgbClr val="06B6D4"/>
-                </a:solidFill>
-              </a:rPr>
-              <a:t>)</a:t>
+              <a:t>(book_id [PK], title, isbn, publication_year, category_id [FK], publisher_id [FK])</a:t>
             </a:r>
           </a:p>
           <a:p>
@@ -15299,27 +15365,19 @@
             <a:r>
               <a:rPr b="1" sz="950">
                 <a:solidFill>
-                  <a:srgbClr val="06B6D4"/>
+                  <a:srgbClr val="1E40AF"/>
                 </a:solidFill>
               </a:rPr>
-              <a:t>BOOK_AUTHORS (</a:t>
-            </a:r>
-            <a:r>
-              <a:rPr sz="900">
-                <a:solidFill>
-                  <a:srgbClr val="F8FAFC"/>
+              <a:t>BOOK_AUTHORS </a:t>
+            </a:r>
+            <a:r>
+              <a:rPr sz="850">
+                <a:solidFill>
+                  <a:srgbClr val="1E293B"/>
                 </a:solidFill>
                 <a:latin typeface="Consolas"/>
               </a:rPr>
-              <a:t>book_id [PK, FK], author_id [PK, FK]</a:t>
-            </a:r>
-            <a:r>
-              <a:rPr b="1" sz="950">
-                <a:solidFill>
-                  <a:srgbClr val="06B6D4"/>
-                </a:solidFill>
-              </a:rPr>
-              <a:t>)</a:t>
+              <a:t>(book_id [PK, FK], author_id [PK, FK])</a:t>
             </a:r>
           </a:p>
           <a:p>
@@ -15331,27 +15389,19 @@
             <a:r>
               <a:rPr b="1" sz="950">
                 <a:solidFill>
-                  <a:srgbClr val="06B6D4"/>
+                  <a:srgbClr val="1E40AF"/>
                 </a:solidFill>
               </a:rPr>
-              <a:t>BOOK_COPIES (</a:t>
-            </a:r>
-            <a:r>
-              <a:rPr sz="900">
-                <a:solidFill>
-                  <a:srgbClr val="F8FAFC"/>
+              <a:t>BOOK_COPIES </a:t>
+            </a:r>
+            <a:r>
+              <a:rPr sz="850">
+                <a:solidFill>
+                  <a:srgbClr val="1E293B"/>
                 </a:solidFill>
                 <a:latin typeface="Consolas"/>
               </a:rPr>
-              <a:t>copy_id [PK], book_id [FK], status, acquisition_date</a:t>
-            </a:r>
-            <a:r>
-              <a:rPr b="1" sz="950">
-                <a:solidFill>
-                  <a:srgbClr val="06B6D4"/>
-                </a:solidFill>
-              </a:rPr>
-              <a:t>)</a:t>
+              <a:t>(copy_id [PK], book_id [FK], status, acquisition_date)</a:t>
             </a:r>
           </a:p>
           <a:p>
@@ -15363,27 +15413,19 @@
             <a:r>
               <a:rPr b="1" sz="950">
                 <a:solidFill>
-                  <a:srgbClr val="06B6D4"/>
+                  <a:srgbClr val="1E40AF"/>
                 </a:solidFill>
               </a:rPr>
-              <a:t>USERS (</a:t>
-            </a:r>
-            <a:r>
-              <a:rPr sz="900">
-                <a:solidFill>
-                  <a:srgbClr val="F8FAFC"/>
+              <a:t>USERS </a:t>
+            </a:r>
+            <a:r>
+              <a:rPr sz="850">
+                <a:solidFill>
+                  <a:srgbClr val="1E293B"/>
                 </a:solidFill>
                 <a:latin typeface="Consolas"/>
               </a:rPr>
-              <a:t>user_id [PK], username, password_hash, email, role, account_status</a:t>
-            </a:r>
-            <a:r>
-              <a:rPr b="1" sz="950">
-                <a:solidFill>
-                  <a:srgbClr val="06B6D4"/>
-                </a:solidFill>
-              </a:rPr>
-              <a:t>)</a:t>
+              <a:t>(user_id [PK], username, password_hash, email, role, account_status)</a:t>
             </a:r>
           </a:p>
           <a:p>
@@ -15395,27 +15437,19 @@
             <a:r>
               <a:rPr b="1" sz="950">
                 <a:solidFill>
-                  <a:srgbClr val="06B6D4"/>
+                  <a:srgbClr val="1E40AF"/>
                 </a:solidFill>
               </a:rPr>
-              <a:t>LOANS (</a:t>
-            </a:r>
-            <a:r>
-              <a:rPr sz="900">
-                <a:solidFill>
-                  <a:srgbClr val="F8FAFC"/>
+              <a:t>LOANS </a:t>
+            </a:r>
+            <a:r>
+              <a:rPr sz="850">
+                <a:solidFill>
+                  <a:srgbClr val="1E293B"/>
                 </a:solidFill>
                 <a:latin typeface="Consolas"/>
               </a:rPr>
-              <a:t>loan_id [PK], copy_id [FK], user_id [FK], issue_date, due_date, return_date, issued_by [FK]</a:t>
-            </a:r>
-            <a:r>
-              <a:rPr b="1" sz="950">
-                <a:solidFill>
-                  <a:srgbClr val="06B6D4"/>
-                </a:solidFill>
-              </a:rPr>
-              <a:t>)</a:t>
+              <a:t>(loan_id [PK], copy_id [FK], user_id [FK], issue_date, due_date, return_date, issued_by [FK])</a:t>
             </a:r>
           </a:p>
           <a:p>
@@ -15427,27 +15461,19 @@
             <a:r>
               <a:rPr b="1" sz="950">
                 <a:solidFill>
-                  <a:srgbClr val="06B6D4"/>
+                  <a:srgbClr val="1E40AF"/>
                 </a:solidFill>
               </a:rPr>
-              <a:t>LOAN_REQUESTS (</a:t>
-            </a:r>
-            <a:r>
-              <a:rPr sz="900">
-                <a:solidFill>
-                  <a:srgbClr val="F8FAFC"/>
+              <a:t>LOAN_REQUESTS </a:t>
+            </a:r>
+            <a:r>
+              <a:rPr sz="850">
+                <a:solidFill>
+                  <a:srgbClr val="1E293B"/>
                 </a:solidFill>
                 <a:latin typeface="Consolas"/>
               </a:rPr>
-              <a:t>request_id [PK], user_id [FK], book_id [FK], request_date, status, copy_id [FK]</a:t>
-            </a:r>
-            <a:r>
-              <a:rPr b="1" sz="950">
-                <a:solidFill>
-                  <a:srgbClr val="06B6D4"/>
-                </a:solidFill>
-              </a:rPr>
-              <a:t>)</a:t>
+              <a:t>(request_id [PK], user_id [FK], book_id [FK], request_date, status, copy_id [FK])</a:t>
             </a:r>
           </a:p>
           <a:p>
@@ -15459,27 +15485,19 @@
             <a:r>
               <a:rPr b="1" sz="950">
                 <a:solidFill>
-                  <a:srgbClr val="06B6D4"/>
+                  <a:srgbClr val="1E40AF"/>
                 </a:solidFill>
               </a:rPr>
-              <a:t>FINES (</a:t>
-            </a:r>
-            <a:r>
-              <a:rPr sz="900">
-                <a:solidFill>
-                  <a:srgbClr val="F8FAFC"/>
+              <a:t>FINES </a:t>
+            </a:r>
+            <a:r>
+              <a:rPr sz="850">
+                <a:solidFill>
+                  <a:srgbClr val="1E293B"/>
                 </a:solidFill>
                 <a:latin typeface="Consolas"/>
               </a:rPr>
-              <a:t>fine_id [PK], loan_id [FK], fine_amount, payment_status, payment_date, collected_by [FK]</a:t>
-            </a:r>
-            <a:r>
-              <a:rPr b="1" sz="950">
-                <a:solidFill>
-                  <a:srgbClr val="06B6D4"/>
-                </a:solidFill>
-              </a:rPr>
-              <a:t>)</a:t>
+              <a:t>(fine_id [PK], loan_id [FK], fine_amount, payment_status, payment_date, collected_by [FK])</a:t>
             </a:r>
           </a:p>
         </p:txBody>
@@ -15492,18 +15510,18 @@
         </p:nvSpPr>
         <p:spPr>
           <a:xfrm>
-            <a:off x="7315200" y="1554480"/>
-            <a:ext cx="4144975" cy="4846320"/>
+            <a:off x="7315200" y="1371600"/>
+            <a:ext cx="4144975" cy="4937760"/>
           </a:xfrm>
           <a:prstGeom prst="roundRect">
             <a:avLst/>
           </a:prstGeom>
           <a:solidFill>
-            <a:srgbClr val="161E31"/>
+            <a:srgbClr val="FFFFFF"/>
           </a:solidFill>
           <a:ln w="12700">
             <a:solidFill>
-              <a:srgbClr val="2D3C5A"/>
+              <a:srgbClr val="CBD5E1"/>
             </a:solidFill>
           </a:ln>
         </p:spPr>
@@ -15537,8 +15555,8 @@
         </p:nvSpPr>
         <p:spPr>
           <a:xfrm>
-            <a:off x="7498079" y="1691640"/>
-            <a:ext cx="3779215" cy="4480560"/>
+            <a:off x="7498079" y="1508760"/>
+            <a:ext cx="3779215" cy="4663440"/>
           </a:xfrm>
           <a:prstGeom prst="rect">
             <a:avLst/>
@@ -15554,12 +15572,12 @@
             <a:pPr>
               <a:defRPr b="1" sz="1200">
                 <a:solidFill>
-                  <a:srgbClr val="10B981"/>
-                </a:solidFill>
-              </a:defRPr>
-            </a:pPr>
-            <a:r>
-              <a:t>NORMALIZATION JUSTIFICATION</a:t>
+                  <a:srgbClr val="0F2547"/>
+                </a:solidFill>
+              </a:defRPr>
+            </a:pPr>
+            <a:r>
+              <a:t>NORMALIZATION DECOMPOSITION</a:t>
             </a:r>
           </a:p>
           <a:p>
@@ -15571,19 +15589,19 @@
             <a:r>
               <a:rPr b="1" sz="1000">
                 <a:solidFill>
-                  <a:srgbClr val="F8FAFC"/>
+                  <a:srgbClr val="1E293B"/>
                 </a:solidFill>
               </a:rPr>
-              <a:t>First Normal Form (1NF)
+              <a:t>1NF (First Normal Form)
 </a:t>
             </a:r>
             <a:r>
               <a:rPr sz="900">
                 <a:solidFill>
-                  <a:srgbClr val="94A3B8"/>
+                  <a:srgbClr val="475569"/>
                 </a:solidFill>
               </a:rPr>
-              <a:t>All attributes contain atomic, indivisible values. Multivalued authors and inventory copies are split into distinct relational tables.</a:t>
+              <a:t>All table attributes contain atomic values. Repeated author and copy collections are separated into distinct tables.</a:t>
             </a:r>
           </a:p>
           <a:p>
@@ -15595,19 +15613,19 @@
             <a:r>
               <a:rPr b="1" sz="1000">
                 <a:solidFill>
-                  <a:srgbClr val="F8FAFC"/>
+                  <a:srgbClr val="1E293B"/>
                 </a:solidFill>
               </a:rPr>
-              <a:t>Second Normal Form (2NF)
+              <a:t>2NF (Second Normal Form)
 </a:t>
             </a:r>
             <a:r>
               <a:rPr sz="900">
                 <a:solidFill>
-                  <a:srgbClr val="94A3B8"/>
+                  <a:srgbClr val="475569"/>
                 </a:solidFill>
               </a:rPr>
-              <a:t>No partial functional dependencies exist. In BOOK_AUTHORS, composite key {book_id, author_id} determines full relationship membership.</a:t>
+              <a:t>Eliminated all partial key dependencies. In BOOK_AUTHORS, the composite key {book_id, author_id} determines full relationship status.</a:t>
             </a:r>
           </a:p>
           <a:p>
@@ -15619,19 +15637,19 @@
             <a:r>
               <a:rPr b="1" sz="1000">
                 <a:solidFill>
-                  <a:srgbClr val="F8FAFC"/>
+                  <a:srgbClr val="1E293B"/>
                 </a:solidFill>
               </a:rPr>
-              <a:t>Third Normal Form (3NF)
+              <a:t>3NF (Third Normal Form)
 </a:t>
             </a:r>
             <a:r>
               <a:rPr sz="900">
                 <a:solidFill>
-                  <a:srgbClr val="94A3B8"/>
+                  <a:srgbClr val="475569"/>
                 </a:solidFill>
               </a:rPr>
-              <a:t>Eliminated all transitive dependencies (e.g. category_name determined solely by category_id, not by book_id).</a:t>
+              <a:t>Eliminated all transitive functional dependencies (e.g., category_name is determined exclusively by category_id, not transitively by book_id).</a:t>
             </a:r>
           </a:p>
           <a:p>
@@ -15643,19 +15661,19 @@
             <a:r>
               <a:rPr b="1" sz="1000">
                 <a:solidFill>
-                  <a:srgbClr val="F8FAFC"/>
+                  <a:srgbClr val="1E293B"/>
                 </a:solidFill>
               </a:rPr>
-              <a:t>Boyce-Codd Normal Form (BCNF)
+              <a:t>BCNF (Boyce-Codd Normal Form)
 </a:t>
             </a:r>
             <a:r>
               <a:rPr sz="900">
                 <a:solidFill>
-                  <a:srgbClr val="94A3B8"/>
+                  <a:srgbClr val="475569"/>
                 </a:solidFill>
               </a:rPr>
-              <a:t>Every functional dependency X -&gt; Y has X as a candidate key. Prevents update, insertion, and deletion anomalies across loan lifecycles.</a:t>
+              <a:t>Every determinant is a candidate key. Protects against update, insertion, and deletion anomalies across the loan lifecycle.</a:t>
             </a:r>
           </a:p>
         </p:txBody>
@@ -15693,7 +15711,7 @@
             <a:avLst/>
           </a:prstGeom>
           <a:solidFill>
-            <a:srgbClr val="0B0F19"/>
+            <a:srgbClr val="F8FAFC"/>
           </a:solidFill>
           <a:ln>
             <a:noFill/>
@@ -15729,14 +15747,14 @@
         </p:nvSpPr>
         <p:spPr>
           <a:xfrm>
-            <a:off x="731520" y="365760"/>
-            <a:ext cx="10728655" cy="36576"/>
+            <a:off x="0" y="0"/>
+            <a:ext cx="12191695" cy="73152"/>
           </a:xfrm>
           <a:prstGeom prst="rect">
             <a:avLst/>
           </a:prstGeom>
           <a:solidFill>
-            <a:srgbClr val="3B82F6"/>
+            <a:srgbClr val="1E40AF"/>
           </a:solidFill>
           <a:ln>
             <a:noFill/>
@@ -15772,8 +15790,8 @@
         </p:nvSpPr>
         <p:spPr>
           <a:xfrm>
-            <a:off x="731520" y="502920"/>
-            <a:ext cx="7315200" cy="274320"/>
+            <a:off x="731520" y="320040"/>
+            <a:ext cx="7772400" cy="256032"/>
           </a:xfrm>
           <a:prstGeom prst="rect">
             <a:avLst/>
@@ -15789,7 +15807,7 @@
             <a:pPr>
               <a:defRPr sz="1000" b="1">
                 <a:solidFill>
-                  <a:srgbClr val="06B6D4"/>
+                  <a:srgbClr val="1E40AF"/>
                 </a:solidFill>
                 <a:latin typeface="Segoe UI"/>
               </a:defRPr>
@@ -15808,7 +15826,7 @@
         </p:nvSpPr>
         <p:spPr>
           <a:xfrm>
-            <a:off x="731520" y="777240"/>
+            <a:off x="731520" y="594360"/>
             <a:ext cx="9601200" cy="548640"/>
           </a:xfrm>
           <a:prstGeom prst="rect">
@@ -15823,15 +15841,15 @@
           <a:lstStyle/>
           <a:p>
             <a:pPr>
-              <a:defRPr sz="2200" b="1">
-                <a:solidFill>
-                  <a:srgbClr val="F8FAFC"/>
+              <a:defRPr sz="2100" b="1">
+                <a:solidFill>
+                  <a:srgbClr val="0F2547"/>
                 </a:solidFill>
                 <a:latin typeface="Segoe UI"/>
               </a:defRPr>
             </a:pPr>
             <a:r>
-              <a:t>Table Creation &amp; Comprehensive Integrity Constraints</a:t>
+              <a:t>Table Creation &amp; Comprehensive Integrity Constraints (DDL)</a:t>
             </a:r>
           </a:p>
         </p:txBody>
@@ -15844,7 +15862,7 @@
         </p:nvSpPr>
         <p:spPr>
           <a:xfrm>
-            <a:off x="10515600" y="640080"/>
+            <a:off x="10515600" y="411480"/>
             <a:ext cx="914400" cy="365760"/>
           </a:xfrm>
           <a:prstGeom prst="rect">
@@ -15861,9 +15879,9 @@
             <a:pPr algn="r">
               <a:defRPr sz="1100" b="1">
                 <a:solidFill>
-                  <a:srgbClr val="64748B"/>
-                </a:solidFill>
-                <a:latin typeface="Consolas"/>
+                  <a:srgbClr val="475569"/>
+                </a:solidFill>
+                <a:latin typeface="Segoe UI"/>
               </a:defRPr>
             </a:pPr>
             <a:r>
@@ -15880,18 +15898,18 @@
         </p:nvSpPr>
         <p:spPr>
           <a:xfrm>
-            <a:off x="731520" y="1554480"/>
-            <a:ext cx="6217920" cy="4846320"/>
+            <a:off x="731520" y="1371600"/>
+            <a:ext cx="6217920" cy="4937760"/>
           </a:xfrm>
           <a:prstGeom prst="roundRect">
             <a:avLst/>
           </a:prstGeom>
           <a:solidFill>
-            <a:srgbClr val="0F172A"/>
+            <a:srgbClr val="F1F5F9"/>
           </a:solidFill>
           <a:ln w="12700">
             <a:solidFill>
-              <a:srgbClr val="2D3C5A"/>
+              <a:srgbClr val="CBD5E1"/>
             </a:solidFill>
           </a:ln>
         </p:spPr>
@@ -15925,8 +15943,8 @@
         </p:nvSpPr>
         <p:spPr>
           <a:xfrm>
-            <a:off x="914400" y="1691640"/>
-            <a:ext cx="5852160" cy="4480560"/>
+            <a:off x="914400" y="1508760"/>
+            <a:ext cx="5852160" cy="4663440"/>
           </a:xfrm>
           <a:prstGeom prst="rect">
             <a:avLst/>
@@ -15942,13 +15960,13 @@
             <a:pPr>
               <a:defRPr sz="850">
                 <a:solidFill>
-                  <a:srgbClr val="A5F3FC"/>
+                  <a:srgbClr val="0F172A"/>
                 </a:solidFill>
                 <a:latin typeface="Consolas"/>
               </a:defRPr>
             </a:pPr>
             <a:r>
-              <a:t>-- Comprehensive Constraints in Oracle DDL</a:t>
+              <a:t>-- Table Creation with Integrity Constraints (Oracle SQL)</a:t>
             </a:r>
             <a:br/>
             <a:r>
@@ -16063,18 +16081,18 @@
         </p:nvSpPr>
         <p:spPr>
           <a:xfrm>
-            <a:off x="7132320" y="1554480"/>
-            <a:ext cx="4327855" cy="4846320"/>
+            <a:off x="7132320" y="1371600"/>
+            <a:ext cx="4327855" cy="4937760"/>
           </a:xfrm>
           <a:prstGeom prst="roundRect">
             <a:avLst/>
           </a:prstGeom>
           <a:solidFill>
-            <a:srgbClr val="161E31"/>
+            <a:srgbClr val="FFFFFF"/>
           </a:solidFill>
           <a:ln w="12700">
             <a:solidFill>
-              <a:srgbClr val="2D3C5A"/>
+              <a:srgbClr val="CBD5E1"/>
             </a:solidFill>
           </a:ln>
         </p:spPr>
@@ -16108,8 +16126,8 @@
         </p:nvSpPr>
         <p:spPr>
           <a:xfrm>
-            <a:off x="7315200" y="1691640"/>
-            <a:ext cx="3962095" cy="4480560"/>
+            <a:off x="7315200" y="1508760"/>
+            <a:ext cx="3962095" cy="4663440"/>
           </a:xfrm>
           <a:prstGeom prst="rect">
             <a:avLst/>
@@ -16125,7 +16143,7 @@
             <a:pPr>
               <a:defRPr b="1" sz="1200">
                 <a:solidFill>
-                  <a:srgbClr val="F59E0B"/>
+                  <a:srgbClr val="0F2547"/>
                 </a:solidFill>
               </a:defRPr>
             </a:pPr>
@@ -16142,19 +16160,19 @@
             <a:r>
               <a:rPr b="1" sz="1000">
                 <a:solidFill>
-                  <a:srgbClr val="F8FAFC"/>
+                  <a:srgbClr val="1E40AF"/>
                 </a:solidFill>
               </a:rPr>
-              <a:t>PRIMARY KEY
+              <a:t>PRIMARY KEY Constraints
 </a:t>
             </a:r>
             <a:r>
               <a:rPr sz="900">
                 <a:solidFill>
-                  <a:srgbClr val="94A3B8"/>
+                  <a:srgbClr val="475569"/>
                 </a:solidFill>
               </a:rPr>
-              <a:t>Enforces entity integrity (user_id, book_id, loan_id). Prohibits duplicate or NULL primary values.</a:t>
+              <a:t>Enforces entity integrity (user_id, book_id, loan_id). Prohibits duplicate or NULL primary records.</a:t>
             </a:r>
           </a:p>
           <a:p>
@@ -16166,7 +16184,7 @@
             <a:r>
               <a:rPr b="1" sz="1000">
                 <a:solidFill>
-                  <a:srgbClr val="F8FAFC"/>
+                  <a:srgbClr val="1E40AF"/>
                 </a:solidFill>
               </a:rPr>
               <a:t>FOREIGN KEY &amp; CASCADES
@@ -16175,10 +16193,10 @@
             <a:r>
               <a:rPr sz="900">
                 <a:solidFill>
-                  <a:srgbClr val="94A3B8"/>
+                  <a:srgbClr val="475569"/>
                 </a:solidFill>
               </a:rPr>
-              <a:t>Maintains referential integrity. Deleting a book automatically removes dependent copies (ON DELETE CASCADE), preventing dangling references.</a:t>
+              <a:t>Maintains referential integrity. Removing a book cascades to dependent copies (ON DELETE CASCADE), preventing dangling references.</a:t>
             </a:r>
           </a:p>
           <a:p>
@@ -16190,19 +16208,19 @@
             <a:r>
               <a:rPr b="1" sz="1000">
                 <a:solidFill>
-                  <a:srgbClr val="F8FAFC"/>
+                  <a:srgbClr val="1E40AF"/>
                 </a:solidFill>
               </a:rPr>
-              <a:t>CHECK CONSTRAINTS
+              <a:t>CHECK Constraints
 </a:t>
             </a:r>
             <a:r>
               <a:rPr sz="900">
                 <a:solidFill>
-                  <a:srgbClr val="94A3B8"/>
+                  <a:srgbClr val="475569"/>
                 </a:solidFill>
               </a:rPr>
-              <a:t>chk_user_role validates authorized roles; chk_copy_status prevents illegal inventory transitions; chk_loan_dates guarantees due_date &gt;= issue_date.</a:t>
+              <a:t>chk_user_role restricts accounts to authorized roles; chk_copy_status ensures valid inventory states; chk_loan_dates guarantees due_date &gt;= issue_date.</a:t>
             </a:r>
           </a:p>
           <a:p>
@@ -16214,19 +16232,19 @@
             <a:r>
               <a:rPr b="1" sz="1000">
                 <a:solidFill>
-                  <a:srgbClr val="F8FAFC"/>
+                  <a:srgbClr val="1E40AF"/>
                 </a:solidFill>
               </a:rPr>
-              <a:t>UNIQUE CONSTRAINTS
+              <a:t>UNIQUE Constraints
 </a:t>
             </a:r>
             <a:r>
               <a:rPr sz="900">
                 <a:solidFill>
-                  <a:srgbClr val="94A3B8"/>
+                  <a:srgbClr val="475569"/>
                 </a:solidFill>
               </a:rPr>
-              <a:t>Guarantees uniqueness across ISBN, username, and institutional email addresses.</a:t>
+              <a:t>Prevents duplicate ISBN registrations, identical usernames, and duplicate institutional email addresses.</a:t>
             </a:r>
           </a:p>
           <a:p>
@@ -16238,19 +16256,19 @@
             <a:r>
               <a:rPr b="1" sz="1000">
                 <a:solidFill>
-                  <a:srgbClr val="F8FAFC"/>
+                  <a:srgbClr val="1E40AF"/>
                 </a:solidFill>
               </a:rPr>
-              <a:t>DEFAULT &amp; NOT NULL
+              <a:t>NOT NULL &amp; DEFAULT
 </a:t>
             </a:r>
             <a:r>
               <a:rPr sz="900">
                 <a:solidFill>
-                  <a:srgbClr val="94A3B8"/>
+                  <a:srgbClr val="475569"/>
                 </a:solidFill>
               </a:rPr>
-              <a:t>Enforces required metadata and sets default values ('Active' account, 'Available' status, 'Unpaid' fine).</a:t>
+              <a:t>Mandates critical metadata (password_hash, email) while initializing default statuses ('Available', 'Active', 'Unpaid').</a:t>
             </a:r>
           </a:p>
         </p:txBody>
@@ -16288,7 +16306,7 @@
             <a:avLst/>
           </a:prstGeom>
           <a:solidFill>
-            <a:srgbClr val="0B0F19"/>
+            <a:srgbClr val="F8FAFC"/>
           </a:solidFill>
           <a:ln>
             <a:noFill/>
@@ -16324,14 +16342,14 @@
         </p:nvSpPr>
         <p:spPr>
           <a:xfrm>
-            <a:off x="731520" y="365760"/>
-            <a:ext cx="10728655" cy="36576"/>
+            <a:off x="0" y="0"/>
+            <a:ext cx="12191695" cy="73152"/>
           </a:xfrm>
           <a:prstGeom prst="rect">
             <a:avLst/>
           </a:prstGeom>
           <a:solidFill>
-            <a:srgbClr val="3B82F6"/>
+            <a:srgbClr val="1E40AF"/>
           </a:solidFill>
           <a:ln>
             <a:noFill/>
@@ -16367,8 +16385,8 @@
         </p:nvSpPr>
         <p:spPr>
           <a:xfrm>
-            <a:off x="731520" y="502920"/>
-            <a:ext cx="7315200" cy="274320"/>
+            <a:off x="731520" y="320040"/>
+            <a:ext cx="7772400" cy="256032"/>
           </a:xfrm>
           <a:prstGeom prst="rect">
             <a:avLst/>
@@ -16384,7 +16402,7 @@
             <a:pPr>
               <a:defRPr sz="1000" b="1">
                 <a:solidFill>
-                  <a:srgbClr val="06B6D4"/>
+                  <a:srgbClr val="1E40AF"/>
                 </a:solidFill>
                 <a:latin typeface="Segoe UI"/>
               </a:defRPr>
@@ -16403,7 +16421,7 @@
         </p:nvSpPr>
         <p:spPr>
           <a:xfrm>
-            <a:off x="731520" y="777240"/>
+            <a:off x="731520" y="594360"/>
             <a:ext cx="9601200" cy="548640"/>
           </a:xfrm>
           <a:prstGeom prst="rect">
@@ -16418,9 +16436,9 @@
           <a:lstStyle/>
           <a:p>
             <a:pPr>
-              <a:defRPr sz="2200" b="1">
-                <a:solidFill>
-                  <a:srgbClr val="F8FAFC"/>
+              <a:defRPr sz="2100" b="1">
+                <a:solidFill>
+                  <a:srgbClr val="0F2547"/>
                 </a:solidFill>
                 <a:latin typeface="Segoe UI"/>
               </a:defRPr>
@@ -16439,7 +16457,7 @@
         </p:nvSpPr>
         <p:spPr>
           <a:xfrm>
-            <a:off x="10515600" y="640080"/>
+            <a:off x="10515600" y="411480"/>
             <a:ext cx="914400" cy="365760"/>
           </a:xfrm>
           <a:prstGeom prst="rect">
@@ -16456,9 +16474,9 @@
             <a:pPr algn="r">
               <a:defRPr sz="1100" b="1">
                 <a:solidFill>
-                  <a:srgbClr val="64748B"/>
-                </a:solidFill>
-                <a:latin typeface="Consolas"/>
+                  <a:srgbClr val="475569"/>
+                </a:solidFill>
+                <a:latin typeface="Segoe UI"/>
               </a:defRPr>
             </a:pPr>
             <a:r>
@@ -16475,18 +16493,18 @@
         </p:nvSpPr>
         <p:spPr>
           <a:xfrm>
-            <a:off x="731520" y="1554480"/>
+            <a:off x="731520" y="1371600"/>
             <a:ext cx="10728655" cy="2377440"/>
           </a:xfrm>
           <a:prstGeom prst="roundRect">
             <a:avLst/>
           </a:prstGeom>
           <a:solidFill>
-            <a:srgbClr val="161E31"/>
+            <a:srgbClr val="FFFFFF"/>
           </a:solidFill>
           <a:ln w="12700">
             <a:solidFill>
-              <a:srgbClr val="2D3C5A"/>
+              <a:srgbClr val="CBD5E1"/>
             </a:solidFill>
           </a:ln>
         </p:spPr>
@@ -16520,8 +16538,8 @@
         </p:nvSpPr>
         <p:spPr>
           <a:xfrm>
-            <a:off x="914400" y="1645920"/>
-            <a:ext cx="10362895" cy="2103120"/>
+            <a:off x="914400" y="1463040"/>
+            <a:ext cx="10362895" cy="365760"/>
           </a:xfrm>
           <a:prstGeom prst="rect">
             <a:avLst/>
@@ -16529,7 +16547,7 @@
           <a:noFill/>
         </p:spPr>
         <p:txBody>
-          <a:bodyPr wrap="square">
+          <a:bodyPr wrap="none">
             <a:spAutoFit/>
           </a:bodyPr>
           <a:lstStyle/>
@@ -16537,7 +16555,7 @@
             <a:pPr>
               <a:defRPr b="1" sz="1100">
                 <a:solidFill>
-                  <a:srgbClr val="10B981"/>
+                  <a:srgbClr val="0F2547"/>
                 </a:solidFill>
               </a:defRPr>
             </a:pPr>
@@ -16556,7 +16574,7 @@
           <p:nvPr/>
         </p:nvGraphicFramePr>
         <p:xfrm>
-          <a:off x="914400" y="1920240"/>
+          <a:off x="914400" y="1783080"/>
           <a:ext cx="10362895" cy="1828800"/>
         </p:xfrm>
         <a:graphic>
@@ -16566,12 +16584,12 @@
                 <a:tableStyleId>{5C22544A-7EE6-4342-B048-85BDC9FD1C3A}</a:tableStyleId>
               </a:tblPr>
               <a:tblGrid>
-                <a:gridCol w="1097280"/>
-                <a:gridCol w="2194560"/>
-                <a:gridCol w="1828800"/>
+                <a:gridCol w="1188720"/>
+                <a:gridCol w="2103120"/>
+                <a:gridCol w="2011680"/>
                 <a:gridCol w="1645920"/>
                 <a:gridCol w="1828800"/>
-                <a:gridCol w="1767535"/>
+                <a:gridCol w="1584655"/>
               </a:tblGrid>
               <a:tr h="457200">
                 <a:tc>
@@ -16582,7 +16600,7 @@
                       <a:pPr>
                         <a:defRPr b="1" sz="950">
                           <a:solidFill>
-                            <a:srgbClr val="06B6D4"/>
+                            <a:srgbClr val="FFFFFF"/>
                           </a:solidFill>
                         </a:defRPr>
                       </a:pPr>
@@ -16593,7 +16611,7 @@
                   </a:txBody>
                   <a:tcPr>
                     <a:solidFill>
-                      <a:srgbClr val="1E293B"/>
+                      <a:srgbClr val="0F2547"/>
                     </a:solidFill>
                   </a:tcPr>
                 </a:tc>
@@ -16605,7 +16623,7 @@
                       <a:pPr>
                         <a:defRPr b="1" sz="950">
                           <a:solidFill>
-                            <a:srgbClr val="06B6D4"/>
+                            <a:srgbClr val="FFFFFF"/>
                           </a:solidFill>
                         </a:defRPr>
                       </a:pPr>
@@ -16616,7 +16634,7 @@
                   </a:txBody>
                   <a:tcPr>
                     <a:solidFill>
-                      <a:srgbClr val="1E293B"/>
+                      <a:srgbClr val="0F2547"/>
                     </a:solidFill>
                   </a:tcPr>
                 </a:tc>
@@ -16628,7 +16646,7 @@
                       <a:pPr>
                         <a:defRPr b="1" sz="950">
                           <a:solidFill>
-                            <a:srgbClr val="06B6D4"/>
+                            <a:srgbClr val="FFFFFF"/>
                           </a:solidFill>
                         </a:defRPr>
                       </a:pPr>
@@ -16639,7 +16657,7 @@
                   </a:txBody>
                   <a:tcPr>
                     <a:solidFill>
-                      <a:srgbClr val="1E293B"/>
+                      <a:srgbClr val="0F2547"/>
                     </a:solidFill>
                   </a:tcPr>
                 </a:tc>
@@ -16651,7 +16669,7 @@
                       <a:pPr>
                         <a:defRPr b="1" sz="950">
                           <a:solidFill>
-                            <a:srgbClr val="06B6D4"/>
+                            <a:srgbClr val="FFFFFF"/>
                           </a:solidFill>
                         </a:defRPr>
                       </a:pPr>
@@ -16662,7 +16680,7 @@
                   </a:txBody>
                   <a:tcPr>
                     <a:solidFill>
-                      <a:srgbClr val="1E293B"/>
+                      <a:srgbClr val="0F2547"/>
                     </a:solidFill>
                   </a:tcPr>
                 </a:tc>
@@ -16674,7 +16692,7 @@
                       <a:pPr>
                         <a:defRPr b="1" sz="950">
                           <a:solidFill>
-                            <a:srgbClr val="06B6D4"/>
+                            <a:srgbClr val="FFFFFF"/>
                           </a:solidFill>
                         </a:defRPr>
                       </a:pPr>
@@ -16685,7 +16703,7 @@
                   </a:txBody>
                   <a:tcPr>
                     <a:solidFill>
-                      <a:srgbClr val="1E293B"/>
+                      <a:srgbClr val="0F2547"/>
                     </a:solidFill>
                   </a:tcPr>
                 </a:tc>
@@ -16697,7 +16715,7 @@
                       <a:pPr>
                         <a:defRPr b="1" sz="950">
                           <a:solidFill>
-                            <a:srgbClr val="06B6D4"/>
+                            <a:srgbClr val="FFFFFF"/>
                           </a:solidFill>
                         </a:defRPr>
                       </a:pPr>
@@ -16708,7 +16726,7 @@
                   </a:txBody>
                   <a:tcPr>
                     <a:solidFill>
-                      <a:srgbClr val="1E293B"/>
+                      <a:srgbClr val="0F2547"/>
                     </a:solidFill>
                   </a:tcPr>
                 </a:tc>
@@ -16722,7 +16740,7 @@
                       <a:pPr>
                         <a:defRPr sz="900">
                           <a:solidFill>
-                            <a:srgbClr val="F8FAFC"/>
+                            <a:srgbClr val="1E293B"/>
                           </a:solidFill>
                         </a:defRPr>
                       </a:pPr>
@@ -16733,7 +16751,7 @@
                   </a:txBody>
                   <a:tcPr>
                     <a:solidFill>
-                      <a:srgbClr val="121A2B"/>
+                      <a:srgbClr val="FFFFFF"/>
                     </a:solidFill>
                   </a:tcPr>
                 </a:tc>
@@ -16745,7 +16763,7 @@
                       <a:pPr>
                         <a:defRPr sz="900">
                           <a:solidFill>
-                            <a:srgbClr val="F8FAFC"/>
+                            <a:srgbClr val="1E293B"/>
                           </a:solidFill>
                         </a:defRPr>
                       </a:pPr>
@@ -16756,7 +16774,7 @@
                   </a:txBody>
                   <a:tcPr>
                     <a:solidFill>
-                      <a:srgbClr val="121A2B"/>
+                      <a:srgbClr val="FFFFFF"/>
                     </a:solidFill>
                   </a:tcPr>
                 </a:tc>
@@ -16768,7 +16786,7 @@
                       <a:pPr>
                         <a:defRPr sz="900">
                           <a:solidFill>
-                            <a:srgbClr val="F8FAFC"/>
+                            <a:srgbClr val="1E293B"/>
                           </a:solidFill>
                         </a:defRPr>
                       </a:pPr>
@@ -16779,7 +16797,7 @@
                   </a:txBody>
                   <a:tcPr>
                     <a:solidFill>
-                      <a:srgbClr val="121A2B"/>
+                      <a:srgbClr val="FFFFFF"/>
                     </a:solidFill>
                   </a:tcPr>
                 </a:tc>
@@ -16791,7 +16809,7 @@
                       <a:pPr>
                         <a:defRPr sz="900">
                           <a:solidFill>
-                            <a:srgbClr val="F8FAFC"/>
+                            <a:srgbClr val="1E293B"/>
                           </a:solidFill>
                         </a:defRPr>
                       </a:pPr>
@@ -16802,7 +16820,7 @@
                   </a:txBody>
                   <a:tcPr>
                     <a:solidFill>
-                      <a:srgbClr val="121A2B"/>
+                      <a:srgbClr val="FFFFFF"/>
                     </a:solidFill>
                   </a:tcPr>
                 </a:tc>
@@ -16814,7 +16832,7 @@
                       <a:pPr>
                         <a:defRPr sz="900">
                           <a:solidFill>
-                            <a:srgbClr val="F8FAFC"/>
+                            <a:srgbClr val="1E293B"/>
                           </a:solidFill>
                         </a:defRPr>
                       </a:pPr>
@@ -16825,7 +16843,7 @@
                   </a:txBody>
                   <a:tcPr>
                     <a:solidFill>
-                      <a:srgbClr val="121A2B"/>
+                      <a:srgbClr val="FFFFFF"/>
                     </a:solidFill>
                   </a:tcPr>
                 </a:tc>
@@ -16837,7 +16855,7 @@
                       <a:pPr>
                         <a:defRPr sz="900">
                           <a:solidFill>
-                            <a:srgbClr val="F8FAFC"/>
+                            <a:srgbClr val="1E293B"/>
                           </a:solidFill>
                         </a:defRPr>
                       </a:pPr>
@@ -16848,7 +16866,7 @@
                   </a:txBody>
                   <a:tcPr>
                     <a:solidFill>
-                      <a:srgbClr val="121A2B"/>
+                      <a:srgbClr val="FFFFFF"/>
                     </a:solidFill>
                   </a:tcPr>
                 </a:tc>
@@ -16862,7 +16880,7 @@
                       <a:pPr>
                         <a:defRPr sz="900">
                           <a:solidFill>
-                            <a:srgbClr val="F8FAFC"/>
+                            <a:srgbClr val="1E293B"/>
                           </a:solidFill>
                         </a:defRPr>
                       </a:pPr>
@@ -16873,7 +16891,7 @@
                   </a:txBody>
                   <a:tcPr>
                     <a:solidFill>
-                      <a:srgbClr val="0E1422"/>
+                      <a:srgbClr val="F1F5F9"/>
                     </a:solidFill>
                   </a:tcPr>
                 </a:tc>
@@ -16885,7 +16903,7 @@
                       <a:pPr>
                         <a:defRPr sz="900">
                           <a:solidFill>
-                            <a:srgbClr val="F8FAFC"/>
+                            <a:srgbClr val="1E293B"/>
                           </a:solidFill>
                         </a:defRPr>
                       </a:pPr>
@@ -16896,7 +16914,7 @@
                   </a:txBody>
                   <a:tcPr>
                     <a:solidFill>
-                      <a:srgbClr val="0E1422"/>
+                      <a:srgbClr val="F1F5F9"/>
                     </a:solidFill>
                   </a:tcPr>
                 </a:tc>
@@ -16908,7 +16926,7 @@
                       <a:pPr>
                         <a:defRPr sz="900">
                           <a:solidFill>
-                            <a:srgbClr val="F8FAFC"/>
+                            <a:srgbClr val="1E293B"/>
                           </a:solidFill>
                         </a:defRPr>
                       </a:pPr>
@@ -16919,7 +16937,7 @@
                   </a:txBody>
                   <a:tcPr>
                     <a:solidFill>
-                      <a:srgbClr val="0E1422"/>
+                      <a:srgbClr val="F1F5F9"/>
                     </a:solidFill>
                   </a:tcPr>
                 </a:tc>
@@ -16931,7 +16949,7 @@
                       <a:pPr>
                         <a:defRPr sz="900">
                           <a:solidFill>
-                            <a:srgbClr val="F8FAFC"/>
+                            <a:srgbClr val="1E293B"/>
                           </a:solidFill>
                         </a:defRPr>
                       </a:pPr>
@@ -16942,7 +16960,7 @@
                   </a:txBody>
                   <a:tcPr>
                     <a:solidFill>
-                      <a:srgbClr val="0E1422"/>
+                      <a:srgbClr val="F1F5F9"/>
                     </a:solidFill>
                   </a:tcPr>
                 </a:tc>
@@ -16954,7 +16972,7 @@
                       <a:pPr>
                         <a:defRPr sz="900">
                           <a:solidFill>
-                            <a:srgbClr val="F8FAFC"/>
+                            <a:srgbClr val="1E293B"/>
                           </a:solidFill>
                         </a:defRPr>
                       </a:pPr>
@@ -16965,7 +16983,7 @@
                   </a:txBody>
                   <a:tcPr>
                     <a:solidFill>
-                      <a:srgbClr val="0E1422"/>
+                      <a:srgbClr val="F1F5F9"/>
                     </a:solidFill>
                   </a:tcPr>
                 </a:tc>
@@ -16977,7 +16995,7 @@
                       <a:pPr>
                         <a:defRPr sz="900">
                           <a:solidFill>
-                            <a:srgbClr val="F8FAFC"/>
+                            <a:srgbClr val="1E293B"/>
                           </a:solidFill>
                         </a:defRPr>
                       </a:pPr>
@@ -16988,7 +17006,7 @@
                   </a:txBody>
                   <a:tcPr>
                     <a:solidFill>
-                      <a:srgbClr val="0E1422"/>
+                      <a:srgbClr val="F1F5F9"/>
                     </a:solidFill>
                   </a:tcPr>
                 </a:tc>
@@ -17002,7 +17020,7 @@
                       <a:pPr>
                         <a:defRPr sz="900">
                           <a:solidFill>
-                            <a:srgbClr val="F8FAFC"/>
+                            <a:srgbClr val="1E293B"/>
                           </a:solidFill>
                         </a:defRPr>
                       </a:pPr>
@@ -17013,7 +17031,7 @@
                   </a:txBody>
                   <a:tcPr>
                     <a:solidFill>
-                      <a:srgbClr val="121A2B"/>
+                      <a:srgbClr val="FFFFFF"/>
                     </a:solidFill>
                   </a:tcPr>
                 </a:tc>
@@ -17025,7 +17043,7 @@
                       <a:pPr>
                         <a:defRPr sz="900">
                           <a:solidFill>
-                            <a:srgbClr val="F8FAFC"/>
+                            <a:srgbClr val="1E293B"/>
                           </a:solidFill>
                         </a:defRPr>
                       </a:pPr>
@@ -17036,7 +17054,7 @@
                   </a:txBody>
                   <a:tcPr>
                     <a:solidFill>
-                      <a:srgbClr val="121A2B"/>
+                      <a:srgbClr val="FFFFFF"/>
                     </a:solidFill>
                   </a:tcPr>
                 </a:tc>
@@ -17048,7 +17066,7 @@
                       <a:pPr>
                         <a:defRPr sz="900">
                           <a:solidFill>
-                            <a:srgbClr val="F8FAFC"/>
+                            <a:srgbClr val="1E293B"/>
                           </a:solidFill>
                         </a:defRPr>
                       </a:pPr>
@@ -17059,7 +17077,7 @@
                   </a:txBody>
                   <a:tcPr>
                     <a:solidFill>
-                      <a:srgbClr val="121A2B"/>
+                      <a:srgbClr val="FFFFFF"/>
                     </a:solidFill>
                   </a:tcPr>
                 </a:tc>
@@ -17071,7 +17089,7 @@
                       <a:pPr>
                         <a:defRPr sz="900">
                           <a:solidFill>
-                            <a:srgbClr val="F8FAFC"/>
+                            <a:srgbClr val="1E293B"/>
                           </a:solidFill>
                         </a:defRPr>
                       </a:pPr>
@@ -17082,7 +17100,7 @@
                   </a:txBody>
                   <a:tcPr>
                     <a:solidFill>
-                      <a:srgbClr val="121A2B"/>
+                      <a:srgbClr val="FFFFFF"/>
                     </a:solidFill>
                   </a:tcPr>
                 </a:tc>
@@ -17094,7 +17112,7 @@
                       <a:pPr>
                         <a:defRPr sz="900">
                           <a:solidFill>
-                            <a:srgbClr val="F8FAFC"/>
+                            <a:srgbClr val="1E293B"/>
                           </a:solidFill>
                         </a:defRPr>
                       </a:pPr>
@@ -17105,7 +17123,7 @@
                   </a:txBody>
                   <a:tcPr>
                     <a:solidFill>
-                      <a:srgbClr val="121A2B"/>
+                      <a:srgbClr val="FFFFFF"/>
                     </a:solidFill>
                   </a:tcPr>
                 </a:tc>
@@ -17117,7 +17135,7 @@
                       <a:pPr>
                         <a:defRPr sz="900">
                           <a:solidFill>
-                            <a:srgbClr val="F8FAFC"/>
+                            <a:srgbClr val="1E293B"/>
                           </a:solidFill>
                         </a:defRPr>
                       </a:pPr>
@@ -17128,7 +17146,7 @@
                   </a:txBody>
                   <a:tcPr>
                     <a:solidFill>
-                      <a:srgbClr val="121A2B"/>
+                      <a:srgbClr val="FFFFFF"/>
                     </a:solidFill>
                   </a:tcPr>
                 </a:tc>
@@ -17145,18 +17163,18 @@
         </p:nvSpPr>
         <p:spPr>
           <a:xfrm>
-            <a:off x="731520" y="4114800"/>
-            <a:ext cx="5212080" cy="2286000"/>
+            <a:off x="731520" y="3977639"/>
+            <a:ext cx="5212080" cy="2331720"/>
           </a:xfrm>
           <a:prstGeom prst="roundRect">
             <a:avLst/>
           </a:prstGeom>
           <a:solidFill>
-            <a:srgbClr val="161E31"/>
+            <a:srgbClr val="FFFFFF"/>
           </a:solidFill>
           <a:ln w="12700">
             <a:solidFill>
-              <a:srgbClr val="2D3C5A"/>
+              <a:srgbClr val="CBD5E1"/>
             </a:solidFill>
           </a:ln>
         </p:spPr>
@@ -17190,8 +17208,8 @@
         </p:nvSpPr>
         <p:spPr>
           <a:xfrm>
-            <a:off x="914400" y="4206240"/>
-            <a:ext cx="4846320" cy="2011680"/>
+            <a:off x="914400" y="4114800"/>
+            <a:ext cx="4846320" cy="2057400"/>
           </a:xfrm>
           <a:prstGeom prst="rect">
             <a:avLst/>
@@ -17207,7 +17225,7 @@
             <a:pPr>
               <a:defRPr b="1" sz="1100">
                 <a:solidFill>
-                  <a:srgbClr val="3B82F6"/>
+                  <a:srgbClr val="0F2547"/>
                 </a:solidFill>
               </a:defRPr>
             </a:pPr>
@@ -17222,12 +17240,12 @@
               </a:spcBef>
               <a:defRPr sz="900">
                 <a:solidFill>
-                  <a:srgbClr val="94A3B8"/>
-                </a:solidFill>
-              </a:defRPr>
-            </a:pPr>
-            <a:r>
-              <a:t>• Foreign Key Cascade: Deleting a category safely cascades to book catalog references or rejects if active loans exist.</a:t>
+                  <a:srgbClr val="475569"/>
+                </a:solidFill>
+              </a:defRPr>
+            </a:pPr>
+            <a:r>
+              <a:t>• Foreign Key Cascading: Deleting a category safely cascades to dependent book records or blocks deletion if active loans exist.</a:t>
             </a:r>
           </a:p>
           <a:p>
@@ -17237,12 +17255,12 @@
               </a:spcBef>
               <a:defRPr sz="900">
                 <a:solidFill>
-                  <a:srgbClr val="94A3B8"/>
-                </a:solidFill>
-              </a:defRPr>
-            </a:pPr>
-            <a:r>
-              <a:t>• Copy Status Synchronization: Physical copy status is automatically flipped to 'Borrowed' upon loan issue and 'Available' upon check-in.</a:t>
+                  <a:srgbClr val="475569"/>
+                </a:solidFill>
+              </a:defRPr>
+            </a:pPr>
+            <a:r>
+              <a:t>• Copy Status Synchronization: Physical copies transition automatically to 'Borrowed' upon loan issue and 'Available' upon check-in.</a:t>
             </a:r>
           </a:p>
           <a:p>
@@ -17252,12 +17270,12 @@
               </a:spcBef>
               <a:defRPr sz="900">
                 <a:solidFill>
-                  <a:srgbClr val="94A3B8"/>
-                </a:solidFill>
-              </a:defRPr>
-            </a:pPr>
-            <a:r>
-              <a:t>• Loan Anonymization on User Removal: Returning loans anonymize borrower references (user_id = 0) to preserve institutional statistical ledgers.</a:t>
+                  <a:srgbClr val="475569"/>
+                </a:solidFill>
+              </a:defRPr>
+            </a:pPr>
+            <a:r>
+              <a:t>• Borrower Anonymization on Account Deletion: Historical loans retain record integrity (borrower_id = 0) to maintain statistical ledgers.</a:t>
             </a:r>
           </a:p>
         </p:txBody>
@@ -17270,18 +17288,18 @@
         </p:nvSpPr>
         <p:spPr>
           <a:xfrm>
-            <a:off x="6217920" y="4114800"/>
-            <a:ext cx="5242255" cy="2286000"/>
+            <a:off x="6217920" y="3977639"/>
+            <a:ext cx="5242255" cy="2331720"/>
           </a:xfrm>
           <a:prstGeom prst="roundRect">
             <a:avLst/>
           </a:prstGeom>
           <a:solidFill>
-            <a:srgbClr val="161E31"/>
+            <a:srgbClr val="FFFFFF"/>
           </a:solidFill>
           <a:ln w="12700">
             <a:solidFill>
-              <a:srgbClr val="2D3C5A"/>
+              <a:srgbClr val="CBD5E1"/>
             </a:solidFill>
           </a:ln>
         </p:spPr>
@@ -17315,8 +17333,8 @@
         </p:nvSpPr>
         <p:spPr>
           <a:xfrm>
-            <a:off x="6400800" y="4206240"/>
-            <a:ext cx="4846320" cy="2011680"/>
+            <a:off x="6400800" y="4114800"/>
+            <a:ext cx="4846320" cy="2057400"/>
           </a:xfrm>
           <a:prstGeom prst="rect">
             <a:avLst/>
@@ -17332,7 +17350,7 @@
             <a:pPr>
               <a:defRPr b="1" sz="1100">
                 <a:solidFill>
-                  <a:srgbClr val="F43F5E"/>
+                  <a:srgbClr val="0F2547"/>
                 </a:solidFill>
               </a:defRPr>
             </a:pPr>
@@ -17347,12 +17365,12 @@
               </a:spcBef>
               <a:defRPr sz="900">
                 <a:solidFill>
-                  <a:srgbClr val="94A3B8"/>
-                </a:solidFill>
-              </a:defRPr>
-            </a:pPr>
-            <a:r>
-              <a:t>• Duplicate ISBN Rejection: ORA-00001 unique constraint violated if an existing ISBN is registered again.</a:t>
+                  <a:srgbClr val="475569"/>
+                </a:solidFill>
+              </a:defRPr>
+            </a:pPr>
+            <a:r>
+              <a:t>• Duplicate ISBN Rejection: ORA-00001 unique constraint violation raised when attempting to re-register an existing ISBN.</a:t>
             </a:r>
           </a:p>
           <a:p>
@@ -17362,12 +17380,12 @@
               </a:spcBef>
               <a:defRPr sz="900">
                 <a:solidFill>
-                  <a:srgbClr val="94A3B8"/>
-                </a:solidFill>
-              </a:defRPr>
-            </a:pPr>
-            <a:r>
-              <a:t>• Borrowing Quota Rejection: PL/SQL Trigger and Flask middleware reject 4th borrowing attempt with 'Quota Limit Reached'.</a:t>
+                  <a:srgbClr val="475569"/>
+                </a:solidFill>
+              </a:defRPr>
+            </a:pPr>
+            <a:r>
+              <a:t>• Borrowing Quota Rejection: PL/SQL trigger and Flask controllers immediately reject a 4th concurrent loan request.</a:t>
             </a:r>
           </a:p>
           <a:p>
@@ -17377,12 +17395,12 @@
               </a:spcBef>
               <a:defRPr sz="900">
                 <a:solidFill>
-                  <a:srgbClr val="94A3B8"/>
-                </a:solidFill>
-              </a:defRPr>
-            </a:pPr>
-            <a:r>
-              <a:t>• Disciplinary Fine Locking: Borrowing is blocked when unpaid disciplinary fines exist on a patron's ledger.</a:t>
+                  <a:srgbClr val="475569"/>
+                </a:solidFill>
+              </a:defRPr>
+            </a:pPr>
+            <a:r>
+              <a:t>• Disciplinary Fine Locking: Loan issuance is blocked when outstanding disciplinary fines exist on a patron's record.</a:t>
             </a:r>
           </a:p>
         </p:txBody>
@@ -17420,7 +17438,7 @@
             <a:avLst/>
           </a:prstGeom>
           <a:solidFill>
-            <a:srgbClr val="0B0F19"/>
+            <a:srgbClr val="F8FAFC"/>
           </a:solidFill>
           <a:ln>
             <a:noFill/>
@@ -17456,14 +17474,14 @@
         </p:nvSpPr>
         <p:spPr>
           <a:xfrm>
-            <a:off x="731520" y="365760"/>
-            <a:ext cx="10728655" cy="36576"/>
+            <a:off x="0" y="0"/>
+            <a:ext cx="12191695" cy="73152"/>
           </a:xfrm>
           <a:prstGeom prst="rect">
             <a:avLst/>
           </a:prstGeom>
           <a:solidFill>
-            <a:srgbClr val="3B82F6"/>
+            <a:srgbClr val="1E40AF"/>
           </a:solidFill>
           <a:ln>
             <a:noFill/>
@@ -17499,8 +17517,8 @@
         </p:nvSpPr>
         <p:spPr>
           <a:xfrm>
-            <a:off x="731520" y="502920"/>
-            <a:ext cx="7315200" cy="274320"/>
+            <a:off x="731520" y="320040"/>
+            <a:ext cx="7772400" cy="256032"/>
           </a:xfrm>
           <a:prstGeom prst="rect">
             <a:avLst/>
@@ -17516,7 +17534,7 @@
             <a:pPr>
               <a:defRPr sz="1000" b="1">
                 <a:solidFill>
-                  <a:srgbClr val="06B6D4"/>
+                  <a:srgbClr val="1E40AF"/>
                 </a:solidFill>
                 <a:latin typeface="Segoe UI"/>
               </a:defRPr>
@@ -17535,7 +17553,7 @@
         </p:nvSpPr>
         <p:spPr>
           <a:xfrm>
-            <a:off x="731520" y="777240"/>
+            <a:off x="731520" y="594360"/>
             <a:ext cx="9601200" cy="548640"/>
           </a:xfrm>
           <a:prstGeom prst="rect">
@@ -17550,9 +17568,9 @@
           <a:lstStyle/>
           <a:p>
             <a:pPr>
-              <a:defRPr sz="2200" b="1">
-                <a:solidFill>
-                  <a:srgbClr val="F8FAFC"/>
+              <a:defRPr sz="2100" b="1">
+                <a:solidFill>
+                  <a:srgbClr val="0F2547"/>
                 </a:solidFill>
                 <a:latin typeface="Segoe UI"/>
               </a:defRPr>
@@ -17571,7 +17589,7 @@
         </p:nvSpPr>
         <p:spPr>
           <a:xfrm>
-            <a:off x="10515600" y="640080"/>
+            <a:off x="10515600" y="411480"/>
             <a:ext cx="914400" cy="365760"/>
           </a:xfrm>
           <a:prstGeom prst="rect">
@@ -17588,9 +17606,9 @@
             <a:pPr algn="r">
               <a:defRPr sz="1100" b="1">
                 <a:solidFill>
-                  <a:srgbClr val="64748B"/>
-                </a:solidFill>
-                <a:latin typeface="Consolas"/>
+                  <a:srgbClr val="475569"/>
+                </a:solidFill>
+                <a:latin typeface="Segoe UI"/>
               </a:defRPr>
             </a:pPr>
             <a:r>
@@ -17607,18 +17625,18 @@
         </p:nvSpPr>
         <p:spPr>
           <a:xfrm>
-            <a:off x="731520" y="1554480"/>
-            <a:ext cx="10728655" cy="2240280"/>
+            <a:off x="731520" y="1371600"/>
+            <a:ext cx="10728655" cy="2331720"/>
           </a:xfrm>
           <a:prstGeom prst="roundRect">
             <a:avLst/>
           </a:prstGeom>
           <a:solidFill>
-            <a:srgbClr val="161E31"/>
+            <a:srgbClr val="FFFFFF"/>
           </a:solidFill>
           <a:ln w="12700">
             <a:solidFill>
-              <a:srgbClr val="2D3C5A"/>
+              <a:srgbClr val="CBD5E1"/>
             </a:solidFill>
           </a:ln>
         </p:spPr>
@@ -17652,8 +17670,8 @@
         </p:nvSpPr>
         <p:spPr>
           <a:xfrm>
-            <a:off x="914400" y="1645920"/>
-            <a:ext cx="10362895" cy="2011680"/>
+            <a:off x="914400" y="1481328"/>
+            <a:ext cx="10362895" cy="2103120"/>
           </a:xfrm>
           <a:prstGeom prst="rect">
             <a:avLst/>
@@ -17669,7 +17687,7 @@
             <a:pPr>
               <a:defRPr sz="1100" b="1">
                 <a:solidFill>
-                  <a:srgbClr val="06B6D4"/>
+                  <a:srgbClr val="0F2547"/>
                 </a:solidFill>
                 <a:latin typeface="Segoe UI"/>
               </a:defRPr>
@@ -17685,7 +17703,7 @@
               </a:spcBef>
               <a:defRPr sz="850">
                 <a:solidFill>
-                  <a:srgbClr val="BAE6FD"/>
+                  <a:srgbClr val="0F172A"/>
                 </a:solidFill>
                 <a:latin typeface="Consolas"/>
               </a:defRPr>
@@ -17729,12 +17747,12 @@
               </a:spcBef>
               <a:defRPr sz="900">
                 <a:solidFill>
-                  <a:srgbClr val="94A3B8"/>
-                </a:solidFill>
-              </a:defRPr>
-            </a:pPr>
-            <a:r>
-              <a:t>Operational Purpose: Supports instant filtering across titles, hyphenated/unhyphenated ISBNs, and authors with copy availability metrics.</a:t>
+                  <a:srgbClr val="475569"/>
+                </a:solidFill>
+              </a:defRPr>
+            </a:pPr>
+            <a:r>
+              <a:t>Operational Purpose: Enables fast searching across titles, authors, and hyphenated/unhyphenated ISBNs with real-time copy availability counts.</a:t>
             </a:r>
           </a:p>
         </p:txBody>
@@ -17747,18 +17765,18 @@
         </p:nvSpPr>
         <p:spPr>
           <a:xfrm>
-            <a:off x="731520" y="3977639"/>
-            <a:ext cx="10728655" cy="2240280"/>
+            <a:off x="731520" y="3840480"/>
+            <a:ext cx="10728655" cy="2331720"/>
           </a:xfrm>
           <a:prstGeom prst="roundRect">
             <a:avLst/>
           </a:prstGeom>
           <a:solidFill>
-            <a:srgbClr val="161E31"/>
+            <a:srgbClr val="FFFFFF"/>
           </a:solidFill>
           <a:ln w="12700">
             <a:solidFill>
-              <a:srgbClr val="2D3C5A"/>
+              <a:srgbClr val="CBD5E1"/>
             </a:solidFill>
           </a:ln>
         </p:spPr>
@@ -17792,8 +17810,8 @@
         </p:nvSpPr>
         <p:spPr>
           <a:xfrm>
-            <a:off x="914400" y="4069079"/>
-            <a:ext cx="10362895" cy="2011680"/>
+            <a:off x="914400" y="3950208"/>
+            <a:ext cx="10362895" cy="2103120"/>
           </a:xfrm>
           <a:prstGeom prst="rect">
             <a:avLst/>
@@ -17809,7 +17827,7 @@
             <a:pPr>
               <a:defRPr sz="1100" b="1">
                 <a:solidFill>
-                  <a:srgbClr val="06B6D4"/>
+                  <a:srgbClr val="0F2547"/>
                 </a:solidFill>
                 <a:latin typeface="Segoe UI"/>
               </a:defRPr>
@@ -17825,7 +17843,7 @@
               </a:spcBef>
               <a:defRPr sz="850">
                 <a:solidFill>
-                  <a:srgbClr val="BAE6FD"/>
+                  <a:srgbClr val="0F172A"/>
                 </a:solidFill>
                 <a:latin typeface="Consolas"/>
               </a:defRPr>
@@ -17862,12 +17880,12 @@
               </a:spcBef>
               <a:defRPr sz="900">
                 <a:solidFill>
-                  <a:srgbClr val="94A3B8"/>
-                </a:solidFill>
-              </a:defRPr>
-            </a:pPr>
-            <a:r>
-              <a:t>Operational Purpose: Guarantees that a physical book copy cannot be double-issued to another patron concurrently.</a:t>
+                  <a:srgbClr val="475569"/>
+                </a:solidFill>
+              </a:defRPr>
+            </a:pPr>
+            <a:r>
+              <a:t>Operational Purpose: Guarantees that a physical copy cannot be concurrently double-issued to another patron at the circulation desk.</a:t>
             </a:r>
           </a:p>
         </p:txBody>

--- a/VITCC_Library_Management_System_Presentation.pptx
+++ b/VITCC_Library_Management_System_Presentation.pptx
@@ -6958,7 +6958,7 @@
             <a:br/>
             <a:br/>
             <a:r>
-              <a:t>        -- Auto-calculate Rs. 5/day fine</a:t>
+              <a:t>        -- Auto-calculate Rs. 10/day fine</a:t>
             </a:r>
             <a:br/>
             <a:r>
@@ -6966,7 +6966,7 @@
             </a:r>
             <a:br/>
             <a:r>
-              <a:t>        SET fine_amount = r_ov.days_late * 5.0</a:t>
+              <a:t>        SET fine_amount = r_ov.days_late * 10.0</a:t>
             </a:r>
             <a:br/>
             <a:r>
@@ -12373,7 +12373,7 @@
                   <a:srgbClr val="1E40AF"/>
                 </a:solidFill>
               </a:rPr>
-              <a:t>Dual-Database Mastery
+              <a:t>Database Migration Mastery
 </a:t>
             </a:r>
             <a:r>
@@ -12382,7 +12382,7 @@
                   <a:srgbClr val="475569"/>
                 </a:solidFill>
               </a:rPr>
-              <a:t>Gained deep architectural expertise in bridging transactional relational schemas (Oracle 21c) with connected graph stores (Neo4j AuraDB).</a:t>
+              <a:t>Gained deep architectural expertise by successfully migrating a transactional relational schema (Oracle 21c) into a modern, highly-connected graph store (Neo4j AuraDB).</a:t>
             </a:r>
           </a:p>
           <a:p>
@@ -13140,7 +13140,7 @@
               </a:defRPr>
             </a:pPr>
             <a:r>
-              <a:t>• Dual-Database Engineering: Combines an enterprise Oracle 21c relational schema with a Neo4j AuraDB property graph.</a:t>
+              <a:t>• Phased Database Migration: Phase 1 utilized Oracle 21c for strict relational modeling, while Phase 2 (DA-3) completely migrated the backend to Neo4j AuraDB to unlock advanced graph traversals and recommendations.</a:t>
             </a:r>
           </a:p>
           <a:p>
@@ -13170,7 +13170,7 @@
               </a:defRPr>
             </a:pPr>
             <a:r>
-              <a:t>• Automated Circulation Rules: Real-time 3-book borrowing quota enforcement and daily Rs. 5/day overdue fine calculation.</a:t>
+              <a:t>• Automated Circulation Rules: Real-time 3-book borrowing quota enforcement and daily Rs. 10/day overdue fine calculation.</a:t>
             </a:r>
           </a:p>
           <a:p>
@@ -14209,21 +14209,6 @@
               </a:defRPr>
             </a:pPr>
             <a:r>
-              <a:t>• Oracle Client / cx_Oracle connector executing transaction-managed PL/SQL stored procedures.</a:t>
-            </a:r>
-          </a:p>
-          <a:p>
-            <a:pPr>
-              <a:spcBef>
-                <a:spcPts val="200"/>
-              </a:spcBef>
-              <a:defRPr sz="950">
-                <a:solidFill>
-                  <a:srgbClr val="1E293B"/>
-                </a:solidFill>
-              </a:defRPr>
-            </a:pPr>
-            <a:r>
               <a:t>• Dynamic patron privacy masking to anonymize fellow student loan requests on shared canvases.</a:t>
             </a:r>
           </a:p>
@@ -14360,7 +14345,7 @@
               </a:defRPr>
             </a:pPr>
             <a:r>
-              <a:t>Relational Database (Oracle) &amp; Property Graph (Neo4j)</a:t>
+              <a:t>Phase 1 (Legacy Oracle) &amp; Phase 2 (Live Neo4j Graph)</a:t>
             </a:r>
           </a:p>
         </p:txBody>
@@ -14941,7 +14926,7 @@
                   <a:srgbClr val="475569"/>
                 </a:solidFill>
               </a:rPr>
-              <a:t>Overdue book returns automatically generate a financial disciplinary record (Rs. 5 per overdue day).</a:t>
+              <a:t>Overdue book returns automatically generate a financial disciplinary record (Rs. 10 per overdue day).</a:t>
             </a:r>
           </a:p>
           <a:p>
